--- a/lecture_slides/Week3_Lecture6_Transfer_Functions_PoleZero_091026_forClass.pptx
+++ b/lecture_slides/Week3_Lecture6_Transfer_Functions_PoleZero_091026_forClass.pptx
@@ -32,6 +32,7 @@
     <p:sldId id="281" r:id="rId26"/>
     <p:sldId id="277" r:id="rId27"/>
     <p:sldId id="278" r:id="rId28"/>
+    <p:sldId id="283" r:id="rId29"/>
   </p:sldIdLst>
   <p:sldSz cx="12192000" cy="6858000"/>
   <p:notesSz cx="6858000" cy="12192000"/>
@@ -297,7 +298,7 @@
           </a:prstGeom>
           <a:extLst>
             <a:ext uri="{C572A759-6A51-4108-AA02-DFA0A04FC94B}">
-              <ma14:wrappingTextBoxFlag xmlns="" xmlns:ma14="http://schemas.microsoft.com/office/mac/drawingml/2011/main" val="0"/>
+              <ma14:wrappingTextBoxFlag xmlns:ma14="http://schemas.microsoft.com/office/mac/drawingml/2011/main" xmlns="" val="0"/>
             </a:ext>
           </a:extLst>
         </p:spPr>
@@ -375,7 +376,7 @@
           </a:prstGeom>
           <a:extLst>
             <a:ext uri="{C572A759-6A51-4108-AA02-DFA0A04FC94B}">
-              <ma14:wrappingTextBoxFlag xmlns="" xmlns:ma14="http://schemas.microsoft.com/office/mac/drawingml/2011/main" val="0"/>
+              <ma14:wrappingTextBoxFlag xmlns:ma14="http://schemas.microsoft.com/office/mac/drawingml/2011/main" xmlns="" val="0"/>
             </a:ext>
           </a:extLst>
         </p:spPr>
@@ -2352,93 +2353,224 @@
           </a:p>
         </p:txBody>
       </p:sp>
-      <p:sp>
-        <p:nvSpPr>
-          <p:cNvPr id="9" name="TextBox 8"/>
-          <p:cNvSpPr txBox="1"/>
-          <p:nvPr/>
-        </p:nvSpPr>
-        <p:spPr>
-          <a:xfrm>
-            <a:off x="7726679" y="2286000"/>
-            <a:ext cx="3154680" cy="2286000"/>
-          </a:xfrm>
-          <a:prstGeom prst="rect">
-            <a:avLst/>
-          </a:prstGeom>
-          <a:noFill/>
-        </p:spPr>
-        <p:txBody>
-          <a:bodyPr wrap="square" lIns="73152" rIns="36576" anchor="t">
-            <a:spAutoFit/>
-          </a:bodyPr>
-          <a:lstStyle/>
-          <a:p>
-            <a:pPr>
-              <a:spcAft>
-                <a:spcPts val="500"/>
-              </a:spcAft>
-              <a:defRPr sz="1600">
-                <a:solidFill>
-                  <a:srgbClr val="17212B"/>
-                </a:solidFill>
-                <a:latin typeface="Aptos"/>
-              </a:defRPr>
-            </a:pPr>
-            <a:r>
-              <a:t>• At ω equal to the zero angle, e^{jω}=z₀.</a:t>
-            </a:r>
-          </a:p>
-          <a:p>
-            <a:pPr>
-              <a:spcAft>
-                <a:spcPts val="500"/>
-              </a:spcAft>
-              <a:defRPr sz="1600">
-                <a:solidFill>
-                  <a:srgbClr val="17212B"/>
-                </a:solidFill>
-                <a:latin typeface="Aptos"/>
-              </a:defRPr>
-            </a:pPr>
-            <a:r>
-              <a:t>• The zero distance is exactly 0.</a:t>
-            </a:r>
-          </a:p>
-          <a:p>
-            <a:pPr>
-              <a:spcAft>
-                <a:spcPts val="500"/>
-              </a:spcAft>
-              <a:defRPr sz="1600">
-                <a:solidFill>
-                  <a:srgbClr val="17212B"/>
-                </a:solidFill>
-                <a:latin typeface="Aptos"/>
-              </a:defRPr>
-            </a:pPr>
-            <a:r>
-              <a:t>• Product in the numerator becomes 0.</a:t>
-            </a:r>
-          </a:p>
-          <a:p>
-            <a:pPr>
-              <a:spcAft>
-                <a:spcPts val="500"/>
-              </a:spcAft>
-              <a:defRPr sz="1600">
-                <a:solidFill>
-                  <a:srgbClr val="17212B"/>
-                </a:solidFill>
-                <a:latin typeface="Aptos"/>
-              </a:defRPr>
-            </a:pPr>
-            <a:r>
-              <a:t>• Therefore |H|=0: a perfect notch.</a:t>
-            </a:r>
-          </a:p>
-        </p:txBody>
-      </p:sp>
+      <mc:AlternateContent xmlns:mc="http://schemas.openxmlformats.org/markup-compatibility/2006">
+        <mc:Choice xmlns:a14="http://schemas.microsoft.com/office/drawing/2010/main" Requires="a14">
+          <p:sp>
+            <p:nvSpPr>
+              <p:cNvPr id="9" name="TextBox 8"/>
+              <p:cNvSpPr txBox="1"/>
+              <p:nvPr/>
+            </p:nvSpPr>
+            <p:spPr>
+              <a:xfrm>
+                <a:off x="7726678" y="2286000"/>
+                <a:ext cx="3350031" cy="1770036"/>
+              </a:xfrm>
+              <a:prstGeom prst="rect">
+                <a:avLst/>
+              </a:prstGeom>
+              <a:noFill/>
+            </p:spPr>
+            <p:txBody>
+              <a:bodyPr wrap="square" lIns="73152" rIns="36576" anchor="t">
+                <a:spAutoFit/>
+              </a:bodyPr>
+              <a:lstStyle/>
+              <a:p>
+                <a:pPr>
+                  <a:spcAft>
+                    <a:spcPts val="500"/>
+                  </a:spcAft>
+                  <a:defRPr sz="1600">
+                    <a:solidFill>
+                      <a:srgbClr val="17212B"/>
+                    </a:solidFill>
+                    <a:latin typeface="Aptos"/>
+                  </a:defRPr>
+                </a:pPr>
+                <a:r>
+                  <a:rPr lang="en-US" dirty="0"/>
+                  <a:t>• At </a:t>
+                </a:r>
+                <a:r>
+                  <a:rPr lang="el-GR" dirty="0"/>
+                  <a:t>ω </a:t>
+                </a:r>
+                <a:r>
+                  <a:rPr lang="en-US" dirty="0"/>
+                  <a:t>equal to the zero angle, </a:t>
+                </a:r>
+                <a14:m>
+                  <m:oMath xmlns:m="http://schemas.openxmlformats.org/officeDocument/2006/math">
+                    <m:sSup>
+                      <m:sSupPr>
+                        <m:ctrlPr>
+                          <a:rPr lang="en-US" b="0" i="1" smtClean="0">
+                            <a:latin typeface="Cambria Math" panose="02040503050406030204" pitchFamily="18" charset="0"/>
+                          </a:rPr>
+                        </m:ctrlPr>
+                      </m:sSupPr>
+                      <m:e>
+                        <m:r>
+                          <a:rPr lang="en-US" b="0" i="1" smtClean="0">
+                            <a:latin typeface="Cambria Math" panose="02040503050406030204" pitchFamily="18" charset="0"/>
+                          </a:rPr>
+                          <m:t>𝑒</m:t>
+                        </m:r>
+                      </m:e>
+                      <m:sup>
+                        <m:r>
+                          <a:rPr lang="en-US" b="0" i="1" smtClean="0">
+                            <a:latin typeface="Cambria Math" panose="02040503050406030204" pitchFamily="18" charset="0"/>
+                          </a:rPr>
+                          <m:t>𝑗</m:t>
+                        </m:r>
+                        <m:r>
+                          <a:rPr lang="en-US" b="0" i="1" smtClean="0">
+                            <a:latin typeface="Cambria Math" panose="02040503050406030204" pitchFamily="18" charset="0"/>
+                            <a:ea typeface="Cambria Math" panose="02040503050406030204" pitchFamily="18" charset="0"/>
+                          </a:rPr>
+                          <m:t>𝜔</m:t>
+                        </m:r>
+                      </m:sup>
+                    </m:sSup>
+                    <m:r>
+                      <a:rPr lang="en-US" b="0" i="1" smtClean="0">
+                        <a:latin typeface="Cambria Math" panose="02040503050406030204" pitchFamily="18" charset="0"/>
+                        <a:ea typeface="Cambria Math" panose="02040503050406030204" pitchFamily="18" charset="0"/>
+                      </a:rPr>
+                      <m:t>=</m:t>
+                    </m:r>
+                    <m:sSub>
+                      <m:sSubPr>
+                        <m:ctrlPr>
+                          <a:rPr lang="en-US" b="0" i="1" smtClean="0">
+                            <a:latin typeface="Cambria Math" panose="02040503050406030204" pitchFamily="18" charset="0"/>
+                            <a:ea typeface="Cambria Math" panose="02040503050406030204" pitchFamily="18" charset="0"/>
+                          </a:rPr>
+                        </m:ctrlPr>
+                      </m:sSubPr>
+                      <m:e>
+                        <m:r>
+                          <a:rPr lang="en-US" b="0" i="1" smtClean="0">
+                            <a:latin typeface="Cambria Math" panose="02040503050406030204" pitchFamily="18" charset="0"/>
+                            <a:ea typeface="Cambria Math" panose="02040503050406030204" pitchFamily="18" charset="0"/>
+                          </a:rPr>
+                          <m:t>𝑧</m:t>
+                        </m:r>
+                      </m:e>
+                      <m:sub>
+                        <m:r>
+                          <a:rPr lang="en-US" b="0" i="1" smtClean="0">
+                            <a:latin typeface="Cambria Math" panose="02040503050406030204" pitchFamily="18" charset="0"/>
+                            <a:ea typeface="Cambria Math" panose="02040503050406030204" pitchFamily="18" charset="0"/>
+                          </a:rPr>
+                          <m:t>0</m:t>
+                        </m:r>
+                      </m:sub>
+                    </m:sSub>
+                  </m:oMath>
+                </a14:m>
+                <a:endParaRPr lang="ar-AE" dirty="0"/>
+              </a:p>
+              <a:p>
+                <a:pPr>
+                  <a:spcAft>
+                    <a:spcPts val="500"/>
+                  </a:spcAft>
+                  <a:defRPr sz="1600">
+                    <a:solidFill>
+                      <a:srgbClr val="17212B"/>
+                    </a:solidFill>
+                    <a:latin typeface="Aptos"/>
+                  </a:defRPr>
+                </a:pPr>
+                <a:r>
+                  <a:rPr lang="ar-AE" dirty="0"/>
+                  <a:t>• </a:t>
+                </a:r>
+                <a:r>
+                  <a:rPr lang="en-US" dirty="0"/>
+                  <a:t>The zero distance is exactly 0.</a:t>
+                </a:r>
+              </a:p>
+              <a:p>
+                <a:pPr>
+                  <a:spcAft>
+                    <a:spcPts val="500"/>
+                  </a:spcAft>
+                  <a:defRPr sz="1600">
+                    <a:solidFill>
+                      <a:srgbClr val="17212B"/>
+                    </a:solidFill>
+                    <a:latin typeface="Aptos"/>
+                  </a:defRPr>
+                </a:pPr>
+                <a:r>
+                  <a:rPr lang="en-US" dirty="0"/>
+                  <a:t>• Product in the numerator becomes 0.</a:t>
+                </a:r>
+              </a:p>
+              <a:p>
+                <a:pPr>
+                  <a:spcAft>
+                    <a:spcPts val="500"/>
+                  </a:spcAft>
+                  <a:defRPr sz="1600">
+                    <a:solidFill>
+                      <a:srgbClr val="17212B"/>
+                    </a:solidFill>
+                    <a:latin typeface="Aptos"/>
+                  </a:defRPr>
+                </a:pPr>
+                <a:r>
+                  <a:rPr lang="en-US" dirty="0"/>
+                  <a:t>• Therefore |H|=0: a perfect notch.</a:t>
+                </a:r>
+                <a:endParaRPr dirty="0"/>
+              </a:p>
+            </p:txBody>
+          </p:sp>
+        </mc:Choice>
+        <mc:Fallback>
+          <p:sp>
+            <p:nvSpPr>
+              <p:cNvPr id="9" name="TextBox 8"/>
+              <p:cNvSpPr txBox="1">
+                <a:spLocks noRot="1" noChangeAspect="1" noMove="1" noResize="1" noEditPoints="1" noAdjustHandles="1" noChangeArrowheads="1" noChangeShapeType="1" noTextEdit="1"/>
+              </p:cNvSpPr>
+              <p:nvPr/>
+            </p:nvSpPr>
+            <p:spPr>
+              <a:xfrm>
+                <a:off x="7726678" y="2286000"/>
+                <a:ext cx="3350031" cy="1770036"/>
+              </a:xfrm>
+              <a:prstGeom prst="rect">
+                <a:avLst/>
+              </a:prstGeom>
+              <a:blipFill>
+                <a:blip r:embed="rId3"/>
+                <a:stretch>
+                  <a:fillRect l="-1636" t="-690" r="-2000" b="-3448"/>
+                </a:stretch>
+              </a:blipFill>
+            </p:spPr>
+            <p:txBody>
+              <a:bodyPr/>
+              <a:lstStyle/>
+              <a:p>
+                <a:r>
+                  <a:rPr lang="en-US">
+                    <a:noFill/>
+                  </a:rPr>
+                  <a:t> </a:t>
+                </a:r>
+              </a:p>
+            </p:txBody>
+          </p:sp>
+        </mc:Fallback>
+      </mc:AlternateContent>
       <p:sp>
         <p:nvSpPr>
           <p:cNvPr id="10" name="TextBox 9"/>
@@ -3667,77 +3799,266 @@
           </a:p>
         </p:txBody>
       </p:sp>
-      <p:sp>
-        <p:nvSpPr>
-          <p:cNvPr id="10" name="TextBox 9"/>
-          <p:cNvSpPr txBox="1"/>
-          <p:nvPr/>
-        </p:nvSpPr>
-        <p:spPr>
-          <a:xfrm>
-            <a:off x="8138160" y="3108960"/>
-            <a:ext cx="2971800" cy="1645920"/>
-          </a:xfrm>
-          <a:prstGeom prst="rect">
-            <a:avLst/>
-          </a:prstGeom>
-          <a:noFill/>
-        </p:spPr>
-        <p:txBody>
-          <a:bodyPr wrap="square" lIns="73152" rIns="36576" anchor="t">
-            <a:spAutoFit/>
-          </a:bodyPr>
-          <a:lstStyle/>
-          <a:p>
-            <a:pPr>
-              <a:spcAft>
-                <a:spcPts val="500"/>
-              </a:spcAft>
-              <a:defRPr sz="1500">
-                <a:solidFill>
-                  <a:srgbClr val="17212B"/>
-                </a:solidFill>
-                <a:latin typeface="Aptos"/>
-              </a:defRPr>
-            </a:pPr>
-            <a:r>
-              <a:t>• Zeros: e^{±jω₀}</a:t>
-            </a:r>
-          </a:p>
-          <a:p>
-            <a:pPr>
-              <a:spcAft>
-                <a:spcPts val="500"/>
-              </a:spcAft>
-              <a:defRPr sz="1500">
-                <a:solidFill>
-                  <a:srgbClr val="17212B"/>
-                </a:solidFill>
-                <a:latin typeface="Aptos"/>
-              </a:defRPr>
-            </a:pPr>
-            <a:r>
-              <a:t>• Nearby poles at r e^{±jω₀} make a narrow, well-behaved notch.</a:t>
-            </a:r>
-          </a:p>
-          <a:p>
-            <a:pPr>
-              <a:spcAft>
-                <a:spcPts val="500"/>
-              </a:spcAft>
-              <a:defRPr sz="1500">
-                <a:solidFill>
-                  <a:srgbClr val="17212B"/>
-                </a:solidFill>
-                <a:latin typeface="Aptos"/>
-              </a:defRPr>
-            </a:pPr>
-            <a:r>
-              <a:t>• Choose r&lt;1 for causal stability.</a:t>
-            </a:r>
-          </a:p>
-        </p:txBody>
-      </p:sp>
+      <mc:AlternateContent xmlns:mc="http://schemas.openxmlformats.org/markup-compatibility/2006">
+        <mc:Choice xmlns:a14="http://schemas.microsoft.com/office/drawing/2010/main" Requires="a14">
+          <p:sp>
+            <p:nvSpPr>
+              <p:cNvPr id="10" name="TextBox 9"/>
+              <p:cNvSpPr txBox="1"/>
+              <p:nvPr/>
+            </p:nvSpPr>
+            <p:spPr>
+              <a:xfrm>
+                <a:off x="8138160" y="3108960"/>
+                <a:ext cx="2971800" cy="1158907"/>
+              </a:xfrm>
+              <a:prstGeom prst="rect">
+                <a:avLst/>
+              </a:prstGeom>
+              <a:noFill/>
+            </p:spPr>
+            <p:txBody>
+              <a:bodyPr wrap="square" lIns="73152" rIns="36576" anchor="t">
+                <a:spAutoFit/>
+              </a:bodyPr>
+              <a:lstStyle/>
+              <a:p>
+                <a:pPr>
+                  <a:spcAft>
+                    <a:spcPts val="500"/>
+                  </a:spcAft>
+                  <a:defRPr sz="1500">
+                    <a:solidFill>
+                      <a:srgbClr val="17212B"/>
+                    </a:solidFill>
+                    <a:latin typeface="Aptos"/>
+                  </a:defRPr>
+                </a:pPr>
+                <a:r>
+                  <a:rPr lang="en-US" dirty="0"/>
+                  <a:t>• Zeros: </a:t>
+                </a:r>
+                <a14:m>
+                  <m:oMath xmlns:m="http://schemas.openxmlformats.org/officeDocument/2006/math">
+                    <m:sSup>
+                      <m:sSupPr>
+                        <m:ctrlPr>
+                          <a:rPr lang="en-US" b="0" i="1" dirty="0" smtClean="0">
+                            <a:latin typeface="Cambria Math" panose="02040503050406030204" pitchFamily="18" charset="0"/>
+                          </a:rPr>
+                        </m:ctrlPr>
+                      </m:sSupPr>
+                      <m:e>
+                        <m:r>
+                          <a:rPr lang="en-US" b="0" i="1" dirty="0" smtClean="0">
+                            <a:latin typeface="Cambria Math" panose="02040503050406030204" pitchFamily="18" charset="0"/>
+                          </a:rPr>
+                          <m:t>𝑒</m:t>
+                        </m:r>
+                      </m:e>
+                      <m:sup>
+                        <m:r>
+                          <a:rPr lang="en-US" b="0" i="1" dirty="0" smtClean="0">
+                            <a:latin typeface="Cambria Math" panose="02040503050406030204" pitchFamily="18" charset="0"/>
+                            <a:ea typeface="Cambria Math" panose="02040503050406030204" pitchFamily="18" charset="0"/>
+                          </a:rPr>
+                          <m:t>±</m:t>
+                        </m:r>
+                        <m:r>
+                          <a:rPr lang="en-US" b="0" i="1" dirty="0" smtClean="0">
+                            <a:latin typeface="Cambria Math" panose="02040503050406030204" pitchFamily="18" charset="0"/>
+                          </a:rPr>
+                          <m:t>𝑗</m:t>
+                        </m:r>
+                        <m:sSub>
+                          <m:sSubPr>
+                            <m:ctrlPr>
+                              <a:rPr lang="en-US" b="0" i="1" dirty="0" smtClean="0">
+                                <a:latin typeface="Cambria Math" panose="02040503050406030204" pitchFamily="18" charset="0"/>
+                                <a:ea typeface="Cambria Math" panose="02040503050406030204" pitchFamily="18" charset="0"/>
+                              </a:rPr>
+                            </m:ctrlPr>
+                          </m:sSubPr>
+                          <m:e>
+                            <m:r>
+                              <a:rPr lang="en-US" b="0" i="1" dirty="0" smtClean="0">
+                                <a:latin typeface="Cambria Math" panose="02040503050406030204" pitchFamily="18" charset="0"/>
+                                <a:ea typeface="Cambria Math" panose="02040503050406030204" pitchFamily="18" charset="0"/>
+                              </a:rPr>
+                              <m:t>𝜔</m:t>
+                            </m:r>
+                          </m:e>
+                          <m:sub>
+                            <m:r>
+                              <a:rPr lang="en-US" b="0" i="1" dirty="0" smtClean="0">
+                                <a:latin typeface="Cambria Math" panose="02040503050406030204" pitchFamily="18" charset="0"/>
+                                <a:ea typeface="Cambria Math" panose="02040503050406030204" pitchFamily="18" charset="0"/>
+                              </a:rPr>
+                              <m:t>0</m:t>
+                            </m:r>
+                          </m:sub>
+                        </m:sSub>
+                      </m:sup>
+                    </m:sSup>
+                  </m:oMath>
+                </a14:m>
+                <a:endParaRPr lang="ar-AE" dirty="0"/>
+              </a:p>
+              <a:p>
+                <a:pPr>
+                  <a:spcAft>
+                    <a:spcPts val="500"/>
+                  </a:spcAft>
+                  <a:defRPr sz="1500">
+                    <a:solidFill>
+                      <a:srgbClr val="17212B"/>
+                    </a:solidFill>
+                    <a:latin typeface="Aptos"/>
+                  </a:defRPr>
+                </a:pPr>
+                <a:r>
+                  <a:rPr lang="ar-AE" dirty="0"/>
+                  <a:t>• </a:t>
+                </a:r>
+                <a:r>
+                  <a:rPr lang="en-US" dirty="0"/>
+                  <a:t>Nearby poles at </a:t>
+                </a:r>
+                <a14:m>
+                  <m:oMath xmlns:m="http://schemas.openxmlformats.org/officeDocument/2006/math">
+                    <m:r>
+                      <a:rPr lang="en-US" b="0" i="1" smtClean="0">
+                        <a:latin typeface="Cambria Math" panose="02040503050406030204" pitchFamily="18" charset="0"/>
+                      </a:rPr>
+                      <m:t>𝑟</m:t>
+                    </m:r>
+                    <m:sSup>
+                      <m:sSupPr>
+                        <m:ctrlPr>
+                          <a:rPr lang="en-US" b="0" i="1" smtClean="0">
+                            <a:latin typeface="Cambria Math" panose="02040503050406030204" pitchFamily="18" charset="0"/>
+                          </a:rPr>
+                        </m:ctrlPr>
+                      </m:sSupPr>
+                      <m:e>
+                        <m:r>
+                          <a:rPr lang="en-US" b="0" i="1" smtClean="0">
+                            <a:latin typeface="Cambria Math" panose="02040503050406030204" pitchFamily="18" charset="0"/>
+                          </a:rPr>
+                          <m:t>𝑒</m:t>
+                        </m:r>
+                      </m:e>
+                      <m:sup>
+                        <m:r>
+                          <a:rPr lang="en-US" b="0" i="1" smtClean="0">
+                            <a:latin typeface="Cambria Math" panose="02040503050406030204" pitchFamily="18" charset="0"/>
+                            <a:ea typeface="Cambria Math" panose="02040503050406030204" pitchFamily="18" charset="0"/>
+                          </a:rPr>
+                          <m:t>±</m:t>
+                        </m:r>
+                        <m:r>
+                          <a:rPr lang="en-US" b="0" i="1" smtClean="0">
+                            <a:latin typeface="Cambria Math" panose="02040503050406030204" pitchFamily="18" charset="0"/>
+                          </a:rPr>
+                          <m:t>𝑗</m:t>
+                        </m:r>
+                        <m:sSub>
+                          <m:sSubPr>
+                            <m:ctrlPr>
+                              <a:rPr lang="en-US" b="0" i="1" smtClean="0">
+                                <a:latin typeface="Cambria Math" panose="02040503050406030204" pitchFamily="18" charset="0"/>
+                                <a:ea typeface="Cambria Math" panose="02040503050406030204" pitchFamily="18" charset="0"/>
+                              </a:rPr>
+                            </m:ctrlPr>
+                          </m:sSubPr>
+                          <m:e>
+                            <m:r>
+                              <a:rPr lang="en-US" b="0" i="1" smtClean="0">
+                                <a:latin typeface="Cambria Math" panose="02040503050406030204" pitchFamily="18" charset="0"/>
+                                <a:ea typeface="Cambria Math" panose="02040503050406030204" pitchFamily="18" charset="0"/>
+                              </a:rPr>
+                              <m:t>𝜔</m:t>
+                            </m:r>
+                          </m:e>
+                          <m:sub>
+                            <m:r>
+                              <a:rPr lang="en-US" b="0" i="1" smtClean="0">
+                                <a:latin typeface="Cambria Math" panose="02040503050406030204" pitchFamily="18" charset="0"/>
+                                <a:ea typeface="Cambria Math" panose="02040503050406030204" pitchFamily="18" charset="0"/>
+                              </a:rPr>
+                              <m:t>0</m:t>
+                            </m:r>
+                          </m:sub>
+                        </m:sSub>
+                      </m:sup>
+                    </m:sSup>
+                  </m:oMath>
+                </a14:m>
+                <a:r>
+                  <a:rPr lang="en-US" dirty="0"/>
+                  <a:t> make a narrow, well-behaved notch.</a:t>
+                </a:r>
+              </a:p>
+              <a:p>
+                <a:pPr>
+                  <a:spcAft>
+                    <a:spcPts val="500"/>
+                  </a:spcAft>
+                  <a:defRPr sz="1500">
+                    <a:solidFill>
+                      <a:srgbClr val="17212B"/>
+                    </a:solidFill>
+                    <a:latin typeface="Aptos"/>
+                  </a:defRPr>
+                </a:pPr>
+                <a:r>
+                  <a:rPr lang="en-US" dirty="0"/>
+                  <a:t>• Choose r&lt;1 for causal stability.</a:t>
+                </a:r>
+                <a:endParaRPr dirty="0"/>
+              </a:p>
+            </p:txBody>
+          </p:sp>
+        </mc:Choice>
+        <mc:Fallback>
+          <p:sp>
+            <p:nvSpPr>
+              <p:cNvPr id="10" name="TextBox 9"/>
+              <p:cNvSpPr txBox="1">
+                <a:spLocks noRot="1" noChangeAspect="1" noMove="1" noResize="1" noEditPoints="1" noAdjustHandles="1" noChangeArrowheads="1" noChangeShapeType="1" noTextEdit="1"/>
+              </p:cNvSpPr>
+              <p:nvPr/>
+            </p:nvSpPr>
+            <p:spPr>
+              <a:xfrm>
+                <a:off x="8138160" y="3108960"/>
+                <a:ext cx="2971800" cy="1158907"/>
+              </a:xfrm>
+              <a:prstGeom prst="rect">
+                <a:avLst/>
+              </a:prstGeom>
+              <a:blipFill>
+                <a:blip r:embed="rId3"/>
+                <a:stretch>
+                  <a:fillRect l="-1639" b="-5263"/>
+                </a:stretch>
+              </a:blipFill>
+            </p:spPr>
+            <p:txBody>
+              <a:bodyPr/>
+              <a:lstStyle/>
+              <a:p>
+                <a:r>
+                  <a:rPr lang="en-US">
+                    <a:noFill/>
+                  </a:rPr>
+                  <a:t> </a:t>
+                </a:r>
+              </a:p>
+            </p:txBody>
+          </p:sp>
+        </mc:Fallback>
+      </mc:AlternateContent>
       <p:sp>
         <p:nvSpPr>
           <p:cNvPr id="11" name="TextBox 10"/>
@@ -10373,41 +10694,163 @@
           </a:p>
         </p:txBody>
       </p:sp>
-      <p:sp>
-        <p:nvSpPr>
-          <p:cNvPr id="20" name="TextBox 19"/>
-          <p:cNvSpPr txBox="1"/>
-          <p:nvPr/>
-        </p:nvSpPr>
-        <p:spPr>
-          <a:xfrm>
-            <a:off x="7607808" y="2578608"/>
-            <a:ext cx="1645920" cy="530352"/>
-          </a:xfrm>
-          <a:prstGeom prst="rect">
-            <a:avLst/>
-          </a:prstGeom>
-          <a:noFill/>
-        </p:spPr>
-        <p:txBody>
-          <a:bodyPr wrap="square" lIns="45720" rIns="45720" anchor="ctr">
-            <a:spAutoFit/>
-          </a:bodyPr>
-          <a:lstStyle/>
-          <a:p>
-            <a:pPr algn="ctr"/>
-            <a:r>
-              <a:rPr sz="1600" b="1">
-                <a:solidFill>
-                  <a:srgbClr val="16324F"/>
-                </a:solidFill>
-                <a:latin typeface="Aptos"/>
-              </a:rPr>
-              <a:t>stability + H(e^{jω})</a:t>
-            </a:r>
-          </a:p>
-        </p:txBody>
-      </p:sp>
+      <mc:AlternateContent xmlns:mc="http://schemas.openxmlformats.org/markup-compatibility/2006">
+        <mc:Choice xmlns:a14="http://schemas.microsoft.com/office/drawing/2010/main" Requires="a14">
+          <p:sp>
+            <p:nvSpPr>
+              <p:cNvPr id="20" name="TextBox 19"/>
+              <p:cNvSpPr txBox="1"/>
+              <p:nvPr/>
+            </p:nvSpPr>
+            <p:spPr>
+              <a:xfrm>
+                <a:off x="7607808" y="2548223"/>
+                <a:ext cx="1645920" cy="591124"/>
+              </a:xfrm>
+              <a:prstGeom prst="rect">
+                <a:avLst/>
+              </a:prstGeom>
+              <a:noFill/>
+            </p:spPr>
+            <p:txBody>
+              <a:bodyPr wrap="square" lIns="45720" rIns="45720" anchor="ctr">
+                <a:spAutoFit/>
+              </a:bodyPr>
+              <a:lstStyle/>
+              <a:p>
+                <a:pPr algn="ctr"/>
+                <a:r>
+                  <a:rPr lang="en-US" sz="1600" b="1" dirty="0">
+                    <a:solidFill>
+                      <a:srgbClr val="16324F"/>
+                    </a:solidFill>
+                    <a:latin typeface="Aptos"/>
+                  </a:rPr>
+                  <a:t>stability + </a:t>
+                </a:r>
+                <a14:m>
+                  <m:oMath xmlns:m="http://schemas.openxmlformats.org/officeDocument/2006/math">
+                    <m:r>
+                      <a:rPr lang="en-US" sz="1600" b="1" i="1" dirty="0" smtClean="0">
+                        <a:solidFill>
+                          <a:srgbClr val="16324F"/>
+                        </a:solidFill>
+                        <a:latin typeface="Cambria Math" panose="02040503050406030204" pitchFamily="18" charset="0"/>
+                      </a:rPr>
+                      <m:t>𝑯</m:t>
+                    </m:r>
+                    <m:r>
+                      <a:rPr lang="en-US" sz="1600" b="1" i="1" dirty="0" smtClean="0">
+                        <a:solidFill>
+                          <a:srgbClr val="16324F"/>
+                        </a:solidFill>
+                        <a:latin typeface="Cambria Math" panose="02040503050406030204" pitchFamily="18" charset="0"/>
+                      </a:rPr>
+                      <m:t>(</m:t>
+                    </m:r>
+                    <m:sSup>
+                      <m:sSupPr>
+                        <m:ctrlPr>
+                          <a:rPr lang="ar-AE" sz="1600" b="1" i="1" dirty="0" err="1">
+                            <a:solidFill>
+                              <a:srgbClr val="16324F"/>
+                            </a:solidFill>
+                            <a:latin typeface="Cambria Math" panose="02040503050406030204" pitchFamily="18" charset="0"/>
+                          </a:rPr>
+                        </m:ctrlPr>
+                      </m:sSupPr>
+                      <m:e>
+                        <m:r>
+                          <a:rPr lang="ar-AE" sz="1600" b="1" i="1" dirty="0" err="1">
+                            <a:solidFill>
+                              <a:srgbClr val="16324F"/>
+                            </a:solidFill>
+                            <a:latin typeface="Cambria Math" panose="02040503050406030204" pitchFamily="18" charset="0"/>
+                          </a:rPr>
+                          <m:t>𝒆</m:t>
+                        </m:r>
+                      </m:e>
+                      <m:sup>
+                        <m:r>
+                          <a:rPr lang="ar-AE" sz="1600" b="1" i="1" dirty="0" err="1" smtClean="0">
+                            <a:solidFill>
+                              <a:srgbClr val="16324F"/>
+                            </a:solidFill>
+                            <a:latin typeface="Cambria Math" panose="02040503050406030204" pitchFamily="18" charset="0"/>
+                          </a:rPr>
+                          <m:t>𝒋</m:t>
+                        </m:r>
+                        <m:r>
+                          <a:rPr lang="ar-AE" sz="1600" b="1" i="1" dirty="0" err="1" smtClean="0">
+                            <a:solidFill>
+                              <a:srgbClr val="16324F"/>
+                            </a:solidFill>
+                            <a:latin typeface="Cambria Math" panose="02040503050406030204" pitchFamily="18" charset="0"/>
+                          </a:rPr>
+                          <m:t>𝝎</m:t>
+                        </m:r>
+                      </m:sup>
+                    </m:sSup>
+                    <m:r>
+                      <a:rPr lang="ar-AE" sz="1600" b="1" i="1" dirty="0" smtClean="0">
+                        <a:solidFill>
+                          <a:srgbClr val="16324F"/>
+                        </a:solidFill>
+                        <a:latin typeface="Cambria Math" panose="02040503050406030204" pitchFamily="18" charset="0"/>
+                      </a:rPr>
+                      <m:t>)</m:t>
+                    </m:r>
+                  </m:oMath>
+                </a14:m>
+                <a:endParaRPr sz="1600" b="1" dirty="0">
+                  <a:solidFill>
+                    <a:srgbClr val="16324F"/>
+                  </a:solidFill>
+                  <a:latin typeface="Aptos"/>
+                </a:endParaRPr>
+              </a:p>
+            </p:txBody>
+          </p:sp>
+        </mc:Choice>
+        <mc:Fallback>
+          <p:sp>
+            <p:nvSpPr>
+              <p:cNvPr id="20" name="TextBox 19"/>
+              <p:cNvSpPr txBox="1">
+                <a:spLocks noRot="1" noChangeAspect="1" noMove="1" noResize="1" noEditPoints="1" noAdjustHandles="1" noChangeArrowheads="1" noChangeShapeType="1" noTextEdit="1"/>
+              </p:cNvSpPr>
+              <p:nvPr/>
+            </p:nvSpPr>
+            <p:spPr>
+              <a:xfrm>
+                <a:off x="7607808" y="2548223"/>
+                <a:ext cx="1645920" cy="591124"/>
+              </a:xfrm>
+              <a:prstGeom prst="rect">
+                <a:avLst/>
+              </a:prstGeom>
+              <a:blipFill>
+                <a:blip r:embed="rId2"/>
+                <a:stretch>
+                  <a:fillRect t="-3093" b="-5155"/>
+                </a:stretch>
+              </a:blipFill>
+            </p:spPr>
+            <p:txBody>
+              <a:bodyPr/>
+              <a:lstStyle/>
+              <a:p>
+                <a:r>
+                  <a:rPr lang="en-US">
+                    <a:noFill/>
+                  </a:rPr>
+                  <a:t> </a:t>
+                </a:r>
+              </a:p>
+            </p:txBody>
+          </p:sp>
+        </mc:Fallback>
+      </mc:AlternateContent>
       <p:cxnSp>
         <p:nvCxnSpPr>
           <p:cNvPr id="21" name="Connector 20"/>
@@ -11534,47 +11977,175 @@
           </a:p>
         </p:txBody>
       </p:sp>
-      <p:sp>
-        <p:nvSpPr>
-          <p:cNvPr id="20" name="TextBox 19">
-            <a:extLst>
-              <a:ext uri="{FF2B5EF4-FFF2-40B4-BE49-F238E27FC236}">
-                <a16:creationId xmlns:a16="http://schemas.microsoft.com/office/drawing/2014/main" id="{A077022D-37CD-BBB7-A7A5-54275E5758CC}"/>
-              </a:ext>
-            </a:extLst>
-          </p:cNvPr>
-          <p:cNvSpPr txBox="1"/>
-          <p:nvPr/>
-        </p:nvSpPr>
-        <p:spPr>
-          <a:xfrm>
-            <a:off x="7607808" y="2578608"/>
-            <a:ext cx="1645920" cy="530352"/>
-          </a:xfrm>
-          <a:prstGeom prst="rect">
-            <a:avLst/>
-          </a:prstGeom>
-          <a:noFill/>
-        </p:spPr>
-        <p:txBody>
-          <a:bodyPr wrap="square" lIns="45720" rIns="45720" anchor="ctr">
-            <a:spAutoFit/>
-          </a:bodyPr>
-          <a:lstStyle/>
-          <a:p>
-            <a:pPr algn="ctr"/>
-            <a:r>
-              <a:rPr sz="1600" b="1">
-                <a:solidFill>
-                  <a:srgbClr val="16324F"/>
-                </a:solidFill>
-                <a:latin typeface="Aptos"/>
-              </a:rPr>
-              <a:t>stability + H(e^{jω})</a:t>
-            </a:r>
-          </a:p>
-        </p:txBody>
-      </p:sp>
+      <mc:AlternateContent xmlns:mc="http://schemas.openxmlformats.org/markup-compatibility/2006">
+        <mc:Choice xmlns:a14="http://schemas.microsoft.com/office/drawing/2010/main" Requires="a14">
+          <p:sp>
+            <p:nvSpPr>
+              <p:cNvPr id="20" name="TextBox 19">
+                <a:extLst>
+                  <a:ext uri="{FF2B5EF4-FFF2-40B4-BE49-F238E27FC236}">
+                    <a16:creationId xmlns:a16="http://schemas.microsoft.com/office/drawing/2014/main" id="{A077022D-37CD-BBB7-A7A5-54275E5758CC}"/>
+                  </a:ext>
+                </a:extLst>
+              </p:cNvPr>
+              <p:cNvSpPr txBox="1"/>
+              <p:nvPr/>
+            </p:nvSpPr>
+            <p:spPr>
+              <a:xfrm>
+                <a:off x="7607808" y="2548223"/>
+                <a:ext cx="1645920" cy="591124"/>
+              </a:xfrm>
+              <a:prstGeom prst="rect">
+                <a:avLst/>
+              </a:prstGeom>
+              <a:noFill/>
+            </p:spPr>
+            <p:txBody>
+              <a:bodyPr wrap="square" lIns="45720" rIns="45720" anchor="ctr">
+                <a:spAutoFit/>
+              </a:bodyPr>
+              <a:lstStyle/>
+              <a:p>
+                <a:pPr algn="ctr"/>
+                <a:r>
+                  <a:rPr lang="en-US" sz="1600" b="1" dirty="0">
+                    <a:solidFill>
+                      <a:srgbClr val="16324F"/>
+                    </a:solidFill>
+                    <a:latin typeface="Aptos"/>
+                  </a:rPr>
+                  <a:t>stability + </a:t>
+                </a:r>
+                <a14:m>
+                  <m:oMath xmlns:m="http://schemas.openxmlformats.org/officeDocument/2006/math">
+                    <m:r>
+                      <a:rPr lang="en-US" sz="1600" b="1" i="1" dirty="0" smtClean="0">
+                        <a:solidFill>
+                          <a:srgbClr val="16324F"/>
+                        </a:solidFill>
+                        <a:latin typeface="Cambria Math" panose="02040503050406030204" pitchFamily="18" charset="0"/>
+                      </a:rPr>
+                      <m:t>𝑯</m:t>
+                    </m:r>
+                    <m:r>
+                      <a:rPr lang="en-US" sz="1600" b="1" i="1" dirty="0" smtClean="0">
+                        <a:solidFill>
+                          <a:srgbClr val="16324F"/>
+                        </a:solidFill>
+                        <a:latin typeface="Cambria Math" panose="02040503050406030204" pitchFamily="18" charset="0"/>
+                      </a:rPr>
+                      <m:t>(</m:t>
+                    </m:r>
+                    <m:sSup>
+                      <m:sSupPr>
+                        <m:ctrlPr>
+                          <a:rPr lang="ar-AE" sz="1600" b="1" i="1" dirty="0" err="1">
+                            <a:solidFill>
+                              <a:srgbClr val="16324F"/>
+                            </a:solidFill>
+                            <a:latin typeface="Cambria Math" panose="02040503050406030204" pitchFamily="18" charset="0"/>
+                          </a:rPr>
+                        </m:ctrlPr>
+                      </m:sSupPr>
+                      <m:e>
+                        <m:r>
+                          <a:rPr lang="ar-AE" sz="1600" b="1" i="1" dirty="0" err="1">
+                            <a:solidFill>
+                              <a:srgbClr val="16324F"/>
+                            </a:solidFill>
+                            <a:latin typeface="Cambria Math" panose="02040503050406030204" pitchFamily="18" charset="0"/>
+                          </a:rPr>
+                          <m:t>𝒆</m:t>
+                        </m:r>
+                      </m:e>
+                      <m:sup>
+                        <m:r>
+                          <a:rPr lang="ar-AE" sz="1600" b="1" i="1" dirty="0" err="1" smtClean="0">
+                            <a:solidFill>
+                              <a:srgbClr val="16324F"/>
+                            </a:solidFill>
+                            <a:latin typeface="Cambria Math" panose="02040503050406030204" pitchFamily="18" charset="0"/>
+                          </a:rPr>
+                          <m:t>𝒋</m:t>
+                        </m:r>
+                        <m:r>
+                          <a:rPr lang="ar-AE" sz="1600" b="1" i="1" dirty="0" err="1" smtClean="0">
+                            <a:solidFill>
+                              <a:srgbClr val="16324F"/>
+                            </a:solidFill>
+                            <a:latin typeface="Cambria Math" panose="02040503050406030204" pitchFamily="18" charset="0"/>
+                          </a:rPr>
+                          <m:t>𝝎</m:t>
+                        </m:r>
+                      </m:sup>
+                    </m:sSup>
+                    <m:r>
+                      <a:rPr lang="ar-AE" sz="1600" b="1" i="1" dirty="0" smtClean="0">
+                        <a:solidFill>
+                          <a:srgbClr val="16324F"/>
+                        </a:solidFill>
+                        <a:latin typeface="Cambria Math" panose="02040503050406030204" pitchFamily="18" charset="0"/>
+                      </a:rPr>
+                      <m:t>)</m:t>
+                    </m:r>
+                  </m:oMath>
+                </a14:m>
+                <a:endParaRPr sz="1600" b="1" dirty="0">
+                  <a:solidFill>
+                    <a:srgbClr val="16324F"/>
+                  </a:solidFill>
+                  <a:latin typeface="Aptos"/>
+                </a:endParaRPr>
+              </a:p>
+            </p:txBody>
+          </p:sp>
+        </mc:Choice>
+        <mc:Fallback>
+          <p:sp>
+            <p:nvSpPr>
+              <p:cNvPr id="20" name="TextBox 19">
+                <a:extLst>
+                  <a:ext uri="{FF2B5EF4-FFF2-40B4-BE49-F238E27FC236}">
+                    <a16:creationId xmlns:a16="http://schemas.microsoft.com/office/drawing/2014/main" id="{A077022D-37CD-BBB7-A7A5-54275E5758CC}"/>
+                  </a:ext>
+                </a:extLst>
+              </p:cNvPr>
+              <p:cNvSpPr txBox="1">
+                <a:spLocks noRot="1" noChangeAspect="1" noMove="1" noResize="1" noEditPoints="1" noAdjustHandles="1" noChangeArrowheads="1" noChangeShapeType="1" noTextEdit="1"/>
+              </p:cNvSpPr>
+              <p:nvPr/>
+            </p:nvSpPr>
+            <p:spPr>
+              <a:xfrm>
+                <a:off x="7607808" y="2548223"/>
+                <a:ext cx="1645920" cy="591124"/>
+              </a:xfrm>
+              <a:prstGeom prst="rect">
+                <a:avLst/>
+              </a:prstGeom>
+              <a:blipFill>
+                <a:blip r:embed="rId2"/>
+                <a:stretch>
+                  <a:fillRect t="-3093" b="-5155"/>
+                </a:stretch>
+              </a:blipFill>
+            </p:spPr>
+            <p:txBody>
+              <a:bodyPr/>
+              <a:lstStyle/>
+              <a:p>
+                <a:r>
+                  <a:rPr lang="en-US">
+                    <a:noFill/>
+                  </a:rPr>
+                  <a:t> </a:t>
+                </a:r>
+              </a:p>
+            </p:txBody>
+          </p:sp>
+        </mc:Fallback>
+      </mc:AlternateContent>
       <p:cxnSp>
         <p:nvCxnSpPr>
           <p:cNvPr id="21" name="Connector 20">
@@ -12783,41 +13354,6 @@
       </p:sp>
       <p:sp>
         <p:nvSpPr>
-          <p:cNvPr id="9" name="TextBox 8"/>
-          <p:cNvSpPr txBox="1"/>
-          <p:nvPr/>
-        </p:nvSpPr>
-        <p:spPr>
-          <a:xfrm>
-            <a:off x="1170432" y="3035808"/>
-            <a:ext cx="2596896" cy="804672"/>
-          </a:xfrm>
-          <a:prstGeom prst="rect">
-            <a:avLst/>
-          </a:prstGeom>
-          <a:noFill/>
-        </p:spPr>
-        <p:txBody>
-          <a:bodyPr wrap="square" lIns="45720" rIns="45720" anchor="t">
-            <a:spAutoFit/>
-          </a:bodyPr>
-          <a:lstStyle/>
-          <a:p>
-            <a:pPr algn="l"/>
-            <a:r>
-              <a:rPr sz="1300" b="0">
-                <a:solidFill>
-                  <a:srgbClr val="53616E"/>
-                </a:solidFill>
-                <a:latin typeface="Aptos"/>
-              </a:rPr>
-              <a:t>z=0.5 and z=0.9</a:t>
-            </a:r>
-          </a:p>
-        </p:txBody>
-      </p:sp>
-      <p:sp>
-        <p:nvSpPr>
           <p:cNvPr id="10" name="Rounded Rectangle 9"/>
           <p:cNvSpPr/>
           <p:nvPr/>
@@ -12899,41 +13435,6 @@
       </p:sp>
       <p:sp>
         <p:nvSpPr>
-          <p:cNvPr id="12" name="TextBox 11"/>
-          <p:cNvSpPr txBox="1"/>
-          <p:nvPr/>
-        </p:nvSpPr>
-        <p:spPr>
-          <a:xfrm>
-            <a:off x="4782312" y="3035808"/>
-            <a:ext cx="2596896" cy="804672"/>
-          </a:xfrm>
-          <a:prstGeom prst="rect">
-            <a:avLst/>
-          </a:prstGeom>
-          <a:noFill/>
-        </p:spPr>
-        <p:txBody>
-          <a:bodyPr wrap="square" lIns="45720" rIns="45720" anchor="t">
-            <a:spAutoFit/>
-          </a:bodyPr>
-          <a:lstStyle/>
-          <a:p>
-            <a:pPr algn="l"/>
-            <a:r>
-              <a:rPr sz="1300" b="0">
-                <a:solidFill>
-                  <a:srgbClr val="53616E"/>
-                </a:solidFill>
-                <a:latin typeface="Aptos"/>
-              </a:rPr>
-              <a:t>|z|&gt;0.9</a:t>
-            </a:r>
-          </a:p>
-        </p:txBody>
-      </p:sp>
-      <p:sp>
-        <p:nvSpPr>
           <p:cNvPr id="13" name="Rounded Rectangle 12"/>
           <p:cNvSpPr/>
           <p:nvPr/>
@@ -13015,41 +13516,6 @@
       </p:sp>
       <p:sp>
         <p:nvSpPr>
-          <p:cNvPr id="15" name="TextBox 14"/>
-          <p:cNvSpPr txBox="1"/>
-          <p:nvPr/>
-        </p:nvSpPr>
-        <p:spPr>
-          <a:xfrm>
-            <a:off x="8394192" y="3035808"/>
-            <a:ext cx="2596896" cy="804672"/>
-          </a:xfrm>
-          <a:prstGeom prst="rect">
-            <a:avLst/>
-          </a:prstGeom>
-          <a:noFill/>
-        </p:spPr>
-        <p:txBody>
-          <a:bodyPr wrap="square" lIns="45720" rIns="45720" anchor="t">
-            <a:spAutoFit/>
-          </a:bodyPr>
-          <a:lstStyle/>
-          <a:p>
-            <a:pPr algn="l"/>
-            <a:r>
-              <a:rPr sz="1300" b="0">
-                <a:solidFill>
-                  <a:srgbClr val="53616E"/>
-                </a:solidFill>
-                <a:latin typeface="Aptos"/>
-              </a:rPr>
-              <a:t>Yes: the unit circle is in |z|&gt;0.9</a:t>
-            </a:r>
-          </a:p>
-        </p:txBody>
-      </p:sp>
-      <p:sp>
-        <p:nvSpPr>
           <p:cNvPr id="16" name="Rounded Rectangle 15"/>
           <p:cNvSpPr/>
           <p:nvPr/>
@@ -13200,6 +13666,835 @@
         </p:txBody>
       </p:sp>
     </p:spTree>
+  </p:cSld>
+  <p:clrMapOvr>
+    <a:masterClrMapping/>
+  </p:clrMapOvr>
+</p:sld>
+</file>
+
+<file path=ppt/slides/slide28.xml><?xml version="1.0" encoding="utf-8"?>
+<p:sld xmlns:a="http://schemas.openxmlformats.org/drawingml/2006/main" xmlns:r="http://schemas.openxmlformats.org/officeDocument/2006/relationships" xmlns:p="http://schemas.openxmlformats.org/presentationml/2006/main">
+  <p:cSld>
+    <p:spTree>
+      <p:nvGrpSpPr>
+        <p:cNvPr id="1" name="">
+          <a:extLst>
+            <a:ext uri="{FF2B5EF4-FFF2-40B4-BE49-F238E27FC236}">
+              <a16:creationId xmlns:a16="http://schemas.microsoft.com/office/drawing/2014/main" id="{8902FCE5-61CB-FF44-BC4B-9BA1D97B3A24}"/>
+            </a:ext>
+          </a:extLst>
+        </p:cNvPr>
+        <p:cNvGrpSpPr/>
+        <p:nvPr/>
+      </p:nvGrpSpPr>
+      <p:grpSpPr>
+        <a:xfrm>
+          <a:off x="0" y="0"/>
+          <a:ext cx="0" cy="0"/>
+          <a:chOff x="0" y="0"/>
+          <a:chExt cx="0" cy="0"/>
+        </a:xfrm>
+      </p:grpSpPr>
+      <p:sp>
+        <p:nvSpPr>
+          <p:cNvPr id="2" name="TextBox 1">
+            <a:extLst>
+              <a:ext uri="{FF2B5EF4-FFF2-40B4-BE49-F238E27FC236}">
+                <a16:creationId xmlns:a16="http://schemas.microsoft.com/office/drawing/2014/main" id="{03A2A268-EA70-C554-F664-86AB715D2DCE}"/>
+              </a:ext>
+            </a:extLst>
+          </p:cNvPr>
+          <p:cNvSpPr txBox="1"/>
+          <p:nvPr/>
+        </p:nvSpPr>
+        <p:spPr>
+          <a:xfrm>
+            <a:off x="566928" y="301752"/>
+            <a:ext cx="9692640" cy="438912"/>
+          </a:xfrm>
+          <a:prstGeom prst="rect">
+            <a:avLst/>
+          </a:prstGeom>
+          <a:noFill/>
+        </p:spPr>
+        <p:txBody>
+          <a:bodyPr wrap="square" lIns="45720" rIns="45720" anchor="ctr">
+            <a:spAutoFit/>
+          </a:bodyPr>
+          <a:lstStyle/>
+          <a:p>
+            <a:pPr algn="l"/>
+            <a:r>
+              <a:rPr sz="2400" b="1">
+                <a:solidFill>
+                  <a:srgbClr val="16324F"/>
+                </a:solidFill>
+                <a:latin typeface="Aptos"/>
+              </a:rPr>
+              <a:t>Board reserve: coefficient ↔ root sanity checks</a:t>
+            </a:r>
+          </a:p>
+        </p:txBody>
+      </p:sp>
+      <p:sp>
+        <p:nvSpPr>
+          <p:cNvPr id="3" name="Rounded Rectangle 2">
+            <a:extLst>
+              <a:ext uri="{FF2B5EF4-FFF2-40B4-BE49-F238E27FC236}">
+                <a16:creationId xmlns:a16="http://schemas.microsoft.com/office/drawing/2014/main" id="{3DC9B08C-2414-8B38-327E-C24D11FE2495}"/>
+              </a:ext>
+            </a:extLst>
+          </p:cNvPr>
+          <p:cNvSpPr/>
+          <p:nvPr/>
+        </p:nvSpPr>
+        <p:spPr>
+          <a:xfrm>
+            <a:off x="10332720" y="283464"/>
+            <a:ext cx="1234440" cy="347472"/>
+          </a:xfrm>
+          <a:prstGeom prst="roundRect">
+            <a:avLst/>
+          </a:prstGeom>
+          <a:solidFill>
+            <a:srgbClr val="E8F7F7"/>
+          </a:solidFill>
+          <a:ln w="12700">
+            <a:solidFill>
+              <a:srgbClr val="00A6A6"/>
+            </a:solidFill>
+          </a:ln>
+        </p:spPr>
+        <p:style>
+          <a:lnRef idx="1">
+            <a:schemeClr val="accent1"/>
+          </a:lnRef>
+          <a:fillRef idx="3">
+            <a:schemeClr val="accent1"/>
+          </a:fillRef>
+          <a:effectRef idx="2">
+            <a:schemeClr val="accent1"/>
+          </a:effectRef>
+          <a:fontRef idx="minor">
+            <a:schemeClr val="lt1"/>
+          </a:fontRef>
+        </p:style>
+        <p:txBody>
+          <a:bodyPr rtlCol="0" anchor="ctr"/>
+          <a:lstStyle/>
+          <a:p>
+            <a:pPr algn="ctr"/>
+            <a:endParaRPr/>
+          </a:p>
+        </p:txBody>
+      </p:sp>
+      <p:sp>
+        <p:nvSpPr>
+          <p:cNvPr id="4" name="TextBox 3">
+            <a:extLst>
+              <a:ext uri="{FF2B5EF4-FFF2-40B4-BE49-F238E27FC236}">
+                <a16:creationId xmlns:a16="http://schemas.microsoft.com/office/drawing/2014/main" id="{172A81A7-6CDF-8DE7-0DA0-DE2AF3B516FC}"/>
+              </a:ext>
+            </a:extLst>
+          </p:cNvPr>
+          <p:cNvSpPr txBox="1"/>
+          <p:nvPr/>
+        </p:nvSpPr>
+        <p:spPr>
+          <a:xfrm>
+            <a:off x="10351008" y="292608"/>
+            <a:ext cx="1197864" cy="310896"/>
+          </a:xfrm>
+          <a:prstGeom prst="rect">
+            <a:avLst/>
+          </a:prstGeom>
+          <a:noFill/>
+        </p:spPr>
+        <p:txBody>
+          <a:bodyPr wrap="square" lIns="45720" rIns="45720" anchor="ctr">
+            <a:spAutoFit/>
+          </a:bodyPr>
+          <a:lstStyle/>
+          <a:p>
+            <a:pPr algn="ctr"/>
+            <a:r>
+              <a:rPr sz="1100" b="1">
+                <a:solidFill>
+                  <a:srgbClr val="16324F"/>
+                </a:solidFill>
+                <a:latin typeface="Aptos"/>
+              </a:rPr>
+              <a:t>RESERVE</a:t>
+            </a:r>
+          </a:p>
+        </p:txBody>
+      </p:sp>
+      <p:sp>
+        <p:nvSpPr>
+          <p:cNvPr id="5" name="TextBox 4">
+            <a:extLst>
+              <a:ext uri="{FF2B5EF4-FFF2-40B4-BE49-F238E27FC236}">
+                <a16:creationId xmlns:a16="http://schemas.microsoft.com/office/drawing/2014/main" id="{FCAB49B7-CFDB-3DDA-6D70-C770D7AE467B}"/>
+              </a:ext>
+            </a:extLst>
+          </p:cNvPr>
+          <p:cNvSpPr txBox="1"/>
+          <p:nvPr/>
+        </p:nvSpPr>
+        <p:spPr>
+          <a:xfrm>
+            <a:off x="594360" y="786384"/>
+            <a:ext cx="10652760" cy="329184"/>
+          </a:xfrm>
+          <a:prstGeom prst="rect">
+            <a:avLst/>
+          </a:prstGeom>
+          <a:noFill/>
+        </p:spPr>
+        <p:txBody>
+          <a:bodyPr wrap="square" lIns="45720" rIns="45720" anchor="ctr">
+            <a:spAutoFit/>
+          </a:bodyPr>
+          <a:lstStyle/>
+          <a:p>
+            <a:pPr algn="l"/>
+            <a:r>
+              <a:rPr sz="1200" b="0">
+                <a:solidFill>
+                  <a:srgbClr val="53616E"/>
+                </a:solidFill>
+                <a:latin typeface="Aptos"/>
+              </a:rPr>
+              <a:t>Useful when students get lost in z⁻¹ polynomial conventions.</a:t>
+            </a:r>
+          </a:p>
+        </p:txBody>
+      </p:sp>
+      <p:sp>
+        <p:nvSpPr>
+          <p:cNvPr id="6" name="TextBox 5">
+            <a:extLst>
+              <a:ext uri="{FF2B5EF4-FFF2-40B4-BE49-F238E27FC236}">
+                <a16:creationId xmlns:a16="http://schemas.microsoft.com/office/drawing/2014/main" id="{FBEF1D03-9527-41A9-3273-91DFD517C8FE}"/>
+              </a:ext>
+            </a:extLst>
+          </p:cNvPr>
+          <p:cNvSpPr txBox="1"/>
+          <p:nvPr/>
+        </p:nvSpPr>
+        <p:spPr>
+          <a:xfrm>
+            <a:off x="914400" y="1417320"/>
+            <a:ext cx="10241280" cy="594360"/>
+          </a:xfrm>
+          <a:prstGeom prst="rect">
+            <a:avLst/>
+          </a:prstGeom>
+          <a:noFill/>
+        </p:spPr>
+        <p:txBody>
+          <a:bodyPr wrap="square" lIns="45720" rIns="45720" anchor="ctr">
+            <a:spAutoFit/>
+          </a:bodyPr>
+          <a:lstStyle/>
+          <a:p>
+            <a:pPr algn="ctr"/>
+            <a:r>
+              <a:rPr sz="2300" b="1">
+                <a:solidFill>
+                  <a:srgbClr val="16324F"/>
+                </a:solidFill>
+                <a:latin typeface="Aptos"/>
+              </a:rPr>
+              <a:t>1 − 1.4z⁻¹ + 0.45z⁻² = (1 − 0.5z⁻¹)(1 − 0.9z⁻¹)</a:t>
+            </a:r>
+          </a:p>
+        </p:txBody>
+      </p:sp>
+      <p:sp>
+        <p:nvSpPr>
+          <p:cNvPr id="7" name="Rounded Rectangle 6">
+            <a:extLst>
+              <a:ext uri="{FF2B5EF4-FFF2-40B4-BE49-F238E27FC236}">
+                <a16:creationId xmlns:a16="http://schemas.microsoft.com/office/drawing/2014/main" id="{CD710BDF-C327-4F57-FB59-BE20E7ACC0E3}"/>
+              </a:ext>
+            </a:extLst>
+          </p:cNvPr>
+          <p:cNvSpPr/>
+          <p:nvPr/>
+        </p:nvSpPr>
+        <p:spPr>
+          <a:xfrm>
+            <a:off x="1005840" y="2560320"/>
+            <a:ext cx="2926080" cy="1371600"/>
+          </a:xfrm>
+          <a:prstGeom prst="roundRect">
+            <a:avLst/>
+          </a:prstGeom>
+          <a:solidFill>
+            <a:srgbClr val="E8F7F7"/>
+          </a:solidFill>
+          <a:ln w="12700">
+            <a:solidFill>
+              <a:srgbClr val="00A6A6"/>
+            </a:solidFill>
+          </a:ln>
+        </p:spPr>
+        <p:style>
+          <a:lnRef idx="1">
+            <a:schemeClr val="accent1"/>
+          </a:lnRef>
+          <a:fillRef idx="3">
+            <a:schemeClr val="accent1"/>
+          </a:fillRef>
+          <a:effectRef idx="2">
+            <a:schemeClr val="accent1"/>
+          </a:effectRef>
+          <a:fontRef idx="minor">
+            <a:schemeClr val="lt1"/>
+          </a:fontRef>
+        </p:style>
+        <p:txBody>
+          <a:bodyPr rtlCol="0" anchor="ctr"/>
+          <a:lstStyle/>
+          <a:p>
+            <a:pPr algn="ctr"/>
+            <a:endParaRPr/>
+          </a:p>
+        </p:txBody>
+      </p:sp>
+      <p:sp>
+        <p:nvSpPr>
+          <p:cNvPr id="8" name="TextBox 7">
+            <a:extLst>
+              <a:ext uri="{FF2B5EF4-FFF2-40B4-BE49-F238E27FC236}">
+                <a16:creationId xmlns:a16="http://schemas.microsoft.com/office/drawing/2014/main" id="{6B576223-294F-D596-44F8-3F0D32A1B84F}"/>
+              </a:ext>
+            </a:extLst>
+          </p:cNvPr>
+          <p:cNvSpPr txBox="1"/>
+          <p:nvPr/>
+        </p:nvSpPr>
+        <p:spPr>
+          <a:xfrm>
+            <a:off x="1170432" y="2670048"/>
+            <a:ext cx="2596896" cy="320040"/>
+          </a:xfrm>
+          <a:prstGeom prst="rect">
+            <a:avLst/>
+          </a:prstGeom>
+          <a:noFill/>
+        </p:spPr>
+        <p:txBody>
+          <a:bodyPr wrap="square" lIns="45720" rIns="45720" anchor="ctr">
+            <a:spAutoFit/>
+          </a:bodyPr>
+          <a:lstStyle/>
+          <a:p>
+            <a:pPr algn="l"/>
+            <a:r>
+              <a:rPr sz="1500" b="1">
+                <a:solidFill>
+                  <a:srgbClr val="16324F"/>
+                </a:solidFill>
+                <a:latin typeface="Aptos"/>
+              </a:rPr>
+              <a:t>Poles</a:t>
+            </a:r>
+          </a:p>
+        </p:txBody>
+      </p:sp>
+      <p:sp>
+        <p:nvSpPr>
+          <p:cNvPr id="9" name="TextBox 8">
+            <a:extLst>
+              <a:ext uri="{FF2B5EF4-FFF2-40B4-BE49-F238E27FC236}">
+                <a16:creationId xmlns:a16="http://schemas.microsoft.com/office/drawing/2014/main" id="{6BBB541D-D95B-58F9-926D-1D36F7086230}"/>
+              </a:ext>
+            </a:extLst>
+          </p:cNvPr>
+          <p:cNvSpPr txBox="1"/>
+          <p:nvPr/>
+        </p:nvSpPr>
+        <p:spPr>
+          <a:xfrm>
+            <a:off x="1170432" y="3035808"/>
+            <a:ext cx="2596896" cy="804672"/>
+          </a:xfrm>
+          <a:prstGeom prst="rect">
+            <a:avLst/>
+          </a:prstGeom>
+          <a:noFill/>
+        </p:spPr>
+        <p:txBody>
+          <a:bodyPr wrap="square" lIns="45720" rIns="45720" anchor="t">
+            <a:spAutoFit/>
+          </a:bodyPr>
+          <a:lstStyle/>
+          <a:p>
+            <a:pPr algn="l"/>
+            <a:r>
+              <a:rPr sz="1300" b="0">
+                <a:solidFill>
+                  <a:srgbClr val="53616E"/>
+                </a:solidFill>
+                <a:latin typeface="Aptos"/>
+              </a:rPr>
+              <a:t>z=0.5 and z=0.9</a:t>
+            </a:r>
+          </a:p>
+        </p:txBody>
+      </p:sp>
+      <p:sp>
+        <p:nvSpPr>
+          <p:cNvPr id="10" name="Rounded Rectangle 9">
+            <a:extLst>
+              <a:ext uri="{FF2B5EF4-FFF2-40B4-BE49-F238E27FC236}">
+                <a16:creationId xmlns:a16="http://schemas.microsoft.com/office/drawing/2014/main" id="{A87B9246-3811-2D1B-6E71-6746EF3C23C9}"/>
+              </a:ext>
+            </a:extLst>
+          </p:cNvPr>
+          <p:cNvSpPr/>
+          <p:nvPr/>
+        </p:nvSpPr>
+        <p:spPr>
+          <a:xfrm>
+            <a:off x="4617720" y="2560320"/>
+            <a:ext cx="2926080" cy="1371600"/>
+          </a:xfrm>
+          <a:prstGeom prst="roundRect">
+            <a:avLst/>
+          </a:prstGeom>
+          <a:solidFill>
+            <a:srgbClr val="EDF3F7"/>
+          </a:solidFill>
+          <a:ln w="12700">
+            <a:solidFill>
+              <a:srgbClr val="DCE6EC"/>
+            </a:solidFill>
+          </a:ln>
+        </p:spPr>
+        <p:style>
+          <a:lnRef idx="1">
+            <a:schemeClr val="accent1"/>
+          </a:lnRef>
+          <a:fillRef idx="3">
+            <a:schemeClr val="accent1"/>
+          </a:fillRef>
+          <a:effectRef idx="2">
+            <a:schemeClr val="accent1"/>
+          </a:effectRef>
+          <a:fontRef idx="minor">
+            <a:schemeClr val="lt1"/>
+          </a:fontRef>
+        </p:style>
+        <p:txBody>
+          <a:bodyPr rtlCol="0" anchor="ctr"/>
+          <a:lstStyle/>
+          <a:p>
+            <a:pPr algn="ctr"/>
+            <a:endParaRPr/>
+          </a:p>
+        </p:txBody>
+      </p:sp>
+      <p:sp>
+        <p:nvSpPr>
+          <p:cNvPr id="11" name="TextBox 10">
+            <a:extLst>
+              <a:ext uri="{FF2B5EF4-FFF2-40B4-BE49-F238E27FC236}">
+                <a16:creationId xmlns:a16="http://schemas.microsoft.com/office/drawing/2014/main" id="{DAED8F2A-03DE-19B8-24CF-D720B3E46E25}"/>
+              </a:ext>
+            </a:extLst>
+          </p:cNvPr>
+          <p:cNvSpPr txBox="1"/>
+          <p:nvPr/>
+        </p:nvSpPr>
+        <p:spPr>
+          <a:xfrm>
+            <a:off x="4782312" y="2670048"/>
+            <a:ext cx="2596896" cy="320040"/>
+          </a:xfrm>
+          <a:prstGeom prst="rect">
+            <a:avLst/>
+          </a:prstGeom>
+          <a:noFill/>
+        </p:spPr>
+        <p:txBody>
+          <a:bodyPr wrap="square" lIns="45720" rIns="45720" anchor="ctr">
+            <a:spAutoFit/>
+          </a:bodyPr>
+          <a:lstStyle/>
+          <a:p>
+            <a:pPr algn="l"/>
+            <a:r>
+              <a:rPr sz="1500" b="1">
+                <a:solidFill>
+                  <a:srgbClr val="16324F"/>
+                </a:solidFill>
+                <a:latin typeface="Aptos"/>
+              </a:rPr>
+              <a:t>Causal ROC</a:t>
+            </a:r>
+          </a:p>
+        </p:txBody>
+      </p:sp>
+      <p:sp>
+        <p:nvSpPr>
+          <p:cNvPr id="12" name="TextBox 11">
+            <a:extLst>
+              <a:ext uri="{FF2B5EF4-FFF2-40B4-BE49-F238E27FC236}">
+                <a16:creationId xmlns:a16="http://schemas.microsoft.com/office/drawing/2014/main" id="{864B35DC-2714-1A55-DC6A-D1F1DC5A5E54}"/>
+              </a:ext>
+            </a:extLst>
+          </p:cNvPr>
+          <p:cNvSpPr txBox="1"/>
+          <p:nvPr/>
+        </p:nvSpPr>
+        <p:spPr>
+          <a:xfrm>
+            <a:off x="4782312" y="3035808"/>
+            <a:ext cx="2596896" cy="804672"/>
+          </a:xfrm>
+          <a:prstGeom prst="rect">
+            <a:avLst/>
+          </a:prstGeom>
+          <a:noFill/>
+        </p:spPr>
+        <p:txBody>
+          <a:bodyPr wrap="square" lIns="45720" rIns="45720" anchor="t">
+            <a:spAutoFit/>
+          </a:bodyPr>
+          <a:lstStyle/>
+          <a:p>
+            <a:pPr algn="l"/>
+            <a:r>
+              <a:rPr sz="1300" b="0">
+                <a:solidFill>
+                  <a:srgbClr val="53616E"/>
+                </a:solidFill>
+                <a:latin typeface="Aptos"/>
+              </a:rPr>
+              <a:t>|z|&gt;0.9</a:t>
+            </a:r>
+          </a:p>
+        </p:txBody>
+      </p:sp>
+      <p:sp>
+        <p:nvSpPr>
+          <p:cNvPr id="13" name="Rounded Rectangle 12">
+            <a:extLst>
+              <a:ext uri="{FF2B5EF4-FFF2-40B4-BE49-F238E27FC236}">
+                <a16:creationId xmlns:a16="http://schemas.microsoft.com/office/drawing/2014/main" id="{433F5A92-E8C8-D583-1FC8-35467A7924DC}"/>
+              </a:ext>
+            </a:extLst>
+          </p:cNvPr>
+          <p:cNvSpPr/>
+          <p:nvPr/>
+        </p:nvSpPr>
+        <p:spPr>
+          <a:xfrm>
+            <a:off x="8229600" y="2560320"/>
+            <a:ext cx="2926080" cy="1371600"/>
+          </a:xfrm>
+          <a:prstGeom prst="roundRect">
+            <a:avLst/>
+          </a:prstGeom>
+          <a:solidFill>
+            <a:srgbClr val="FFF2E6"/>
+          </a:solidFill>
+          <a:ln w="12700">
+            <a:solidFill>
+              <a:srgbClr val="F28E2B"/>
+            </a:solidFill>
+          </a:ln>
+        </p:spPr>
+        <p:style>
+          <a:lnRef idx="1">
+            <a:schemeClr val="accent1"/>
+          </a:lnRef>
+          <a:fillRef idx="3">
+            <a:schemeClr val="accent1"/>
+          </a:fillRef>
+          <a:effectRef idx="2">
+            <a:schemeClr val="accent1"/>
+          </a:effectRef>
+          <a:fontRef idx="minor">
+            <a:schemeClr val="lt1"/>
+          </a:fontRef>
+        </p:style>
+        <p:txBody>
+          <a:bodyPr rtlCol="0" anchor="ctr"/>
+          <a:lstStyle/>
+          <a:p>
+            <a:pPr algn="ctr"/>
+            <a:endParaRPr/>
+          </a:p>
+        </p:txBody>
+      </p:sp>
+      <p:sp>
+        <p:nvSpPr>
+          <p:cNvPr id="14" name="TextBox 13">
+            <a:extLst>
+              <a:ext uri="{FF2B5EF4-FFF2-40B4-BE49-F238E27FC236}">
+                <a16:creationId xmlns:a16="http://schemas.microsoft.com/office/drawing/2014/main" id="{0C3F0D50-3D58-D98A-61F2-8BE943C506F6}"/>
+              </a:ext>
+            </a:extLst>
+          </p:cNvPr>
+          <p:cNvSpPr txBox="1"/>
+          <p:nvPr/>
+        </p:nvSpPr>
+        <p:spPr>
+          <a:xfrm>
+            <a:off x="8394192" y="2670048"/>
+            <a:ext cx="2596896" cy="320040"/>
+          </a:xfrm>
+          <a:prstGeom prst="rect">
+            <a:avLst/>
+          </a:prstGeom>
+          <a:noFill/>
+        </p:spPr>
+        <p:txBody>
+          <a:bodyPr wrap="square" lIns="45720" rIns="45720" anchor="ctr">
+            <a:spAutoFit/>
+          </a:bodyPr>
+          <a:lstStyle/>
+          <a:p>
+            <a:pPr algn="l"/>
+            <a:r>
+              <a:rPr sz="1500" b="1">
+                <a:solidFill>
+                  <a:srgbClr val="16324F"/>
+                </a:solidFill>
+                <a:latin typeface="Aptos"/>
+              </a:rPr>
+              <a:t>Stable?</a:t>
+            </a:r>
+          </a:p>
+        </p:txBody>
+      </p:sp>
+      <p:sp>
+        <p:nvSpPr>
+          <p:cNvPr id="15" name="TextBox 14">
+            <a:extLst>
+              <a:ext uri="{FF2B5EF4-FFF2-40B4-BE49-F238E27FC236}">
+                <a16:creationId xmlns:a16="http://schemas.microsoft.com/office/drawing/2014/main" id="{3A8C145B-345C-954F-9728-A30107944F37}"/>
+              </a:ext>
+            </a:extLst>
+          </p:cNvPr>
+          <p:cNvSpPr txBox="1"/>
+          <p:nvPr/>
+        </p:nvSpPr>
+        <p:spPr>
+          <a:xfrm>
+            <a:off x="8394192" y="3035808"/>
+            <a:ext cx="2596896" cy="804672"/>
+          </a:xfrm>
+          <a:prstGeom prst="rect">
+            <a:avLst/>
+          </a:prstGeom>
+          <a:noFill/>
+        </p:spPr>
+        <p:txBody>
+          <a:bodyPr wrap="square" lIns="45720" rIns="45720" anchor="t">
+            <a:spAutoFit/>
+          </a:bodyPr>
+          <a:lstStyle/>
+          <a:p>
+            <a:pPr algn="l"/>
+            <a:r>
+              <a:rPr sz="1300" b="0">
+                <a:solidFill>
+                  <a:srgbClr val="53616E"/>
+                </a:solidFill>
+                <a:latin typeface="Aptos"/>
+              </a:rPr>
+              <a:t>Yes: the unit circle is in |z|&gt;0.9</a:t>
+            </a:r>
+          </a:p>
+        </p:txBody>
+      </p:sp>
+      <p:sp>
+        <p:nvSpPr>
+          <p:cNvPr id="16" name="Rounded Rectangle 15">
+            <a:extLst>
+              <a:ext uri="{FF2B5EF4-FFF2-40B4-BE49-F238E27FC236}">
+                <a16:creationId xmlns:a16="http://schemas.microsoft.com/office/drawing/2014/main" id="{5C6F2595-9229-3ED5-D0AC-B6485CAA33EC}"/>
+              </a:ext>
+            </a:extLst>
+          </p:cNvPr>
+          <p:cNvSpPr/>
+          <p:nvPr/>
+        </p:nvSpPr>
+        <p:spPr>
+          <a:xfrm>
+            <a:off x="1143000" y="4572000"/>
+            <a:ext cx="9875520" cy="822960"/>
+          </a:xfrm>
+          <a:prstGeom prst="roundRect">
+            <a:avLst/>
+          </a:prstGeom>
+          <a:solidFill>
+            <a:srgbClr val="FFFFFF"/>
+          </a:solidFill>
+          <a:ln w="12700">
+            <a:solidFill>
+              <a:srgbClr val="DCE6EC"/>
+            </a:solidFill>
+          </a:ln>
+        </p:spPr>
+        <p:style>
+          <a:lnRef idx="1">
+            <a:schemeClr val="accent1"/>
+          </a:lnRef>
+          <a:fillRef idx="3">
+            <a:schemeClr val="accent1"/>
+          </a:fillRef>
+          <a:effectRef idx="2">
+            <a:schemeClr val="accent1"/>
+          </a:effectRef>
+          <a:fontRef idx="minor">
+            <a:schemeClr val="lt1"/>
+          </a:fontRef>
+        </p:style>
+        <p:txBody>
+          <a:bodyPr rtlCol="0" anchor="ctr"/>
+          <a:lstStyle/>
+          <a:p>
+            <a:pPr algn="ctr"/>
+            <a:endParaRPr/>
+          </a:p>
+        </p:txBody>
+      </p:sp>
+      <p:sp>
+        <p:nvSpPr>
+          <p:cNvPr id="17" name="TextBox 16">
+            <a:extLst>
+              <a:ext uri="{FF2B5EF4-FFF2-40B4-BE49-F238E27FC236}">
+                <a16:creationId xmlns:a16="http://schemas.microsoft.com/office/drawing/2014/main" id="{AEEFE951-BEE1-991C-F54B-2578F28FCA6E}"/>
+              </a:ext>
+            </a:extLst>
+          </p:cNvPr>
+          <p:cNvSpPr txBox="1"/>
+          <p:nvPr/>
+        </p:nvSpPr>
+        <p:spPr>
+          <a:xfrm>
+            <a:off x="1371600" y="4754880"/>
+            <a:ext cx="9418320" cy="457200"/>
+          </a:xfrm>
+          <a:prstGeom prst="rect">
+            <a:avLst/>
+          </a:prstGeom>
+          <a:noFill/>
+        </p:spPr>
+        <p:txBody>
+          <a:bodyPr wrap="square" lIns="45720" rIns="45720" anchor="ctr">
+            <a:spAutoFit/>
+          </a:bodyPr>
+          <a:lstStyle/>
+          <a:p>
+            <a:pPr algn="ctr"/>
+            <a:r>
+              <a:rPr sz="1700" b="1">
+                <a:solidFill>
+                  <a:srgbClr val="16324F"/>
+                </a:solidFill>
+                <a:latin typeface="Aptos"/>
+              </a:rPr>
+              <a:t>Fast check: for a causal rational system, if any pole magnitude ≥1, do not call it BIBO stable.</a:t>
+            </a:r>
+          </a:p>
+        </p:txBody>
+      </p:sp>
+      <p:sp>
+        <p:nvSpPr>
+          <p:cNvPr id="18" name="TextBox 17">
+            <a:extLst>
+              <a:ext uri="{FF2B5EF4-FFF2-40B4-BE49-F238E27FC236}">
+                <a16:creationId xmlns:a16="http://schemas.microsoft.com/office/drawing/2014/main" id="{9D48DF97-360E-02F6-1AC0-0A199CCC068B}"/>
+              </a:ext>
+            </a:extLst>
+          </p:cNvPr>
+          <p:cNvSpPr txBox="1"/>
+          <p:nvPr/>
+        </p:nvSpPr>
+        <p:spPr>
+          <a:xfrm>
+            <a:off x="566928" y="6473952"/>
+            <a:ext cx="4754880" cy="164592"/>
+          </a:xfrm>
+          <a:prstGeom prst="rect">
+            <a:avLst/>
+          </a:prstGeom>
+          <a:noFill/>
+        </p:spPr>
+        <p:txBody>
+          <a:bodyPr wrap="square" lIns="45720" rIns="45720" anchor="ctr">
+            <a:spAutoFit/>
+          </a:bodyPr>
+          <a:lstStyle/>
+          <a:p>
+            <a:pPr algn="l"/>
+            <a:r>
+              <a:rPr sz="800" b="0">
+                <a:solidFill>
+                  <a:srgbClr val="53616E"/>
+                </a:solidFill>
+                <a:latin typeface="Aptos"/>
+              </a:rPr>
+              <a:t>Week 3 • DSP + ML • Oppenheim &amp; Schafer</a:t>
+            </a:r>
+          </a:p>
+        </p:txBody>
+      </p:sp>
+      <p:sp>
+        <p:nvSpPr>
+          <p:cNvPr id="19" name="TextBox 18">
+            <a:extLst>
+              <a:ext uri="{FF2B5EF4-FFF2-40B4-BE49-F238E27FC236}">
+                <a16:creationId xmlns:a16="http://schemas.microsoft.com/office/drawing/2014/main" id="{8A202012-7C86-F35F-9B72-6063D9E54A43}"/>
+              </a:ext>
+            </a:extLst>
+          </p:cNvPr>
+          <p:cNvSpPr txBox="1"/>
+          <p:nvPr/>
+        </p:nvSpPr>
+        <p:spPr>
+          <a:xfrm>
+            <a:off x="11201400" y="6473952"/>
+            <a:ext cx="320040" cy="164592"/>
+          </a:xfrm>
+          <a:prstGeom prst="rect">
+            <a:avLst/>
+          </a:prstGeom>
+          <a:noFill/>
+        </p:spPr>
+        <p:txBody>
+          <a:bodyPr wrap="square" lIns="45720" rIns="45720" anchor="ctr">
+            <a:spAutoFit/>
+          </a:bodyPr>
+          <a:lstStyle/>
+          <a:p>
+            <a:pPr algn="r"/>
+            <a:r>
+              <a:rPr sz="800" b="0">
+                <a:solidFill>
+                  <a:srgbClr val="53616E"/>
+                </a:solidFill>
+                <a:latin typeface="Aptos"/>
+              </a:rPr>
+              <a:t>23</a:t>
+            </a:r>
+          </a:p>
+        </p:txBody>
+      </p:sp>
+    </p:spTree>
+    <p:extLst>
+      <p:ext uri="{BB962C8B-B14F-4D97-AF65-F5344CB8AC3E}">
+        <p14:creationId xmlns:p14="http://schemas.microsoft.com/office/powerpoint/2010/main" val="3896830179"/>
+      </p:ext>
+    </p:extLst>
   </p:cSld>
   <p:clrMapOvr>
     <a:masterClrMapping/>
@@ -15380,41 +16675,330 @@
           </a:p>
         </p:txBody>
       </p:sp>
-      <p:sp>
-        <p:nvSpPr>
-          <p:cNvPr id="9" name="TextBox 8"/>
-          <p:cNvSpPr txBox="1"/>
-          <p:nvPr/>
-        </p:nvSpPr>
-        <p:spPr>
-          <a:xfrm>
-            <a:off x="1188720" y="2926080"/>
-            <a:ext cx="4297680" cy="1097280"/>
-          </a:xfrm>
-          <a:prstGeom prst="rect">
-            <a:avLst/>
-          </a:prstGeom>
-          <a:noFill/>
-        </p:spPr>
-        <p:txBody>
-          <a:bodyPr wrap="square" lIns="45720" rIns="45720" anchor="ctr">
-            <a:spAutoFit/>
-          </a:bodyPr>
-          <a:lstStyle/>
-          <a:p>
-            <a:pPr algn="ctr"/>
-            <a:r>
-              <a:rPr sz="1700" b="0">
-                <a:solidFill>
-                  <a:srgbClr val="53616E"/>
-                </a:solidFill>
-                <a:latin typeface="Aptos"/>
-              </a:rPr>
-              <a:t>Then H(e^{jω}) = Σ h[n]e^{-jωn} converges for every ω.</a:t>
-            </a:r>
-          </a:p>
-        </p:txBody>
-      </p:sp>
+      <mc:AlternateContent xmlns:mc="http://schemas.openxmlformats.org/markup-compatibility/2006">
+        <mc:Choice xmlns:a14="http://schemas.microsoft.com/office/drawing/2010/main" Requires="a14">
+          <p:sp>
+            <p:nvSpPr>
+              <p:cNvPr id="9" name="TextBox 8"/>
+              <p:cNvSpPr txBox="1"/>
+              <p:nvPr/>
+            </p:nvSpPr>
+            <p:spPr>
+              <a:xfrm>
+                <a:off x="1188720" y="3156780"/>
+                <a:ext cx="4297680" cy="635880"/>
+              </a:xfrm>
+              <a:prstGeom prst="rect">
+                <a:avLst/>
+              </a:prstGeom>
+              <a:noFill/>
+            </p:spPr>
+            <p:txBody>
+              <a:bodyPr wrap="square" lIns="45720" rIns="45720" anchor="ctr">
+                <a:spAutoFit/>
+              </a:bodyPr>
+              <a:lstStyle/>
+              <a:p>
+                <a:pPr algn="ctr"/>
+                <a:r>
+                  <a:rPr lang="en-US" sz="1700" b="0" dirty="0">
+                    <a:solidFill>
+                      <a:srgbClr val="53616E"/>
+                    </a:solidFill>
+                    <a:latin typeface="Aptos"/>
+                  </a:rPr>
+                  <a:t>Then </a:t>
+                </a:r>
+                <a14:m>
+                  <m:oMath xmlns:m="http://schemas.openxmlformats.org/officeDocument/2006/math">
+                    <m:r>
+                      <a:rPr lang="en-US" sz="1700" b="0" i="1" dirty="0" smtClean="0">
+                        <a:solidFill>
+                          <a:srgbClr val="53616E"/>
+                        </a:solidFill>
+                        <a:latin typeface="Cambria Math" panose="02040503050406030204" pitchFamily="18" charset="0"/>
+                      </a:rPr>
+                      <m:t>𝐻</m:t>
+                    </m:r>
+                    <m:r>
+                      <a:rPr lang="en-US" sz="1700" b="0" i="1" dirty="0" smtClean="0">
+                        <a:solidFill>
+                          <a:srgbClr val="53616E"/>
+                        </a:solidFill>
+                        <a:latin typeface="Cambria Math" panose="02040503050406030204" pitchFamily="18" charset="0"/>
+                      </a:rPr>
+                      <m:t>(</m:t>
+                    </m:r>
+                    <m:sSup>
+                      <m:sSupPr>
+                        <m:ctrlPr>
+                          <a:rPr lang="ar-AE" sz="1700" b="0" i="1" dirty="0" smtClean="0">
+                            <a:solidFill>
+                              <a:srgbClr val="53616E"/>
+                            </a:solidFill>
+                            <a:latin typeface="Cambria Math" panose="02040503050406030204" pitchFamily="18" charset="0"/>
+                          </a:rPr>
+                        </m:ctrlPr>
+                      </m:sSupPr>
+                      <m:e>
+                        <m:r>
+                          <a:rPr lang="ar-AE" sz="1700" b="0" i="1" dirty="0" smtClean="0">
+                            <a:solidFill>
+                              <a:srgbClr val="53616E"/>
+                            </a:solidFill>
+                            <a:latin typeface="Cambria Math" panose="02040503050406030204" pitchFamily="18" charset="0"/>
+                          </a:rPr>
+                          <m:t>𝑒</m:t>
+                        </m:r>
+                      </m:e>
+                      <m:sup>
+                        <m:r>
+                          <a:rPr lang="ar-AE" sz="1700" b="0" i="1" dirty="0" err="1">
+                            <a:solidFill>
+                              <a:srgbClr val="53616E"/>
+                            </a:solidFill>
+                            <a:latin typeface="Cambria Math" panose="02040503050406030204" pitchFamily="18" charset="0"/>
+                          </a:rPr>
+                          <m:t>𝑗</m:t>
+                        </m:r>
+                        <m:r>
+                          <a:rPr lang="ar-AE" sz="1700" b="0" i="1" dirty="0" err="1">
+                            <a:solidFill>
+                              <a:srgbClr val="53616E"/>
+                            </a:solidFill>
+                            <a:latin typeface="Cambria Math" panose="02040503050406030204" pitchFamily="18" charset="0"/>
+                          </a:rPr>
+                          <m:t>𝜔</m:t>
+                        </m:r>
+                      </m:sup>
+                    </m:sSup>
+                    <m:r>
+                      <a:rPr lang="ar-AE" sz="1700" b="0" i="1" dirty="0">
+                        <a:solidFill>
+                          <a:srgbClr val="53616E"/>
+                        </a:solidFill>
+                        <a:latin typeface="Cambria Math" panose="02040503050406030204" pitchFamily="18" charset="0"/>
+                      </a:rPr>
+                      <m:t>) = </m:t>
+                    </m:r>
+                    <m:nary>
+                      <m:naryPr>
+                        <m:chr m:val="∑"/>
+                        <m:limLoc m:val="subSup"/>
+                        <m:supHide m:val="on"/>
+                        <m:ctrlPr>
+                          <a:rPr lang="en-US" sz="1700" b="0" i="1" dirty="0" smtClean="0">
+                            <a:solidFill>
+                              <a:srgbClr val="53616E"/>
+                            </a:solidFill>
+                            <a:latin typeface="Cambria Math" panose="02040503050406030204" pitchFamily="18" charset="0"/>
+                          </a:rPr>
+                        </m:ctrlPr>
+                      </m:naryPr>
+                      <m:sub>
+                        <m:r>
+                          <m:rPr>
+                            <m:brk m:alnAt="9"/>
+                          </m:rPr>
+                          <a:rPr lang="en-US" sz="1700" b="0" i="1" dirty="0" smtClean="0">
+                            <a:solidFill>
+                              <a:srgbClr val="53616E"/>
+                            </a:solidFill>
+                            <a:latin typeface="Cambria Math" panose="02040503050406030204" pitchFamily="18" charset="0"/>
+                          </a:rPr>
+                          <m:t>𝑛</m:t>
+                        </m:r>
+                      </m:sub>
+                      <m:sup/>
+                      <m:e>
+                        <m:r>
+                          <a:rPr lang="el-GR" sz="1700" i="1" dirty="0">
+                            <a:solidFill>
+                              <a:srgbClr val="53616E"/>
+                            </a:solidFill>
+                            <a:latin typeface="Cambria Math" panose="02040503050406030204" pitchFamily="18" charset="0"/>
+                          </a:rPr>
+                          <m:t>ℎ</m:t>
+                        </m:r>
+                        <m:d>
+                          <m:dPr>
+                            <m:begChr m:val="["/>
+                            <m:endChr m:val="]"/>
+                            <m:ctrlPr>
+                              <a:rPr lang="el-GR" sz="1700" i="1" dirty="0">
+                                <a:solidFill>
+                                  <a:srgbClr val="53616E"/>
+                                </a:solidFill>
+                                <a:latin typeface="Cambria Math" panose="02040503050406030204" pitchFamily="18" charset="0"/>
+                              </a:rPr>
+                            </m:ctrlPr>
+                          </m:dPr>
+                          <m:e>
+                            <m:r>
+                              <a:rPr lang="el-GR" sz="1700" i="1" dirty="0">
+                                <a:solidFill>
+                                  <a:srgbClr val="53616E"/>
+                                </a:solidFill>
+                                <a:latin typeface="Cambria Math" panose="02040503050406030204" pitchFamily="18" charset="0"/>
+                              </a:rPr>
+                              <m:t>𝑛</m:t>
+                            </m:r>
+                          </m:e>
+                        </m:d>
+                        <m:sSup>
+                          <m:sSupPr>
+                            <m:ctrlPr>
+                              <a:rPr lang="el-GR" sz="1700" i="1" dirty="0">
+                                <a:solidFill>
+                                  <a:srgbClr val="53616E"/>
+                                </a:solidFill>
+                                <a:latin typeface="Cambria Math" panose="02040503050406030204" pitchFamily="18" charset="0"/>
+                              </a:rPr>
+                            </m:ctrlPr>
+                          </m:sSupPr>
+                          <m:e>
+                            <m:r>
+                              <a:rPr lang="el-GR" sz="1700" i="1" dirty="0">
+                                <a:solidFill>
+                                  <a:srgbClr val="53616E"/>
+                                </a:solidFill>
+                                <a:latin typeface="Cambria Math" panose="02040503050406030204" pitchFamily="18" charset="0"/>
+                              </a:rPr>
+                              <m:t>𝑒</m:t>
+                            </m:r>
+                          </m:e>
+                          <m:sup>
+                            <m:r>
+                              <a:rPr lang="el-GR" sz="1700" i="1" dirty="0">
+                                <a:solidFill>
+                                  <a:srgbClr val="53616E"/>
+                                </a:solidFill>
+                                <a:latin typeface="Cambria Math" panose="02040503050406030204" pitchFamily="18" charset="0"/>
+                              </a:rPr>
+                              <m:t>−</m:t>
+                            </m:r>
+                            <m:r>
+                              <a:rPr lang="el-GR" sz="1700" i="1" dirty="0" err="1">
+                                <a:solidFill>
+                                  <a:srgbClr val="53616E"/>
+                                </a:solidFill>
+                                <a:latin typeface="Cambria Math" panose="02040503050406030204" pitchFamily="18" charset="0"/>
+                              </a:rPr>
+                              <m:t>𝑗</m:t>
+                            </m:r>
+                            <m:r>
+                              <a:rPr lang="el-GR" sz="1700" i="1" dirty="0" err="1">
+                                <a:solidFill>
+                                  <a:srgbClr val="53616E"/>
+                                </a:solidFill>
+                                <a:latin typeface="Cambria Math" panose="02040503050406030204" pitchFamily="18" charset="0"/>
+                              </a:rPr>
+                              <m:t>𝜔</m:t>
+                            </m:r>
+                            <m:r>
+                              <a:rPr lang="el-GR" sz="1700" i="1" dirty="0" err="1">
+                                <a:solidFill>
+                                  <a:srgbClr val="53616E"/>
+                                </a:solidFill>
+                                <a:latin typeface="Cambria Math" panose="02040503050406030204" pitchFamily="18" charset="0"/>
+                              </a:rPr>
+                              <m:t>𝑛</m:t>
+                            </m:r>
+                          </m:sup>
+                        </m:sSup>
+                      </m:e>
+                    </m:nary>
+                    <m:r>
+                      <a:rPr lang="el-GR" sz="1700" b="0" i="1" dirty="0">
+                        <a:solidFill>
+                          <a:srgbClr val="53616E"/>
+                        </a:solidFill>
+                        <a:latin typeface="Cambria Math" panose="02040503050406030204" pitchFamily="18" charset="0"/>
+                      </a:rPr>
+                      <m:t> </m:t>
+                    </m:r>
+                  </m:oMath>
+                </a14:m>
+                <a:r>
+                  <a:rPr lang="en-US" sz="1700" b="0" dirty="0">
+                    <a:solidFill>
+                      <a:srgbClr val="53616E"/>
+                    </a:solidFill>
+                    <a:latin typeface="Aptos"/>
+                  </a:rPr>
+                  <a:t>converges for every </a:t>
+                </a:r>
+                <a14:m>
+                  <m:oMath xmlns:m="http://schemas.openxmlformats.org/officeDocument/2006/math">
+                    <m:r>
+                      <a:rPr lang="el-GR" sz="1700" b="0" i="1" dirty="0" smtClean="0">
+                        <a:solidFill>
+                          <a:srgbClr val="53616E"/>
+                        </a:solidFill>
+                        <a:latin typeface="Cambria Math" panose="02040503050406030204" pitchFamily="18" charset="0"/>
+                      </a:rPr>
+                      <m:t>𝜔</m:t>
+                    </m:r>
+                  </m:oMath>
+                </a14:m>
+                <a:r>
+                  <a:rPr lang="el-GR" sz="1700" b="0" dirty="0">
+                    <a:solidFill>
+                      <a:srgbClr val="53616E"/>
+                    </a:solidFill>
+                    <a:latin typeface="Aptos"/>
+                  </a:rPr>
+                  <a:t>.</a:t>
+                </a:r>
+                <a:endParaRPr sz="1700" b="0" dirty="0">
+                  <a:solidFill>
+                    <a:srgbClr val="53616E"/>
+                  </a:solidFill>
+                  <a:latin typeface="Aptos"/>
+                </a:endParaRPr>
+              </a:p>
+            </p:txBody>
+          </p:sp>
+        </mc:Choice>
+        <mc:Fallback>
+          <p:sp>
+            <p:nvSpPr>
+              <p:cNvPr id="9" name="TextBox 8"/>
+              <p:cNvSpPr txBox="1">
+                <a:spLocks noRot="1" noChangeAspect="1" noMove="1" noResize="1" noEditPoints="1" noAdjustHandles="1" noChangeArrowheads="1" noChangeShapeType="1" noTextEdit="1"/>
+              </p:cNvSpPr>
+              <p:nvPr/>
+            </p:nvSpPr>
+            <p:spPr>
+              <a:xfrm>
+                <a:off x="1188720" y="3156780"/>
+                <a:ext cx="4297680" cy="635880"/>
+              </a:xfrm>
+              <a:prstGeom prst="rect">
+                <a:avLst/>
+              </a:prstGeom>
+              <a:blipFill>
+                <a:blip r:embed="rId2"/>
+                <a:stretch>
+                  <a:fillRect l="-709" t="-61538" r="-1560" b="-54808"/>
+                </a:stretch>
+              </a:blipFill>
+            </p:spPr>
+            <p:txBody>
+              <a:bodyPr/>
+              <a:lstStyle/>
+              <a:p>
+                <a:r>
+                  <a:rPr lang="en-US">
+                    <a:noFill/>
+                  </a:rPr>
+                  <a:t> </a:t>
+                </a:r>
+              </a:p>
+            </p:txBody>
+          </p:sp>
+        </mc:Fallback>
+      </mc:AlternateContent>
       <p:sp>
         <p:nvSpPr>
           <p:cNvPr id="10" name="Rounded Rectangle 9"/>

--- a/lecture_slides/Week3_Lecture6_Transfer_Functions_PoleZero_091026_forClass.pptx
+++ b/lecture_slides/Week3_Lecture6_Transfer_Functions_PoleZero_091026_forClass.pptx
@@ -16,23 +16,24 @@
     <p:sldId id="263" r:id="rId10"/>
     <p:sldId id="279" r:id="rId11"/>
     <p:sldId id="264" r:id="rId12"/>
-    <p:sldId id="265" r:id="rId13"/>
-    <p:sldId id="266" r:id="rId14"/>
-    <p:sldId id="267" r:id="rId15"/>
-    <p:sldId id="268" r:id="rId16"/>
-    <p:sldId id="269" r:id="rId17"/>
-    <p:sldId id="270" r:id="rId18"/>
-    <p:sldId id="271" r:id="rId19"/>
-    <p:sldId id="272" r:id="rId20"/>
-    <p:sldId id="273" r:id="rId21"/>
-    <p:sldId id="274" r:id="rId22"/>
-    <p:sldId id="275" r:id="rId23"/>
-    <p:sldId id="280" r:id="rId24"/>
-    <p:sldId id="276" r:id="rId25"/>
-    <p:sldId id="281" r:id="rId26"/>
-    <p:sldId id="277" r:id="rId27"/>
-    <p:sldId id="278" r:id="rId28"/>
-    <p:sldId id="283" r:id="rId29"/>
+    <p:sldId id="284" r:id="rId13"/>
+    <p:sldId id="265" r:id="rId14"/>
+    <p:sldId id="266" r:id="rId15"/>
+    <p:sldId id="267" r:id="rId16"/>
+    <p:sldId id="268" r:id="rId17"/>
+    <p:sldId id="269" r:id="rId18"/>
+    <p:sldId id="270" r:id="rId19"/>
+    <p:sldId id="271" r:id="rId20"/>
+    <p:sldId id="272" r:id="rId21"/>
+    <p:sldId id="273" r:id="rId22"/>
+    <p:sldId id="274" r:id="rId23"/>
+    <p:sldId id="275" r:id="rId24"/>
+    <p:sldId id="280" r:id="rId25"/>
+    <p:sldId id="276" r:id="rId26"/>
+    <p:sldId id="281" r:id="rId27"/>
+    <p:sldId id="277" r:id="rId28"/>
+    <p:sldId id="278" r:id="rId29"/>
+    <p:sldId id="283" r:id="rId30"/>
   </p:sldIdLst>
   <p:sldSz cx="12192000" cy="6858000"/>
   <p:notesSz cx="6858000" cy="12192000"/>
@@ -298,7 +299,7 @@
           </a:prstGeom>
           <a:extLst>
             <a:ext uri="{C572A759-6A51-4108-AA02-DFA0A04FC94B}">
-              <ma14:wrappingTextBoxFlag xmlns:ma14="http://schemas.microsoft.com/office/mac/drawingml/2011/main" xmlns="" val="0"/>
+              <ma14:wrappingTextBoxFlag xmlns="" xmlns:ma14="http://schemas.microsoft.com/office/mac/drawingml/2011/main" val="0"/>
             </a:ext>
           </a:extLst>
         </p:spPr>
@@ -376,7 +377,7 @@
           </a:prstGeom>
           <a:extLst>
             <a:ext uri="{C572A759-6A51-4108-AA02-DFA0A04FC94B}">
-              <ma14:wrappingTextBoxFlag xmlns:ma14="http://schemas.microsoft.com/office/mac/drawingml/2011/main" xmlns="" val="0"/>
+              <ma14:wrappingTextBoxFlag xmlns="" xmlns:ma14="http://schemas.microsoft.com/office/mac/drawingml/2011/main" val="0"/>
             </a:ext>
           </a:extLst>
         </p:spPr>
@@ -1690,7 +1691,7 @@
           <a:p>
             <a:pPr algn="l"/>
             <a:r>
-              <a:rPr sz="2400" b="1">
+              <a:rPr sz="2400" b="1" dirty="0">
                 <a:solidFill>
                   <a:srgbClr val="16324F"/>
                 </a:solidFill>
@@ -2097,6 +2098,197 @@
           <a:chExt cx="0" cy="0"/>
         </a:xfrm>
       </p:grpSpPr>
+      <p:pic>
+        <p:nvPicPr>
+          <p:cNvPr id="3" name="Picture 2" descr="The diagram illustrates a polar coordinate system where distances from the origin (pole) are plotted, ranging from -1.0 to 1.0, showing how distance values change from positive to zero to negative.&#10;&#10;AI-generated content may be incorrect.">
+            <a:extLst>
+              <a:ext uri="{FF2B5EF4-FFF2-40B4-BE49-F238E27FC236}">
+                <a16:creationId xmlns:a16="http://schemas.microsoft.com/office/drawing/2014/main" id="{EF31CC0A-1A94-133A-C80A-74447D5C1D96}"/>
+              </a:ext>
+            </a:extLst>
+          </p:cNvPr>
+          <p:cNvPicPr>
+            <a:picLocks noChangeAspect="1"/>
+          </p:cNvPicPr>
+          <p:nvPr/>
+        </p:nvPicPr>
+        <p:blipFill>
+          <a:blip r:embed="rId2"/>
+          <a:stretch>
+            <a:fillRect/>
+          </a:stretch>
+        </p:blipFill>
+        <p:spPr>
+          <a:xfrm>
+            <a:off x="249226" y="2415886"/>
+            <a:ext cx="3717077" cy="2997777"/>
+          </a:xfrm>
+          <a:prstGeom prst="rect">
+            <a:avLst/>
+          </a:prstGeom>
+        </p:spPr>
+      </p:pic>
+      <p:pic>
+        <p:nvPicPr>
+          <p:cNvPr id="5" name="Picture 4" descr="The diagram illustrates a polar coordinate system where distances from the origin (pole) are plotted, ranging from -1.0 to 1.0, showing how distance values change from positive to zero to negative.&#10;&#10;AI-generated content may be incorrect.">
+            <a:extLst>
+              <a:ext uri="{FF2B5EF4-FFF2-40B4-BE49-F238E27FC236}">
+                <a16:creationId xmlns:a16="http://schemas.microsoft.com/office/drawing/2014/main" id="{DB9A0469-5299-AA49-A4AE-E5744CE9E13F}"/>
+              </a:ext>
+            </a:extLst>
+          </p:cNvPr>
+          <p:cNvPicPr>
+            <a:picLocks noChangeAspect="1"/>
+          </p:cNvPicPr>
+          <p:nvPr/>
+        </p:nvPicPr>
+        <p:blipFill>
+          <a:blip r:embed="rId2"/>
+          <a:stretch>
+            <a:fillRect/>
+          </a:stretch>
+        </p:blipFill>
+        <p:spPr>
+          <a:xfrm>
+            <a:off x="4201093" y="2415885"/>
+            <a:ext cx="3717077" cy="2997777"/>
+          </a:xfrm>
+          <a:prstGeom prst="rect">
+            <a:avLst/>
+          </a:prstGeom>
+        </p:spPr>
+      </p:pic>
+      <p:pic>
+        <p:nvPicPr>
+          <p:cNvPr id="7" name="Picture 6" descr="The diagram illustrates a polar coordinate system where distances from the origin (pole) are plotted, ranging from -1.0 to 1.0, showing how distance values change from positive to zero to negative.&#10;&#10;AI-generated content may be incorrect.">
+            <a:extLst>
+              <a:ext uri="{FF2B5EF4-FFF2-40B4-BE49-F238E27FC236}">
+                <a16:creationId xmlns:a16="http://schemas.microsoft.com/office/drawing/2014/main" id="{E1806783-3755-2D0C-5BC0-F65845FD2B6B}"/>
+              </a:ext>
+            </a:extLst>
+          </p:cNvPr>
+          <p:cNvPicPr>
+            <a:picLocks noChangeAspect="1"/>
+          </p:cNvPicPr>
+          <p:nvPr/>
+        </p:nvPicPr>
+        <p:blipFill>
+          <a:blip r:embed="rId2"/>
+          <a:stretch>
+            <a:fillRect/>
+          </a:stretch>
+        </p:blipFill>
+        <p:spPr>
+          <a:xfrm>
+            <a:off x="8152960" y="2415884"/>
+            <a:ext cx="3717077" cy="2997777"/>
+          </a:xfrm>
+          <a:prstGeom prst="rect">
+            <a:avLst/>
+          </a:prstGeom>
+        </p:spPr>
+      </p:pic>
+      <p:pic>
+        <p:nvPicPr>
+          <p:cNvPr id="9" name="Picture 8" descr="eq_geom.png">
+            <a:extLst>
+              <a:ext uri="{FF2B5EF4-FFF2-40B4-BE49-F238E27FC236}">
+                <a16:creationId xmlns:a16="http://schemas.microsoft.com/office/drawing/2014/main" id="{FE4A5687-C11D-A6F9-E81A-20148E411352}"/>
+              </a:ext>
+            </a:extLst>
+          </p:cNvPr>
+          <p:cNvPicPr>
+            <a:picLocks noChangeAspect="1"/>
+          </p:cNvPicPr>
+          <p:nvPr/>
+        </p:nvPicPr>
+        <p:blipFill>
+          <a:blip r:embed="rId3"/>
+          <a:stretch>
+            <a:fillRect/>
+          </a:stretch>
+        </p:blipFill>
+        <p:spPr>
+          <a:xfrm>
+            <a:off x="4862944" y="651511"/>
+            <a:ext cx="7174923" cy="1221584"/>
+          </a:xfrm>
+          <a:prstGeom prst="rect">
+            <a:avLst/>
+          </a:prstGeom>
+        </p:spPr>
+      </p:pic>
+      <p:sp>
+        <p:nvSpPr>
+          <p:cNvPr id="11" name="TextBox 10">
+            <a:extLst>
+              <a:ext uri="{FF2B5EF4-FFF2-40B4-BE49-F238E27FC236}">
+                <a16:creationId xmlns:a16="http://schemas.microsoft.com/office/drawing/2014/main" id="{84559C90-1F6D-8458-120D-A8840AF44A01}"/>
+              </a:ext>
+            </a:extLst>
+          </p:cNvPr>
+          <p:cNvSpPr txBox="1"/>
+          <p:nvPr/>
+        </p:nvSpPr>
+        <p:spPr>
+          <a:xfrm>
+            <a:off x="566928" y="301752"/>
+            <a:ext cx="9692640" cy="438912"/>
+          </a:xfrm>
+          <a:prstGeom prst="rect">
+            <a:avLst/>
+          </a:prstGeom>
+          <a:noFill/>
+        </p:spPr>
+        <p:txBody>
+          <a:bodyPr wrap="square" lIns="45720" rIns="45720" anchor="ctr">
+            <a:spAutoFit/>
+          </a:bodyPr>
+          <a:lstStyle/>
+          <a:p>
+            <a:pPr algn="l"/>
+            <a:r>
+              <a:rPr sz="2400" b="1" dirty="0">
+                <a:solidFill>
+                  <a:srgbClr val="16324F"/>
+                </a:solidFill>
+                <a:latin typeface="Aptos"/>
+              </a:rPr>
+              <a:t>Geometric frequency response</a:t>
+            </a:r>
+          </a:p>
+        </p:txBody>
+      </p:sp>
+    </p:spTree>
+    <p:extLst>
+      <p:ext uri="{BB962C8B-B14F-4D97-AF65-F5344CB8AC3E}">
+        <p14:creationId xmlns:p14="http://schemas.microsoft.com/office/powerpoint/2010/main" val="3063267660"/>
+      </p:ext>
+    </p:extLst>
+  </p:cSld>
+  <p:clrMapOvr>
+    <a:masterClrMapping/>
+  </p:clrMapOvr>
+</p:sld>
+</file>
+
+<file path=ppt/slides/slide13.xml><?xml version="1.0" encoding="utf-8"?>
+<p:sld xmlns:a="http://schemas.openxmlformats.org/drawingml/2006/main" xmlns:r="http://schemas.openxmlformats.org/officeDocument/2006/relationships" xmlns:p="http://schemas.openxmlformats.org/presentationml/2006/main">
+  <p:cSld>
+    <p:spTree>
+      <p:nvGrpSpPr>
+        <p:cNvPr id="1" name=""/>
+        <p:cNvGrpSpPr/>
+        <p:nvPr/>
+      </p:nvGrpSpPr>
+      <p:grpSpPr>
+        <a:xfrm>
+          <a:off x="0" y="0"/>
+          <a:ext cx="0" cy="0"/>
+          <a:chOff x="0" y="0"/>
+          <a:chExt cx="0" cy="0"/>
+        </a:xfrm>
+      </p:grpSpPr>
       <p:sp>
         <p:nvSpPr>
           <p:cNvPr id="2" name="TextBox 1"/>
@@ -2353,8 +2545,8 @@
           </a:p>
         </p:txBody>
       </p:sp>
-      <mc:AlternateContent xmlns:mc="http://schemas.openxmlformats.org/markup-compatibility/2006">
-        <mc:Choice xmlns:a14="http://schemas.microsoft.com/office/drawing/2010/main" Requires="a14">
+      <mc:AlternateContent xmlns:mc="http://schemas.openxmlformats.org/markup-compatibility/2006" xmlns:a14="http://schemas.microsoft.com/office/drawing/2010/main">
+        <mc:Choice Requires="a14">
           <p:sp>
             <p:nvSpPr>
               <p:cNvPr id="9" name="TextBox 8"/>
@@ -2532,7 +2724,7 @@
             </p:txBody>
           </p:sp>
         </mc:Choice>
-        <mc:Fallback>
+        <mc:Fallback xmlns="">
           <p:sp>
             <p:nvSpPr>
               <p:cNvPr id="9" name="TextBox 8"/>
@@ -2649,444 +2841,6 @@
 </p:sld>
 </file>
 
-<file path=ppt/slides/slide13.xml><?xml version="1.0" encoding="utf-8"?>
-<p:sld xmlns:a="http://schemas.openxmlformats.org/drawingml/2006/main" xmlns:r="http://schemas.openxmlformats.org/officeDocument/2006/relationships" xmlns:p="http://schemas.openxmlformats.org/presentationml/2006/main">
-  <p:cSld>
-    <p:spTree>
-      <p:nvGrpSpPr>
-        <p:cNvPr id="1" name=""/>
-        <p:cNvGrpSpPr/>
-        <p:nvPr/>
-      </p:nvGrpSpPr>
-      <p:grpSpPr>
-        <a:xfrm>
-          <a:off x="0" y="0"/>
-          <a:ext cx="0" cy="0"/>
-          <a:chOff x="0" y="0"/>
-          <a:chExt cx="0" cy="0"/>
-        </a:xfrm>
-      </p:grpSpPr>
-      <p:sp>
-        <p:nvSpPr>
-          <p:cNvPr id="2" name="TextBox 1"/>
-          <p:cNvSpPr txBox="1"/>
-          <p:nvPr/>
-        </p:nvSpPr>
-        <p:spPr>
-          <a:xfrm>
-            <a:off x="566928" y="301752"/>
-            <a:ext cx="9692640" cy="438912"/>
-          </a:xfrm>
-          <a:prstGeom prst="rect">
-            <a:avLst/>
-          </a:prstGeom>
-          <a:noFill/>
-        </p:spPr>
-        <p:txBody>
-          <a:bodyPr wrap="square" lIns="45720" rIns="45720" anchor="ctr">
-            <a:spAutoFit/>
-          </a:bodyPr>
-          <a:lstStyle/>
-          <a:p>
-            <a:pPr algn="l"/>
-            <a:r>
-              <a:rPr sz="2400" b="1">
-                <a:solidFill>
-                  <a:srgbClr val="16324F"/>
-                </a:solidFill>
-                <a:latin typeface="Aptos"/>
-              </a:rPr>
-              <a:t>Poles push the magnitude up</a:t>
-            </a:r>
-          </a:p>
-        </p:txBody>
-      </p:sp>
-      <p:sp>
-        <p:nvSpPr>
-          <p:cNvPr id="3" name="Rounded Rectangle 2"/>
-          <p:cNvSpPr/>
-          <p:nvPr/>
-        </p:nvSpPr>
-        <p:spPr>
-          <a:xfrm>
-            <a:off x="10332720" y="283464"/>
-            <a:ext cx="1234440" cy="347472"/>
-          </a:xfrm>
-          <a:prstGeom prst="roundRect">
-            <a:avLst/>
-          </a:prstGeom>
-          <a:solidFill>
-            <a:srgbClr val="E8F7F7"/>
-          </a:solidFill>
-          <a:ln w="12700">
-            <a:solidFill>
-              <a:srgbClr val="00A6A6"/>
-            </a:solidFill>
-          </a:ln>
-        </p:spPr>
-        <p:style>
-          <a:lnRef idx="1">
-            <a:schemeClr val="accent1"/>
-          </a:lnRef>
-          <a:fillRef idx="3">
-            <a:schemeClr val="accent1"/>
-          </a:fillRef>
-          <a:effectRef idx="2">
-            <a:schemeClr val="accent1"/>
-          </a:effectRef>
-          <a:fontRef idx="minor">
-            <a:schemeClr val="lt1"/>
-          </a:fontRef>
-        </p:style>
-        <p:txBody>
-          <a:bodyPr rtlCol="0" anchor="ctr"/>
-          <a:lstStyle/>
-          <a:p>
-            <a:pPr algn="ctr"/>
-            <a:endParaRPr/>
-          </a:p>
-        </p:txBody>
-      </p:sp>
-      <p:sp>
-        <p:nvSpPr>
-          <p:cNvPr id="4" name="TextBox 3"/>
-          <p:cNvSpPr txBox="1"/>
-          <p:nvPr/>
-        </p:nvSpPr>
-        <p:spPr>
-          <a:xfrm>
-            <a:off x="10351008" y="292608"/>
-            <a:ext cx="1197864" cy="310896"/>
-          </a:xfrm>
-          <a:prstGeom prst="rect">
-            <a:avLst/>
-          </a:prstGeom>
-          <a:noFill/>
-        </p:spPr>
-        <p:txBody>
-          <a:bodyPr wrap="square" lIns="45720" rIns="45720" anchor="ctr">
-            <a:spAutoFit/>
-          </a:bodyPr>
-          <a:lstStyle/>
-          <a:p>
-            <a:pPr algn="ctr"/>
-            <a:r>
-              <a:rPr sz="1100" b="1">
-                <a:solidFill>
-                  <a:srgbClr val="16324F"/>
-                </a:solidFill>
-                <a:latin typeface="Aptos"/>
-              </a:rPr>
-              <a:t>40–60 MIN</a:t>
-            </a:r>
-          </a:p>
-        </p:txBody>
-      </p:sp>
-      <p:sp>
-        <p:nvSpPr>
-          <p:cNvPr id="5" name="TextBox 4"/>
-          <p:cNvSpPr txBox="1"/>
-          <p:nvPr/>
-        </p:nvSpPr>
-        <p:spPr>
-          <a:xfrm>
-            <a:off x="594360" y="786384"/>
-            <a:ext cx="10652760" cy="329184"/>
-          </a:xfrm>
-          <a:prstGeom prst="rect">
-            <a:avLst/>
-          </a:prstGeom>
-          <a:noFill/>
-        </p:spPr>
-        <p:txBody>
-          <a:bodyPr wrap="square" lIns="45720" rIns="45720" anchor="ctr">
-            <a:spAutoFit/>
-          </a:bodyPr>
-          <a:lstStyle/>
-          <a:p>
-            <a:pPr algn="l"/>
-            <a:r>
-              <a:rPr sz="1200" b="0">
-                <a:solidFill>
-                  <a:srgbClr val="53616E"/>
-                </a:solidFill>
-                <a:latin typeface="Aptos"/>
-              </a:rPr>
-              <a:t>A pole close to the unit circle creates a resonant peak near its angle.</a:t>
-            </a:r>
-          </a:p>
-        </p:txBody>
-      </p:sp>
-      <p:pic>
-        <p:nvPicPr>
-          <p:cNvPr id="6" name="Picture 5" descr="pole_influence.png"/>
-          <p:cNvPicPr>
-            <a:picLocks noChangeAspect="1"/>
-          </p:cNvPicPr>
-          <p:nvPr/>
-        </p:nvPicPr>
-        <p:blipFill>
-          <a:blip r:embed="rId2"/>
-          <a:stretch>
-            <a:fillRect/>
-          </a:stretch>
-        </p:blipFill>
-        <p:spPr>
-          <a:xfrm>
-            <a:off x="777240" y="1325880"/>
-            <a:ext cx="6446520" cy="4251960"/>
-          </a:xfrm>
-          <a:prstGeom prst="rect">
-            <a:avLst/>
-          </a:prstGeom>
-        </p:spPr>
-      </p:pic>
-      <p:sp>
-        <p:nvSpPr>
-          <p:cNvPr id="7" name="Rounded Rectangle 6"/>
-          <p:cNvSpPr/>
-          <p:nvPr/>
-        </p:nvSpPr>
-        <p:spPr>
-          <a:xfrm>
-            <a:off x="7498079" y="1417320"/>
-            <a:ext cx="3749039" cy="3886200"/>
-          </a:xfrm>
-          <a:prstGeom prst="roundRect">
-            <a:avLst/>
-          </a:prstGeom>
-          <a:solidFill>
-            <a:srgbClr val="FFF2E6"/>
-          </a:solidFill>
-          <a:ln w="12700">
-            <a:solidFill>
-              <a:srgbClr val="F28E2B"/>
-            </a:solidFill>
-          </a:ln>
-        </p:spPr>
-        <p:style>
-          <a:lnRef idx="1">
-            <a:schemeClr val="accent1"/>
-          </a:lnRef>
-          <a:fillRef idx="3">
-            <a:schemeClr val="accent1"/>
-          </a:fillRef>
-          <a:effectRef idx="2">
-            <a:schemeClr val="accent1"/>
-          </a:effectRef>
-          <a:fontRef idx="minor">
-            <a:schemeClr val="lt1"/>
-          </a:fontRef>
-        </p:style>
-        <p:txBody>
-          <a:bodyPr rtlCol="0" anchor="ctr"/>
-          <a:lstStyle/>
-          <a:p>
-            <a:pPr algn="ctr"/>
-            <a:endParaRPr/>
-          </a:p>
-        </p:txBody>
-      </p:sp>
-      <p:sp>
-        <p:nvSpPr>
-          <p:cNvPr id="8" name="TextBox 7"/>
-          <p:cNvSpPr txBox="1"/>
-          <p:nvPr/>
-        </p:nvSpPr>
-        <p:spPr>
-          <a:xfrm>
-            <a:off x="7726679" y="1691640"/>
-            <a:ext cx="3291840" cy="365760"/>
-          </a:xfrm>
-          <a:prstGeom prst="rect">
-            <a:avLst/>
-          </a:prstGeom>
-          <a:noFill/>
-        </p:spPr>
-        <p:txBody>
-          <a:bodyPr wrap="square" lIns="45720" rIns="45720" anchor="ctr">
-            <a:spAutoFit/>
-          </a:bodyPr>
-          <a:lstStyle/>
-          <a:p>
-            <a:pPr algn="l"/>
-            <a:r>
-              <a:rPr sz="1700" b="1">
-                <a:solidFill>
-                  <a:srgbClr val="16324F"/>
-                </a:solidFill>
-                <a:latin typeface="Aptos"/>
-              </a:rPr>
-              <a:t>Geometric story</a:t>
-            </a:r>
-          </a:p>
-        </p:txBody>
-      </p:sp>
-      <p:sp>
-        <p:nvSpPr>
-          <p:cNvPr id="9" name="TextBox 8"/>
-          <p:cNvSpPr txBox="1"/>
-          <p:nvPr/>
-        </p:nvSpPr>
-        <p:spPr>
-          <a:xfrm>
-            <a:off x="7726679" y="2286000"/>
-            <a:ext cx="3154680" cy="2286000"/>
-          </a:xfrm>
-          <a:prstGeom prst="rect">
-            <a:avLst/>
-          </a:prstGeom>
-          <a:noFill/>
-        </p:spPr>
-        <p:txBody>
-          <a:bodyPr wrap="square" lIns="73152" rIns="36576" anchor="t">
-            <a:spAutoFit/>
-          </a:bodyPr>
-          <a:lstStyle/>
-          <a:p>
-            <a:pPr>
-              <a:spcAft>
-                <a:spcPts val="500"/>
-              </a:spcAft>
-              <a:defRPr sz="1600">
-                <a:solidFill>
-                  <a:srgbClr val="17212B"/>
-                </a:solidFill>
-                <a:latin typeface="Aptos"/>
-              </a:defRPr>
-            </a:pPr>
-            <a:r>
-              <a:t>• At a nearby unit-circle angle, the pole distance becomes small.</a:t>
-            </a:r>
-          </a:p>
-          <a:p>
-            <a:pPr>
-              <a:spcAft>
-                <a:spcPts val="500"/>
-              </a:spcAft>
-              <a:defRPr sz="1600">
-                <a:solidFill>
-                  <a:srgbClr val="17212B"/>
-                </a:solidFill>
-                <a:latin typeface="Aptos"/>
-              </a:defRPr>
-            </a:pPr>
-            <a:r>
-              <a:t>• That distance is in the denominator.</a:t>
-            </a:r>
-          </a:p>
-          <a:p>
-            <a:pPr>
-              <a:spcAft>
-                <a:spcPts val="500"/>
-              </a:spcAft>
-              <a:defRPr sz="1600">
-                <a:solidFill>
-                  <a:srgbClr val="17212B"/>
-                </a:solidFill>
-                <a:latin typeface="Aptos"/>
-              </a:defRPr>
-            </a:pPr>
-            <a:r>
-              <a:t>• Smaller denominator → larger magnitude.</a:t>
-            </a:r>
-          </a:p>
-          <a:p>
-            <a:pPr>
-              <a:spcAft>
-                <a:spcPts val="500"/>
-              </a:spcAft>
-              <a:defRPr sz="1600">
-                <a:solidFill>
-                  <a:srgbClr val="17212B"/>
-                </a:solidFill>
-                <a:latin typeface="Aptos"/>
-              </a:defRPr>
-            </a:pPr>
-            <a:r>
-              <a:t>• Closer pole radius → sharper, longer-lived resonance.</a:t>
-            </a:r>
-          </a:p>
-        </p:txBody>
-      </p:sp>
-      <p:sp>
-        <p:nvSpPr>
-          <p:cNvPr id="10" name="TextBox 9"/>
-          <p:cNvSpPr txBox="1"/>
-          <p:nvPr/>
-        </p:nvSpPr>
-        <p:spPr>
-          <a:xfrm>
-            <a:off x="566928" y="6473952"/>
-            <a:ext cx="4754880" cy="164592"/>
-          </a:xfrm>
-          <a:prstGeom prst="rect">
-            <a:avLst/>
-          </a:prstGeom>
-          <a:noFill/>
-        </p:spPr>
-        <p:txBody>
-          <a:bodyPr wrap="square" lIns="45720" rIns="45720" anchor="ctr">
-            <a:spAutoFit/>
-          </a:bodyPr>
-          <a:lstStyle/>
-          <a:p>
-            <a:pPr algn="l"/>
-            <a:r>
-              <a:rPr sz="800" b="0">
-                <a:solidFill>
-                  <a:srgbClr val="53616E"/>
-                </a:solidFill>
-                <a:latin typeface="Aptos"/>
-              </a:rPr>
-              <a:t>Week 3 • DSP + ML • Oppenheim &amp; Schafer</a:t>
-            </a:r>
-          </a:p>
-        </p:txBody>
-      </p:sp>
-      <p:sp>
-        <p:nvSpPr>
-          <p:cNvPr id="11" name="TextBox 10"/>
-          <p:cNvSpPr txBox="1"/>
-          <p:nvPr/>
-        </p:nvSpPr>
-        <p:spPr>
-          <a:xfrm>
-            <a:off x="11201400" y="6473952"/>
-            <a:ext cx="320040" cy="164592"/>
-          </a:xfrm>
-          <a:prstGeom prst="rect">
-            <a:avLst/>
-          </a:prstGeom>
-          <a:noFill/>
-        </p:spPr>
-        <p:txBody>
-          <a:bodyPr wrap="square" lIns="45720" rIns="45720" anchor="ctr">
-            <a:spAutoFit/>
-          </a:bodyPr>
-          <a:lstStyle/>
-          <a:p>
-            <a:pPr algn="r"/>
-            <a:r>
-              <a:rPr sz="800" b="0">
-                <a:solidFill>
-                  <a:srgbClr val="53616E"/>
-                </a:solidFill>
-                <a:latin typeface="Aptos"/>
-              </a:rPr>
-              <a:t>11</a:t>
-            </a:r>
-          </a:p>
-        </p:txBody>
-      </p:sp>
-    </p:spTree>
-  </p:cSld>
-  <p:clrMapOvr>
-    <a:masterClrMapping/>
-  </p:clrMapOvr>
-</p:sld>
-</file>
-
 <file path=ppt/slides/slide14.xml><?xml version="1.0" encoding="utf-8"?>
 <p:sld xmlns:a="http://schemas.openxmlformats.org/drawingml/2006/main" xmlns:r="http://schemas.openxmlformats.org/officeDocument/2006/relationships" xmlns:p="http://schemas.openxmlformats.org/presentationml/2006/main">
   <p:cSld>
@@ -3134,7 +2888,7 @@
                 </a:solidFill>
                 <a:latin typeface="Aptos"/>
               </a:rPr>
-              <a:t>First-order example: pole location predicts low-pass behavior</a:t>
+              <a:t>Poles push the magnitude up</a:t>
             </a:r>
           </a:p>
         </p:txBody>
@@ -3250,14 +3004,14 @@
                 </a:solidFill>
                 <a:latin typeface="Aptos"/>
               </a:rPr>
-              <a:t>H(z)=1/(1−0.8z⁻¹) has a pole at +0.8 on the real axis.</a:t>
+              <a:t>A pole close to the unit circle creates a resonant peak near its angle.</a:t>
             </a:r>
           </a:p>
         </p:txBody>
       </p:sp>
       <p:pic>
         <p:nvPicPr>
-          <p:cNvPr id="6" name="Picture 5" descr="pz_firstorder.png"/>
+          <p:cNvPr id="6" name="Picture 5" descr="pole_influence.png"/>
           <p:cNvPicPr>
             <a:picLocks noChangeAspect="1"/>
           </p:cNvPicPr>
@@ -3271,8 +3025,8 @@
         </p:blipFill>
         <p:spPr>
           <a:xfrm>
-            <a:off x="731520" y="1325880"/>
-            <a:ext cx="4572000" cy="3931920"/>
+            <a:off x="777240" y="1325880"/>
+            <a:ext cx="6446520" cy="4251960"/>
           </a:xfrm>
           <a:prstGeom prst="rect">
             <a:avLst/>
@@ -3287,18 +3041,18 @@
         </p:nvSpPr>
         <p:spPr>
           <a:xfrm>
-            <a:off x="5669280" y="1325880"/>
-            <a:ext cx="5349240" cy="3977639"/>
+            <a:off x="7498079" y="1417320"/>
+            <a:ext cx="3749039" cy="3886200"/>
           </a:xfrm>
           <a:prstGeom prst="roundRect">
             <a:avLst/>
           </a:prstGeom>
           <a:solidFill>
-            <a:srgbClr val="EDF3F7"/>
+            <a:srgbClr val="FFF2E6"/>
           </a:solidFill>
           <a:ln w="12700">
             <a:solidFill>
-              <a:srgbClr val="DCE6EC"/>
+              <a:srgbClr val="F28E2B"/>
             </a:solidFill>
           </a:ln>
         </p:spPr>
@@ -3333,8 +3087,43 @@
         </p:nvSpPr>
         <p:spPr>
           <a:xfrm>
-            <a:off x="5961888" y="1755648"/>
-            <a:ext cx="4754880" cy="3108960"/>
+            <a:off x="7726679" y="1691640"/>
+            <a:ext cx="3291840" cy="365760"/>
+          </a:xfrm>
+          <a:prstGeom prst="rect">
+            <a:avLst/>
+          </a:prstGeom>
+          <a:noFill/>
+        </p:spPr>
+        <p:txBody>
+          <a:bodyPr wrap="square" lIns="45720" rIns="45720" anchor="ctr">
+            <a:spAutoFit/>
+          </a:bodyPr>
+          <a:lstStyle/>
+          <a:p>
+            <a:pPr algn="l"/>
+            <a:r>
+              <a:rPr sz="1700" b="1">
+                <a:solidFill>
+                  <a:srgbClr val="16324F"/>
+                </a:solidFill>
+                <a:latin typeface="Aptos"/>
+              </a:rPr>
+              <a:t>Geometric story</a:t>
+            </a:r>
+          </a:p>
+        </p:txBody>
+      </p:sp>
+      <p:sp>
+        <p:nvSpPr>
+          <p:cNvPr id="9" name="TextBox 8"/>
+          <p:cNvSpPr txBox="1"/>
+          <p:nvPr/>
+        </p:nvSpPr>
+        <p:spPr>
+          <a:xfrm>
+            <a:off x="7726679" y="2286000"/>
+            <a:ext cx="3154680" cy="2286000"/>
           </a:xfrm>
           <a:prstGeom prst="rect">
             <a:avLst/>
@@ -3351,7 +3140,7 @@
               <a:spcAft>
                 <a:spcPts val="500"/>
               </a:spcAft>
-              <a:defRPr sz="1700">
+              <a:defRPr sz="1600">
                 <a:solidFill>
                   <a:srgbClr val="17212B"/>
                 </a:solidFill>
@@ -3359,7 +3148,7 @@
               </a:defRPr>
             </a:pPr>
             <a:r>
-              <a:t>• ω=0 corresponds to z=+1, close to the pole at +0.8 → large gain.</a:t>
+              <a:t>• At a nearby unit-circle angle, the pole distance becomes small.</a:t>
             </a:r>
           </a:p>
           <a:p>
@@ -3367,7 +3156,7 @@
               <a:spcAft>
                 <a:spcPts val="500"/>
               </a:spcAft>
-              <a:defRPr sz="1700">
+              <a:defRPr sz="1600">
                 <a:solidFill>
                   <a:srgbClr val="17212B"/>
                 </a:solidFill>
@@ -3375,7 +3164,7 @@
               </a:defRPr>
             </a:pPr>
             <a:r>
-              <a:t>• ω=π corresponds to z=−1, far from the pole → smaller gain.</a:t>
+              <a:t>• That distance is in the denominator.</a:t>
             </a:r>
           </a:p>
           <a:p>
@@ -3383,7 +3172,7 @@
               <a:spcAft>
                 <a:spcPts val="500"/>
               </a:spcAft>
-              <a:defRPr sz="1700">
+              <a:defRPr sz="1600">
                 <a:solidFill>
                   <a:srgbClr val="17212B"/>
                 </a:solidFill>
@@ -3391,7 +3180,7 @@
               </a:defRPr>
             </a:pPr>
             <a:r>
-              <a:t>• So the response favors low frequency before we compute a single formula.</a:t>
+              <a:t>• Smaller denominator → larger magnitude.</a:t>
             </a:r>
           </a:p>
           <a:p>
@@ -3399,7 +3188,7 @@
               <a:spcAft>
                 <a:spcPts val="500"/>
               </a:spcAft>
-              <a:defRPr sz="1700">
+              <a:defRPr sz="1600">
                 <a:solidFill>
                   <a:srgbClr val="17212B"/>
                 </a:solidFill>
@@ -3407,14 +3196,14 @@
               </a:defRPr>
             </a:pPr>
             <a:r>
-              <a:t>• This recovers the one-pole smoother from Week 1.</a:t>
-            </a:r>
-          </a:p>
-        </p:txBody>
-      </p:sp>
-      <p:sp>
-        <p:nvSpPr>
-          <p:cNvPr id="9" name="TextBox 8"/>
+              <a:t>• Closer pole radius → sharper, longer-lived resonance.</a:t>
+            </a:r>
+          </a:p>
+        </p:txBody>
+      </p:sp>
+      <p:sp>
+        <p:nvSpPr>
+          <p:cNvPr id="10" name="TextBox 9"/>
           <p:cNvSpPr txBox="1"/>
           <p:nvPr/>
         </p:nvSpPr>
@@ -3449,7 +3238,7 @@
       </p:sp>
       <p:sp>
         <p:nvSpPr>
-          <p:cNvPr id="10" name="TextBox 9"/>
+          <p:cNvPr id="11" name="TextBox 10"/>
           <p:cNvSpPr txBox="1"/>
           <p:nvPr/>
         </p:nvSpPr>
@@ -3477,7 +3266,7 @@
                 </a:solidFill>
                 <a:latin typeface="Aptos"/>
               </a:rPr>
-              <a:t>12</a:t>
+              <a:t>11</a:t>
             </a:r>
           </a:p>
         </p:txBody>
@@ -3537,7 +3326,7 @@
                 </a:solidFill>
                 <a:latin typeface="Aptos"/>
               </a:rPr>
-              <a:t>Design example: notch out 60 Hz hum</a:t>
+              <a:t>First-order example: pole location predicts low-pass behavior</a:t>
             </a:r>
           </a:p>
         </p:txBody>
@@ -3618,7 +3407,7 @@
                 </a:solidFill>
                 <a:latin typeface="Aptos"/>
               </a:rPr>
-              <a:t>60–75 MIN</a:t>
+              <a:t>40–60 MIN</a:t>
             </a:r>
           </a:p>
         </p:txBody>
@@ -3653,14 +3442,14 @@
                 </a:solidFill>
                 <a:latin typeface="Aptos"/>
               </a:rPr>
-              <a:t>Place conjugate zeros on the unit circle at the unwanted frequency.</a:t>
+              <a:t>H(z)=1/(1−0.8z⁻¹) has a pole at +0.8 on the real axis.</a:t>
             </a:r>
           </a:p>
         </p:txBody>
       </p:sp>
       <p:pic>
         <p:nvPicPr>
-          <p:cNvPr id="6" name="Picture 5" descr="notch60.png"/>
+          <p:cNvPr id="6" name="Picture 5" descr="pz_firstorder.png"/>
           <p:cNvPicPr>
             <a:picLocks noChangeAspect="1"/>
           </p:cNvPicPr>
@@ -3674,8 +3463,8 @@
         </p:blipFill>
         <p:spPr>
           <a:xfrm>
-            <a:off x="594360" y="1188720"/>
-            <a:ext cx="7086600" cy="4023360"/>
+            <a:off x="731520" y="1325880"/>
+            <a:ext cx="4572000" cy="3931920"/>
           </a:xfrm>
           <a:prstGeom prst="rect">
             <a:avLst/>
@@ -3690,8 +3479,271 @@
         </p:nvSpPr>
         <p:spPr>
           <a:xfrm>
-            <a:off x="7909560" y="1325880"/>
-            <a:ext cx="3474720" cy="3794760"/>
+            <a:off x="5669280" y="1325880"/>
+            <a:ext cx="5349240" cy="3977639"/>
+          </a:xfrm>
+          <a:prstGeom prst="roundRect">
+            <a:avLst/>
+          </a:prstGeom>
+          <a:solidFill>
+            <a:srgbClr val="EDF3F7"/>
+          </a:solidFill>
+          <a:ln w="12700">
+            <a:solidFill>
+              <a:srgbClr val="DCE6EC"/>
+            </a:solidFill>
+          </a:ln>
+        </p:spPr>
+        <p:style>
+          <a:lnRef idx="1">
+            <a:schemeClr val="accent1"/>
+          </a:lnRef>
+          <a:fillRef idx="3">
+            <a:schemeClr val="accent1"/>
+          </a:fillRef>
+          <a:effectRef idx="2">
+            <a:schemeClr val="accent1"/>
+          </a:effectRef>
+          <a:fontRef idx="minor">
+            <a:schemeClr val="lt1"/>
+          </a:fontRef>
+        </p:style>
+        <p:txBody>
+          <a:bodyPr rtlCol="0" anchor="ctr"/>
+          <a:lstStyle/>
+          <a:p>
+            <a:pPr algn="ctr"/>
+            <a:endParaRPr/>
+          </a:p>
+        </p:txBody>
+      </p:sp>
+      <p:sp>
+        <p:nvSpPr>
+          <p:cNvPr id="8" name="TextBox 7"/>
+          <p:cNvSpPr txBox="1"/>
+          <p:nvPr/>
+        </p:nvSpPr>
+        <p:spPr>
+          <a:xfrm>
+            <a:off x="5961888" y="1755648"/>
+            <a:ext cx="4754880" cy="3108960"/>
+          </a:xfrm>
+          <a:prstGeom prst="rect">
+            <a:avLst/>
+          </a:prstGeom>
+          <a:noFill/>
+        </p:spPr>
+        <p:txBody>
+          <a:bodyPr wrap="square" lIns="73152" rIns="36576" anchor="t">
+            <a:spAutoFit/>
+          </a:bodyPr>
+          <a:lstStyle/>
+          <a:p>
+            <a:pPr>
+              <a:spcAft>
+                <a:spcPts val="500"/>
+              </a:spcAft>
+              <a:defRPr sz="1700">
+                <a:solidFill>
+                  <a:srgbClr val="17212B"/>
+                </a:solidFill>
+                <a:latin typeface="Aptos"/>
+              </a:defRPr>
+            </a:pPr>
+            <a:r>
+              <a:t>• ω=0 corresponds to z=+1, close to the pole at +0.8 → large gain.</a:t>
+            </a:r>
+          </a:p>
+          <a:p>
+            <a:pPr>
+              <a:spcAft>
+                <a:spcPts val="500"/>
+              </a:spcAft>
+              <a:defRPr sz="1700">
+                <a:solidFill>
+                  <a:srgbClr val="17212B"/>
+                </a:solidFill>
+                <a:latin typeface="Aptos"/>
+              </a:defRPr>
+            </a:pPr>
+            <a:r>
+              <a:t>• ω=π corresponds to z=−1, far from the pole → smaller gain.</a:t>
+            </a:r>
+          </a:p>
+          <a:p>
+            <a:pPr>
+              <a:spcAft>
+                <a:spcPts val="500"/>
+              </a:spcAft>
+              <a:defRPr sz="1700">
+                <a:solidFill>
+                  <a:srgbClr val="17212B"/>
+                </a:solidFill>
+                <a:latin typeface="Aptos"/>
+              </a:defRPr>
+            </a:pPr>
+            <a:r>
+              <a:t>• So the response favors low frequency before we compute a single formula.</a:t>
+            </a:r>
+          </a:p>
+          <a:p>
+            <a:pPr>
+              <a:spcAft>
+                <a:spcPts val="500"/>
+              </a:spcAft>
+              <a:defRPr sz="1700">
+                <a:solidFill>
+                  <a:srgbClr val="17212B"/>
+                </a:solidFill>
+                <a:latin typeface="Aptos"/>
+              </a:defRPr>
+            </a:pPr>
+            <a:r>
+              <a:t>• This recovers the one-pole smoother from Week 1.</a:t>
+            </a:r>
+          </a:p>
+        </p:txBody>
+      </p:sp>
+      <p:sp>
+        <p:nvSpPr>
+          <p:cNvPr id="9" name="TextBox 8"/>
+          <p:cNvSpPr txBox="1"/>
+          <p:nvPr/>
+        </p:nvSpPr>
+        <p:spPr>
+          <a:xfrm>
+            <a:off x="566928" y="6473952"/>
+            <a:ext cx="4754880" cy="164592"/>
+          </a:xfrm>
+          <a:prstGeom prst="rect">
+            <a:avLst/>
+          </a:prstGeom>
+          <a:noFill/>
+        </p:spPr>
+        <p:txBody>
+          <a:bodyPr wrap="square" lIns="45720" rIns="45720" anchor="ctr">
+            <a:spAutoFit/>
+          </a:bodyPr>
+          <a:lstStyle/>
+          <a:p>
+            <a:pPr algn="l"/>
+            <a:r>
+              <a:rPr sz="800" b="0">
+                <a:solidFill>
+                  <a:srgbClr val="53616E"/>
+                </a:solidFill>
+                <a:latin typeface="Aptos"/>
+              </a:rPr>
+              <a:t>Week 3 • DSP + ML • Oppenheim &amp; Schafer</a:t>
+            </a:r>
+          </a:p>
+        </p:txBody>
+      </p:sp>
+      <p:sp>
+        <p:nvSpPr>
+          <p:cNvPr id="10" name="TextBox 9"/>
+          <p:cNvSpPr txBox="1"/>
+          <p:nvPr/>
+        </p:nvSpPr>
+        <p:spPr>
+          <a:xfrm>
+            <a:off x="11201400" y="6473952"/>
+            <a:ext cx="320040" cy="164592"/>
+          </a:xfrm>
+          <a:prstGeom prst="rect">
+            <a:avLst/>
+          </a:prstGeom>
+          <a:noFill/>
+        </p:spPr>
+        <p:txBody>
+          <a:bodyPr wrap="square" lIns="45720" rIns="45720" anchor="ctr">
+            <a:spAutoFit/>
+          </a:bodyPr>
+          <a:lstStyle/>
+          <a:p>
+            <a:pPr algn="r"/>
+            <a:r>
+              <a:rPr sz="800" b="0">
+                <a:solidFill>
+                  <a:srgbClr val="53616E"/>
+                </a:solidFill>
+                <a:latin typeface="Aptos"/>
+              </a:rPr>
+              <a:t>12</a:t>
+            </a:r>
+          </a:p>
+        </p:txBody>
+      </p:sp>
+    </p:spTree>
+  </p:cSld>
+  <p:clrMapOvr>
+    <a:masterClrMapping/>
+  </p:clrMapOvr>
+</p:sld>
+</file>
+
+<file path=ppt/slides/slide16.xml><?xml version="1.0" encoding="utf-8"?>
+<p:sld xmlns:a="http://schemas.openxmlformats.org/drawingml/2006/main" xmlns:r="http://schemas.openxmlformats.org/officeDocument/2006/relationships" xmlns:p="http://schemas.openxmlformats.org/presentationml/2006/main">
+  <p:cSld>
+    <p:spTree>
+      <p:nvGrpSpPr>
+        <p:cNvPr id="1" name=""/>
+        <p:cNvGrpSpPr/>
+        <p:nvPr/>
+      </p:nvGrpSpPr>
+      <p:grpSpPr>
+        <a:xfrm>
+          <a:off x="0" y="0"/>
+          <a:ext cx="0" cy="0"/>
+          <a:chOff x="0" y="0"/>
+          <a:chExt cx="0" cy="0"/>
+        </a:xfrm>
+      </p:grpSpPr>
+      <p:sp>
+        <p:nvSpPr>
+          <p:cNvPr id="2" name="TextBox 1"/>
+          <p:cNvSpPr txBox="1"/>
+          <p:nvPr/>
+        </p:nvSpPr>
+        <p:spPr>
+          <a:xfrm>
+            <a:off x="566928" y="301752"/>
+            <a:ext cx="9692640" cy="438912"/>
+          </a:xfrm>
+          <a:prstGeom prst="rect">
+            <a:avLst/>
+          </a:prstGeom>
+          <a:noFill/>
+        </p:spPr>
+        <p:txBody>
+          <a:bodyPr wrap="square" lIns="45720" rIns="45720" anchor="ctr">
+            <a:spAutoFit/>
+          </a:bodyPr>
+          <a:lstStyle/>
+          <a:p>
+            <a:pPr algn="l"/>
+            <a:r>
+              <a:rPr sz="2400" b="1">
+                <a:solidFill>
+                  <a:srgbClr val="16324F"/>
+                </a:solidFill>
+                <a:latin typeface="Aptos"/>
+              </a:rPr>
+              <a:t>Design example: notch out 60 Hz hum</a:t>
+            </a:r>
+          </a:p>
+        </p:txBody>
+      </p:sp>
+      <p:sp>
+        <p:nvSpPr>
+          <p:cNvPr id="3" name="Rounded Rectangle 2"/>
+          <p:cNvSpPr/>
+          <p:nvPr/>
+        </p:nvSpPr>
+        <p:spPr>
+          <a:xfrm>
+            <a:off x="10332720" y="283464"/>
+            <a:ext cx="1234440" cy="347472"/>
           </a:xfrm>
           <a:prstGeom prst="roundRect">
             <a:avLst/>
@@ -3730,6 +3782,146 @@
       </p:sp>
       <p:sp>
         <p:nvSpPr>
+          <p:cNvPr id="4" name="TextBox 3"/>
+          <p:cNvSpPr txBox="1"/>
+          <p:nvPr/>
+        </p:nvSpPr>
+        <p:spPr>
+          <a:xfrm>
+            <a:off x="10351008" y="292608"/>
+            <a:ext cx="1197864" cy="310896"/>
+          </a:xfrm>
+          <a:prstGeom prst="rect">
+            <a:avLst/>
+          </a:prstGeom>
+          <a:noFill/>
+        </p:spPr>
+        <p:txBody>
+          <a:bodyPr wrap="square" lIns="45720" rIns="45720" anchor="ctr">
+            <a:spAutoFit/>
+          </a:bodyPr>
+          <a:lstStyle/>
+          <a:p>
+            <a:pPr algn="ctr"/>
+            <a:r>
+              <a:rPr sz="1100" b="1">
+                <a:solidFill>
+                  <a:srgbClr val="16324F"/>
+                </a:solidFill>
+                <a:latin typeface="Aptos"/>
+              </a:rPr>
+              <a:t>60–75 MIN</a:t>
+            </a:r>
+          </a:p>
+        </p:txBody>
+      </p:sp>
+      <p:sp>
+        <p:nvSpPr>
+          <p:cNvPr id="5" name="TextBox 4"/>
+          <p:cNvSpPr txBox="1"/>
+          <p:nvPr/>
+        </p:nvSpPr>
+        <p:spPr>
+          <a:xfrm>
+            <a:off x="594360" y="786384"/>
+            <a:ext cx="10652760" cy="329184"/>
+          </a:xfrm>
+          <a:prstGeom prst="rect">
+            <a:avLst/>
+          </a:prstGeom>
+          <a:noFill/>
+        </p:spPr>
+        <p:txBody>
+          <a:bodyPr wrap="square" lIns="45720" rIns="45720" anchor="ctr">
+            <a:spAutoFit/>
+          </a:bodyPr>
+          <a:lstStyle/>
+          <a:p>
+            <a:pPr algn="l"/>
+            <a:r>
+              <a:rPr sz="1200" b="0">
+                <a:solidFill>
+                  <a:srgbClr val="53616E"/>
+                </a:solidFill>
+                <a:latin typeface="Aptos"/>
+              </a:rPr>
+              <a:t>Place conjugate zeros on the unit circle at the unwanted frequency.</a:t>
+            </a:r>
+          </a:p>
+        </p:txBody>
+      </p:sp>
+      <p:pic>
+        <p:nvPicPr>
+          <p:cNvPr id="6" name="Picture 5" descr="notch60.png"/>
+          <p:cNvPicPr>
+            <a:picLocks noChangeAspect="1"/>
+          </p:cNvPicPr>
+          <p:nvPr/>
+        </p:nvPicPr>
+        <p:blipFill>
+          <a:blip r:embed="rId2"/>
+          <a:stretch>
+            <a:fillRect/>
+          </a:stretch>
+        </p:blipFill>
+        <p:spPr>
+          <a:xfrm>
+            <a:off x="594360" y="1188720"/>
+            <a:ext cx="7086600" cy="4023360"/>
+          </a:xfrm>
+          <a:prstGeom prst="rect">
+            <a:avLst/>
+          </a:prstGeom>
+        </p:spPr>
+      </p:pic>
+      <p:sp>
+        <p:nvSpPr>
+          <p:cNvPr id="7" name="Rounded Rectangle 6"/>
+          <p:cNvSpPr/>
+          <p:nvPr/>
+        </p:nvSpPr>
+        <p:spPr>
+          <a:xfrm>
+            <a:off x="7909560" y="1325880"/>
+            <a:ext cx="3474720" cy="3794760"/>
+          </a:xfrm>
+          <a:prstGeom prst="roundRect">
+            <a:avLst/>
+          </a:prstGeom>
+          <a:solidFill>
+            <a:srgbClr val="E8F7F7"/>
+          </a:solidFill>
+          <a:ln w="12700">
+            <a:solidFill>
+              <a:srgbClr val="00A6A6"/>
+            </a:solidFill>
+          </a:ln>
+        </p:spPr>
+        <p:style>
+          <a:lnRef idx="1">
+            <a:schemeClr val="accent1"/>
+          </a:lnRef>
+          <a:fillRef idx="3">
+            <a:schemeClr val="accent1"/>
+          </a:fillRef>
+          <a:effectRef idx="2">
+            <a:schemeClr val="accent1"/>
+          </a:effectRef>
+          <a:fontRef idx="minor">
+            <a:schemeClr val="lt1"/>
+          </a:fontRef>
+        </p:style>
+        <p:txBody>
+          <a:bodyPr rtlCol="0" anchor="ctr"/>
+          <a:lstStyle/>
+          <a:p>
+            <a:pPr algn="ctr"/>
+            <a:endParaRPr/>
+          </a:p>
+        </p:txBody>
+      </p:sp>
+      <p:sp>
+        <p:nvSpPr>
           <p:cNvPr id="8" name="TextBox 7"/>
           <p:cNvSpPr txBox="1"/>
           <p:nvPr/>
@@ -3799,8 +3991,8 @@
           </a:p>
         </p:txBody>
       </p:sp>
-      <mc:AlternateContent xmlns:mc="http://schemas.openxmlformats.org/markup-compatibility/2006">
-        <mc:Choice xmlns:a14="http://schemas.microsoft.com/office/drawing/2010/main" Requires="a14">
+      <mc:AlternateContent xmlns:mc="http://schemas.openxmlformats.org/markup-compatibility/2006" xmlns:a14="http://schemas.microsoft.com/office/drawing/2010/main">
+        <mc:Choice Requires="a14">
           <p:sp>
             <p:nvSpPr>
               <p:cNvPr id="10" name="TextBox 9"/>
@@ -4020,7 +4212,7 @@
             </p:txBody>
           </p:sp>
         </mc:Choice>
-        <mc:Fallback>
+        <mc:Fallback xmlns="">
           <p:sp>
             <p:nvSpPr>
               <p:cNvPr id="10" name="TextBox 9"/>
@@ -4137,716 +4329,6 @@
 </p:sld>
 </file>
 
-<file path=ppt/slides/slide16.xml><?xml version="1.0" encoding="utf-8"?>
-<p:sld xmlns:a="http://schemas.openxmlformats.org/drawingml/2006/main" xmlns:r="http://schemas.openxmlformats.org/officeDocument/2006/relationships" xmlns:p="http://schemas.openxmlformats.org/presentationml/2006/main">
-  <p:cSld>
-    <p:spTree>
-      <p:nvGrpSpPr>
-        <p:cNvPr id="1" name=""/>
-        <p:cNvGrpSpPr/>
-        <p:nvPr/>
-      </p:nvGrpSpPr>
-      <p:grpSpPr>
-        <a:xfrm>
-          <a:off x="0" y="0"/>
-          <a:ext cx="0" cy="0"/>
-          <a:chOff x="0" y="0"/>
-          <a:chExt cx="0" cy="0"/>
-        </a:xfrm>
-      </p:grpSpPr>
-      <p:sp>
-        <p:nvSpPr>
-          <p:cNvPr id="2" name="TextBox 1"/>
-          <p:cNvSpPr txBox="1"/>
-          <p:nvPr/>
-        </p:nvSpPr>
-        <p:spPr>
-          <a:xfrm>
-            <a:off x="566928" y="301752"/>
-            <a:ext cx="9692640" cy="438912"/>
-          </a:xfrm>
-          <a:prstGeom prst="rect">
-            <a:avLst/>
-          </a:prstGeom>
-          <a:noFill/>
-        </p:spPr>
-        <p:txBody>
-          <a:bodyPr wrap="square" lIns="45720" rIns="45720" anchor="ctr">
-            <a:spAutoFit/>
-          </a:bodyPr>
-          <a:lstStyle/>
-          <a:p>
-            <a:pPr algn="l"/>
-            <a:r>
-              <a:rPr sz="2400" b="1">
-                <a:solidFill>
-                  <a:srgbClr val="16324F"/>
-                </a:solidFill>
-                <a:latin typeface="Aptos"/>
-              </a:rPr>
-              <a:t>Notch-filter equation</a:t>
-            </a:r>
-          </a:p>
-        </p:txBody>
-      </p:sp>
-      <p:sp>
-        <p:nvSpPr>
-          <p:cNvPr id="3" name="Rounded Rectangle 2"/>
-          <p:cNvSpPr/>
-          <p:nvPr/>
-        </p:nvSpPr>
-        <p:spPr>
-          <a:xfrm>
-            <a:off x="10332720" y="283464"/>
-            <a:ext cx="1234440" cy="347472"/>
-          </a:xfrm>
-          <a:prstGeom prst="roundRect">
-            <a:avLst/>
-          </a:prstGeom>
-          <a:solidFill>
-            <a:srgbClr val="E8F7F7"/>
-          </a:solidFill>
-          <a:ln w="12700">
-            <a:solidFill>
-              <a:srgbClr val="00A6A6"/>
-            </a:solidFill>
-          </a:ln>
-        </p:spPr>
-        <p:style>
-          <a:lnRef idx="1">
-            <a:schemeClr val="accent1"/>
-          </a:lnRef>
-          <a:fillRef idx="3">
-            <a:schemeClr val="accent1"/>
-          </a:fillRef>
-          <a:effectRef idx="2">
-            <a:schemeClr val="accent1"/>
-          </a:effectRef>
-          <a:fontRef idx="minor">
-            <a:schemeClr val="lt1"/>
-          </a:fontRef>
-        </p:style>
-        <p:txBody>
-          <a:bodyPr rtlCol="0" anchor="ctr"/>
-          <a:lstStyle/>
-          <a:p>
-            <a:pPr algn="ctr"/>
-            <a:endParaRPr/>
-          </a:p>
-        </p:txBody>
-      </p:sp>
-      <p:sp>
-        <p:nvSpPr>
-          <p:cNvPr id="4" name="TextBox 3"/>
-          <p:cNvSpPr txBox="1"/>
-          <p:nvPr/>
-        </p:nvSpPr>
-        <p:spPr>
-          <a:xfrm>
-            <a:off x="10351008" y="292608"/>
-            <a:ext cx="1197864" cy="310896"/>
-          </a:xfrm>
-          <a:prstGeom prst="rect">
-            <a:avLst/>
-          </a:prstGeom>
-          <a:noFill/>
-        </p:spPr>
-        <p:txBody>
-          <a:bodyPr wrap="square" lIns="45720" rIns="45720" anchor="ctr">
-            <a:spAutoFit/>
-          </a:bodyPr>
-          <a:lstStyle/>
-          <a:p>
-            <a:pPr algn="ctr"/>
-            <a:r>
-              <a:rPr sz="1100" b="1">
-                <a:solidFill>
-                  <a:srgbClr val="16324F"/>
-                </a:solidFill>
-                <a:latin typeface="Aptos"/>
-              </a:rPr>
-              <a:t>60–75 MIN</a:t>
-            </a:r>
-          </a:p>
-        </p:txBody>
-      </p:sp>
-      <p:sp>
-        <p:nvSpPr>
-          <p:cNvPr id="5" name="TextBox 4"/>
-          <p:cNvSpPr txBox="1"/>
-          <p:nvPr/>
-        </p:nvSpPr>
-        <p:spPr>
-          <a:xfrm>
-            <a:off x="594360" y="786384"/>
-            <a:ext cx="10652760" cy="329184"/>
-          </a:xfrm>
-          <a:prstGeom prst="rect">
-            <a:avLst/>
-          </a:prstGeom>
-          <a:noFill/>
-        </p:spPr>
-        <p:txBody>
-          <a:bodyPr wrap="square" lIns="45720" rIns="45720" anchor="ctr">
-            <a:spAutoFit/>
-          </a:bodyPr>
-          <a:lstStyle/>
-          <a:p>
-            <a:pPr algn="l"/>
-            <a:r>
-              <a:rPr sz="1200" b="0">
-                <a:solidFill>
-                  <a:srgbClr val="53616E"/>
-                </a:solidFill>
-                <a:latin typeface="Aptos"/>
-              </a:rPr>
-              <a:t>A second-order section gives an interpretable audio filter.</a:t>
-            </a:r>
-          </a:p>
-        </p:txBody>
-      </p:sp>
-      <p:sp>
-        <p:nvSpPr>
-          <p:cNvPr id="6" name="TextBox 5"/>
-          <p:cNvSpPr txBox="1"/>
-          <p:nvPr/>
-        </p:nvSpPr>
-        <p:spPr>
-          <a:xfrm>
-            <a:off x="822960" y="1417320"/>
-            <a:ext cx="10515600" cy="594360"/>
-          </a:xfrm>
-          <a:prstGeom prst="rect">
-            <a:avLst/>
-          </a:prstGeom>
-          <a:noFill/>
-        </p:spPr>
-        <p:txBody>
-          <a:bodyPr wrap="square" lIns="45720" rIns="45720" anchor="ctr">
-            <a:spAutoFit/>
-          </a:bodyPr>
-          <a:lstStyle/>
-          <a:p>
-            <a:pPr algn="ctr"/>
-            <a:r>
-              <a:rPr sz="2100" b="1">
-                <a:solidFill>
-                  <a:srgbClr val="16324F"/>
-                </a:solidFill>
-                <a:latin typeface="Aptos"/>
-              </a:rPr>
-              <a:t>H(z) = K · (1 − 2cosω₀ z⁻¹ + z⁻²) / (1 − 2r cosω₀ z⁻¹ + r²z⁻²)</a:t>
-            </a:r>
-          </a:p>
-        </p:txBody>
-      </p:sp>
-      <p:sp>
-        <p:nvSpPr>
-          <p:cNvPr id="7" name="Rounded Rectangle 6"/>
-          <p:cNvSpPr/>
-          <p:nvPr/>
-        </p:nvSpPr>
-        <p:spPr>
-          <a:xfrm>
-            <a:off x="914400" y="2606040"/>
-            <a:ext cx="3154680" cy="1645920"/>
-          </a:xfrm>
-          <a:prstGeom prst="roundRect">
-            <a:avLst/>
-          </a:prstGeom>
-          <a:solidFill>
-            <a:srgbClr val="E8F7F7"/>
-          </a:solidFill>
-          <a:ln w="12700">
-            <a:solidFill>
-              <a:srgbClr val="00A6A6"/>
-            </a:solidFill>
-          </a:ln>
-        </p:spPr>
-        <p:style>
-          <a:lnRef idx="1">
-            <a:schemeClr val="accent1"/>
-          </a:lnRef>
-          <a:fillRef idx="3">
-            <a:schemeClr val="accent1"/>
-          </a:fillRef>
-          <a:effectRef idx="2">
-            <a:schemeClr val="accent1"/>
-          </a:effectRef>
-          <a:fontRef idx="minor">
-            <a:schemeClr val="lt1"/>
-          </a:fontRef>
-        </p:style>
-        <p:txBody>
-          <a:bodyPr rtlCol="0" anchor="ctr"/>
-          <a:lstStyle/>
-          <a:p>
-            <a:pPr algn="ctr"/>
-            <a:endParaRPr/>
-          </a:p>
-        </p:txBody>
-      </p:sp>
-      <p:sp>
-        <p:nvSpPr>
-          <p:cNvPr id="8" name="TextBox 7"/>
-          <p:cNvSpPr txBox="1"/>
-          <p:nvPr/>
-        </p:nvSpPr>
-        <p:spPr>
-          <a:xfrm>
-            <a:off x="1078992" y="2715768"/>
-            <a:ext cx="2825496" cy="320040"/>
-          </a:xfrm>
-          <a:prstGeom prst="rect">
-            <a:avLst/>
-          </a:prstGeom>
-          <a:noFill/>
-        </p:spPr>
-        <p:txBody>
-          <a:bodyPr wrap="square" lIns="45720" rIns="45720" anchor="ctr">
-            <a:spAutoFit/>
-          </a:bodyPr>
-          <a:lstStyle/>
-          <a:p>
-            <a:pPr algn="l"/>
-            <a:r>
-              <a:rPr sz="1500" b="1">
-                <a:solidFill>
-                  <a:srgbClr val="16324F"/>
-                </a:solidFill>
-                <a:latin typeface="Aptos"/>
-              </a:rPr>
-              <a:t>Zeros</a:t>
-            </a:r>
-          </a:p>
-        </p:txBody>
-      </p:sp>
-      <p:sp>
-        <p:nvSpPr>
-          <p:cNvPr id="9" name="TextBox 8"/>
-          <p:cNvSpPr txBox="1"/>
-          <p:nvPr/>
-        </p:nvSpPr>
-        <p:spPr>
-          <a:xfrm>
-            <a:off x="1078992" y="3081528"/>
-            <a:ext cx="2825496" cy="1078992"/>
-          </a:xfrm>
-          <a:prstGeom prst="rect">
-            <a:avLst/>
-          </a:prstGeom>
-          <a:noFill/>
-        </p:spPr>
-        <p:txBody>
-          <a:bodyPr wrap="square" lIns="45720" rIns="45720" anchor="t">
-            <a:spAutoFit/>
-          </a:bodyPr>
-          <a:lstStyle/>
-          <a:p>
-            <a:pPr algn="l"/>
-            <a:r>
-              <a:rPr sz="1300" b="0">
-                <a:solidFill>
-                  <a:srgbClr val="53616E"/>
-                </a:solidFill>
-                <a:latin typeface="Aptos"/>
-              </a:rPr>
-              <a:t>exactly on unit circle at ±ω₀ → ideal zero response at the hum frequency</a:t>
-            </a:r>
-          </a:p>
-        </p:txBody>
-      </p:sp>
-      <p:sp>
-        <p:nvSpPr>
-          <p:cNvPr id="10" name="Rounded Rectangle 9"/>
-          <p:cNvSpPr/>
-          <p:nvPr/>
-        </p:nvSpPr>
-        <p:spPr>
-          <a:xfrm>
-            <a:off x="4526280" y="2606040"/>
-            <a:ext cx="3154680" cy="1645920"/>
-          </a:xfrm>
-          <a:prstGeom prst="roundRect">
-            <a:avLst/>
-          </a:prstGeom>
-          <a:solidFill>
-            <a:srgbClr val="FFF2E6"/>
-          </a:solidFill>
-          <a:ln w="12700">
-            <a:solidFill>
-              <a:srgbClr val="F28E2B"/>
-            </a:solidFill>
-          </a:ln>
-        </p:spPr>
-        <p:style>
-          <a:lnRef idx="1">
-            <a:schemeClr val="accent1"/>
-          </a:lnRef>
-          <a:fillRef idx="3">
-            <a:schemeClr val="accent1"/>
-          </a:fillRef>
-          <a:effectRef idx="2">
-            <a:schemeClr val="accent1"/>
-          </a:effectRef>
-          <a:fontRef idx="minor">
-            <a:schemeClr val="lt1"/>
-          </a:fontRef>
-        </p:style>
-        <p:txBody>
-          <a:bodyPr rtlCol="0" anchor="ctr"/>
-          <a:lstStyle/>
-          <a:p>
-            <a:pPr algn="ctr"/>
-            <a:endParaRPr/>
-          </a:p>
-        </p:txBody>
-      </p:sp>
-      <p:sp>
-        <p:nvSpPr>
-          <p:cNvPr id="11" name="TextBox 10"/>
-          <p:cNvSpPr txBox="1"/>
-          <p:nvPr/>
-        </p:nvSpPr>
-        <p:spPr>
-          <a:xfrm>
-            <a:off x="4690872" y="2715768"/>
-            <a:ext cx="2825496" cy="320040"/>
-          </a:xfrm>
-          <a:prstGeom prst="rect">
-            <a:avLst/>
-          </a:prstGeom>
-          <a:noFill/>
-        </p:spPr>
-        <p:txBody>
-          <a:bodyPr wrap="square" lIns="45720" rIns="45720" anchor="ctr">
-            <a:spAutoFit/>
-          </a:bodyPr>
-          <a:lstStyle/>
-          <a:p>
-            <a:pPr algn="l"/>
-            <a:r>
-              <a:rPr sz="1500" b="1">
-                <a:solidFill>
-                  <a:srgbClr val="16324F"/>
-                </a:solidFill>
-                <a:latin typeface="Aptos"/>
-              </a:rPr>
-              <a:t>Poles</a:t>
-            </a:r>
-          </a:p>
-        </p:txBody>
-      </p:sp>
-      <p:sp>
-        <p:nvSpPr>
-          <p:cNvPr id="12" name="TextBox 11"/>
-          <p:cNvSpPr txBox="1"/>
-          <p:nvPr/>
-        </p:nvSpPr>
-        <p:spPr>
-          <a:xfrm>
-            <a:off x="4690872" y="3081528"/>
-            <a:ext cx="2825496" cy="1078992"/>
-          </a:xfrm>
-          <a:prstGeom prst="rect">
-            <a:avLst/>
-          </a:prstGeom>
-          <a:noFill/>
-        </p:spPr>
-        <p:txBody>
-          <a:bodyPr wrap="square" lIns="45720" rIns="45720" anchor="t">
-            <a:spAutoFit/>
-          </a:bodyPr>
-          <a:lstStyle/>
-          <a:p>
-            <a:pPr algn="l"/>
-            <a:r>
-              <a:rPr sz="1300" b="0">
-                <a:solidFill>
-                  <a:srgbClr val="53616E"/>
-                </a:solidFill>
-                <a:latin typeface="Aptos"/>
-              </a:rPr>
-              <a:t>same angle but radius r&lt;1 → control notch width / transient response</a:t>
-            </a:r>
-          </a:p>
-        </p:txBody>
-      </p:sp>
-      <p:sp>
-        <p:nvSpPr>
-          <p:cNvPr id="13" name="Rounded Rectangle 12"/>
-          <p:cNvSpPr/>
-          <p:nvPr/>
-        </p:nvSpPr>
-        <p:spPr>
-          <a:xfrm>
-            <a:off x="8138160" y="2606040"/>
-            <a:ext cx="3154680" cy="1645920"/>
-          </a:xfrm>
-          <a:prstGeom prst="roundRect">
-            <a:avLst/>
-          </a:prstGeom>
-          <a:solidFill>
-            <a:srgbClr val="EDF3F7"/>
-          </a:solidFill>
-          <a:ln w="12700">
-            <a:solidFill>
-              <a:srgbClr val="DCE6EC"/>
-            </a:solidFill>
-          </a:ln>
-        </p:spPr>
-        <p:style>
-          <a:lnRef idx="1">
-            <a:schemeClr val="accent1"/>
-          </a:lnRef>
-          <a:fillRef idx="3">
-            <a:schemeClr val="accent1"/>
-          </a:fillRef>
-          <a:effectRef idx="2">
-            <a:schemeClr val="accent1"/>
-          </a:effectRef>
-          <a:fontRef idx="minor">
-            <a:schemeClr val="lt1"/>
-          </a:fontRef>
-        </p:style>
-        <p:txBody>
-          <a:bodyPr rtlCol="0" anchor="ctr"/>
-          <a:lstStyle/>
-          <a:p>
-            <a:pPr algn="ctr"/>
-            <a:endParaRPr/>
-          </a:p>
-        </p:txBody>
-      </p:sp>
-      <p:sp>
-        <p:nvSpPr>
-          <p:cNvPr id="14" name="TextBox 13"/>
-          <p:cNvSpPr txBox="1"/>
-          <p:nvPr/>
-        </p:nvSpPr>
-        <p:spPr>
-          <a:xfrm>
-            <a:off x="8302752" y="2715768"/>
-            <a:ext cx="2825496" cy="320040"/>
-          </a:xfrm>
-          <a:prstGeom prst="rect">
-            <a:avLst/>
-          </a:prstGeom>
-          <a:noFill/>
-        </p:spPr>
-        <p:txBody>
-          <a:bodyPr wrap="square" lIns="45720" rIns="45720" anchor="ctr">
-            <a:spAutoFit/>
-          </a:bodyPr>
-          <a:lstStyle/>
-          <a:p>
-            <a:pPr algn="l"/>
-            <a:r>
-              <a:rPr sz="1500" b="1">
-                <a:solidFill>
-                  <a:srgbClr val="16324F"/>
-                </a:solidFill>
-                <a:latin typeface="Aptos"/>
-              </a:rPr>
-              <a:t>Gain K</a:t>
-            </a:r>
-          </a:p>
-        </p:txBody>
-      </p:sp>
-      <p:sp>
-        <p:nvSpPr>
-          <p:cNvPr id="15" name="TextBox 14"/>
-          <p:cNvSpPr txBox="1"/>
-          <p:nvPr/>
-        </p:nvSpPr>
-        <p:spPr>
-          <a:xfrm>
-            <a:off x="8302752" y="3081528"/>
-            <a:ext cx="2825496" cy="1078992"/>
-          </a:xfrm>
-          <a:prstGeom prst="rect">
-            <a:avLst/>
-          </a:prstGeom>
-          <a:noFill/>
-        </p:spPr>
-        <p:txBody>
-          <a:bodyPr wrap="square" lIns="45720" rIns="45720" anchor="t">
-            <a:spAutoFit/>
-          </a:bodyPr>
-          <a:lstStyle/>
-          <a:p>
-            <a:pPr algn="l"/>
-            <a:r>
-              <a:rPr sz="1300" b="0">
-                <a:solidFill>
-                  <a:srgbClr val="53616E"/>
-                </a:solidFill>
-                <a:latin typeface="Aptos"/>
-              </a:rPr>
-              <a:t>often chosen to make DC or passband gain approximately 1</a:t>
-            </a:r>
-          </a:p>
-        </p:txBody>
-      </p:sp>
-      <p:sp>
-        <p:nvSpPr>
-          <p:cNvPr id="16" name="Rounded Rectangle 15"/>
-          <p:cNvSpPr/>
-          <p:nvPr/>
-        </p:nvSpPr>
-        <p:spPr>
-          <a:xfrm>
-            <a:off x="1005840" y="4800600"/>
-            <a:ext cx="10149840" cy="777240"/>
-          </a:xfrm>
-          <a:prstGeom prst="roundRect">
-            <a:avLst/>
-          </a:prstGeom>
-          <a:solidFill>
-            <a:srgbClr val="FFFFFF"/>
-          </a:solidFill>
-          <a:ln w="12700">
-            <a:solidFill>
-              <a:srgbClr val="DCE6EC"/>
-            </a:solidFill>
-          </a:ln>
-        </p:spPr>
-        <p:style>
-          <a:lnRef idx="1">
-            <a:schemeClr val="accent1"/>
-          </a:lnRef>
-          <a:fillRef idx="3">
-            <a:schemeClr val="accent1"/>
-          </a:fillRef>
-          <a:effectRef idx="2">
-            <a:schemeClr val="accent1"/>
-          </a:effectRef>
-          <a:fontRef idx="minor">
-            <a:schemeClr val="lt1"/>
-          </a:fontRef>
-        </p:style>
-        <p:txBody>
-          <a:bodyPr rtlCol="0" anchor="ctr"/>
-          <a:lstStyle/>
-          <a:p>
-            <a:pPr algn="ctr"/>
-            <a:endParaRPr/>
-          </a:p>
-        </p:txBody>
-      </p:sp>
-      <p:sp>
-        <p:nvSpPr>
-          <p:cNvPr id="17" name="TextBox 16"/>
-          <p:cNvSpPr txBox="1"/>
-          <p:nvPr/>
-        </p:nvSpPr>
-        <p:spPr>
-          <a:xfrm>
-            <a:off x="1234440" y="4937760"/>
-            <a:ext cx="9692640" cy="502920"/>
-          </a:xfrm>
-          <a:prstGeom prst="rect">
-            <a:avLst/>
-          </a:prstGeom>
-          <a:noFill/>
-        </p:spPr>
-        <p:txBody>
-          <a:bodyPr wrap="square" lIns="45720" rIns="45720" anchor="ctr">
-            <a:spAutoFit/>
-          </a:bodyPr>
-          <a:lstStyle/>
-          <a:p>
-            <a:pPr algn="ctr"/>
-            <a:r>
-              <a:rPr sz="1600" b="1">
-                <a:solidFill>
-                  <a:srgbClr val="16324F"/>
-                </a:solidFill>
-                <a:latin typeface="Aptos"/>
-              </a:rPr>
-              <a:t>Audio intuition: zeros do the cancellation; poles nearby keep the rest of the spectrum from being unnecessarily attenuated.</a:t>
-            </a:r>
-          </a:p>
-        </p:txBody>
-      </p:sp>
-      <p:sp>
-        <p:nvSpPr>
-          <p:cNvPr id="18" name="TextBox 17"/>
-          <p:cNvSpPr txBox="1"/>
-          <p:nvPr/>
-        </p:nvSpPr>
-        <p:spPr>
-          <a:xfrm>
-            <a:off x="566928" y="6473952"/>
-            <a:ext cx="4754880" cy="164592"/>
-          </a:xfrm>
-          <a:prstGeom prst="rect">
-            <a:avLst/>
-          </a:prstGeom>
-          <a:noFill/>
-        </p:spPr>
-        <p:txBody>
-          <a:bodyPr wrap="square" lIns="45720" rIns="45720" anchor="ctr">
-            <a:spAutoFit/>
-          </a:bodyPr>
-          <a:lstStyle/>
-          <a:p>
-            <a:pPr algn="l"/>
-            <a:r>
-              <a:rPr sz="800" b="0">
-                <a:solidFill>
-                  <a:srgbClr val="53616E"/>
-                </a:solidFill>
-                <a:latin typeface="Aptos"/>
-              </a:rPr>
-              <a:t>Week 3 • DSP + ML • Oppenheim &amp; Schafer</a:t>
-            </a:r>
-          </a:p>
-        </p:txBody>
-      </p:sp>
-      <p:sp>
-        <p:nvSpPr>
-          <p:cNvPr id="19" name="TextBox 18"/>
-          <p:cNvSpPr txBox="1"/>
-          <p:nvPr/>
-        </p:nvSpPr>
-        <p:spPr>
-          <a:xfrm>
-            <a:off x="11201400" y="6473952"/>
-            <a:ext cx="320040" cy="164592"/>
-          </a:xfrm>
-          <a:prstGeom prst="rect">
-            <a:avLst/>
-          </a:prstGeom>
-          <a:noFill/>
-        </p:spPr>
-        <p:txBody>
-          <a:bodyPr wrap="square" lIns="45720" rIns="45720" anchor="ctr">
-            <a:spAutoFit/>
-          </a:bodyPr>
-          <a:lstStyle/>
-          <a:p>
-            <a:pPr algn="r"/>
-            <a:r>
-              <a:rPr sz="800" b="0">
-                <a:solidFill>
-                  <a:srgbClr val="53616E"/>
-                </a:solidFill>
-                <a:latin typeface="Aptos"/>
-              </a:rPr>
-              <a:t>14</a:t>
-            </a:r>
-          </a:p>
-        </p:txBody>
-      </p:sp>
-    </p:spTree>
-  </p:cSld>
-  <p:clrMapOvr>
-    <a:masterClrMapping/>
-  </p:clrMapOvr>
-</p:sld>
-</file>
-
 <file path=ppt/slides/slide17.xml><?xml version="1.0" encoding="utf-8"?>
 <p:sld xmlns:a="http://schemas.openxmlformats.org/drawingml/2006/main" xmlns:r="http://schemas.openxmlformats.org/officeDocument/2006/relationships" xmlns:p="http://schemas.openxmlformats.org/presentationml/2006/main">
   <p:cSld>
@@ -4894,7 +4376,7 @@
                 </a:solidFill>
                 <a:latin typeface="Aptos"/>
               </a:rPr>
-              <a:t>Pole radius controls resonance and memory</a:t>
+              <a:t>Notch-filter equation</a:t>
             </a:r>
           </a:p>
         </p:txBody>
@@ -5010,35 +4492,46 @@
                 </a:solidFill>
                 <a:latin typeface="Aptos"/>
               </a:rPr>
-              <a:t>Move the pole radially without changing its preferred frequency.</a:t>
-            </a:r>
-          </a:p>
-        </p:txBody>
-      </p:sp>
-      <p:pic>
-        <p:nvPicPr>
-          <p:cNvPr id="6" name="Picture 5" descr="pole_radius.png"/>
-          <p:cNvPicPr>
-            <a:picLocks noChangeAspect="1"/>
-          </p:cNvPicPr>
-          <p:nvPr/>
-        </p:nvPicPr>
-        <p:blipFill>
-          <a:blip r:embed="rId2"/>
-          <a:stretch>
-            <a:fillRect/>
-          </a:stretch>
-        </p:blipFill>
-        <p:spPr>
-          <a:xfrm>
-            <a:off x="777240" y="1280160"/>
-            <a:ext cx="6583680" cy="4297680"/>
-          </a:xfrm>
-          <a:prstGeom prst="rect">
-            <a:avLst/>
-          </a:prstGeom>
-        </p:spPr>
-      </p:pic>
+              <a:t>A second-order section gives an interpretable audio filter.</a:t>
+            </a:r>
+          </a:p>
+        </p:txBody>
+      </p:sp>
+      <p:sp>
+        <p:nvSpPr>
+          <p:cNvPr id="6" name="TextBox 5"/>
+          <p:cNvSpPr txBox="1"/>
+          <p:nvPr/>
+        </p:nvSpPr>
+        <p:spPr>
+          <a:xfrm>
+            <a:off x="822960" y="1417320"/>
+            <a:ext cx="10515600" cy="594360"/>
+          </a:xfrm>
+          <a:prstGeom prst="rect">
+            <a:avLst/>
+          </a:prstGeom>
+          <a:noFill/>
+        </p:spPr>
+        <p:txBody>
+          <a:bodyPr wrap="square" lIns="45720" rIns="45720" anchor="ctr">
+            <a:spAutoFit/>
+          </a:bodyPr>
+          <a:lstStyle/>
+          <a:p>
+            <a:pPr algn="ctr"/>
+            <a:r>
+              <a:rPr sz="2100" b="1">
+                <a:solidFill>
+                  <a:srgbClr val="16324F"/>
+                </a:solidFill>
+                <a:latin typeface="Aptos"/>
+              </a:rPr>
+              <a:t>H(z) = K · (1 − 2cosω₀ z⁻¹ + z⁻²) / (1 − 2r cosω₀ z⁻¹ + r²z⁻²)</a:t>
+            </a:r>
+          </a:p>
+        </p:txBody>
+      </p:sp>
       <p:sp>
         <p:nvSpPr>
           <p:cNvPr id="7" name="Rounded Rectangle 6"/>
@@ -5047,8 +4540,124 @@
         </p:nvSpPr>
         <p:spPr>
           <a:xfrm>
-            <a:off x="7635240" y="1371600"/>
-            <a:ext cx="3657600" cy="4069080"/>
+            <a:off x="914400" y="2606040"/>
+            <a:ext cx="3154680" cy="1645920"/>
+          </a:xfrm>
+          <a:prstGeom prst="roundRect">
+            <a:avLst/>
+          </a:prstGeom>
+          <a:solidFill>
+            <a:srgbClr val="E8F7F7"/>
+          </a:solidFill>
+          <a:ln w="12700">
+            <a:solidFill>
+              <a:srgbClr val="00A6A6"/>
+            </a:solidFill>
+          </a:ln>
+        </p:spPr>
+        <p:style>
+          <a:lnRef idx="1">
+            <a:schemeClr val="accent1"/>
+          </a:lnRef>
+          <a:fillRef idx="3">
+            <a:schemeClr val="accent1"/>
+          </a:fillRef>
+          <a:effectRef idx="2">
+            <a:schemeClr val="accent1"/>
+          </a:effectRef>
+          <a:fontRef idx="minor">
+            <a:schemeClr val="lt1"/>
+          </a:fontRef>
+        </p:style>
+        <p:txBody>
+          <a:bodyPr rtlCol="0" anchor="ctr"/>
+          <a:lstStyle/>
+          <a:p>
+            <a:pPr algn="ctr"/>
+            <a:endParaRPr/>
+          </a:p>
+        </p:txBody>
+      </p:sp>
+      <p:sp>
+        <p:nvSpPr>
+          <p:cNvPr id="8" name="TextBox 7"/>
+          <p:cNvSpPr txBox="1"/>
+          <p:nvPr/>
+        </p:nvSpPr>
+        <p:spPr>
+          <a:xfrm>
+            <a:off x="1078992" y="2715768"/>
+            <a:ext cx="2825496" cy="320040"/>
+          </a:xfrm>
+          <a:prstGeom prst="rect">
+            <a:avLst/>
+          </a:prstGeom>
+          <a:noFill/>
+        </p:spPr>
+        <p:txBody>
+          <a:bodyPr wrap="square" lIns="45720" rIns="45720" anchor="ctr">
+            <a:spAutoFit/>
+          </a:bodyPr>
+          <a:lstStyle/>
+          <a:p>
+            <a:pPr algn="l"/>
+            <a:r>
+              <a:rPr sz="1500" b="1">
+                <a:solidFill>
+                  <a:srgbClr val="16324F"/>
+                </a:solidFill>
+                <a:latin typeface="Aptos"/>
+              </a:rPr>
+              <a:t>Zeros</a:t>
+            </a:r>
+          </a:p>
+        </p:txBody>
+      </p:sp>
+      <p:sp>
+        <p:nvSpPr>
+          <p:cNvPr id="9" name="TextBox 8"/>
+          <p:cNvSpPr txBox="1"/>
+          <p:nvPr/>
+        </p:nvSpPr>
+        <p:spPr>
+          <a:xfrm>
+            <a:off x="1078992" y="3081528"/>
+            <a:ext cx="2825496" cy="1078992"/>
+          </a:xfrm>
+          <a:prstGeom prst="rect">
+            <a:avLst/>
+          </a:prstGeom>
+          <a:noFill/>
+        </p:spPr>
+        <p:txBody>
+          <a:bodyPr wrap="square" lIns="45720" rIns="45720" anchor="t">
+            <a:spAutoFit/>
+          </a:bodyPr>
+          <a:lstStyle/>
+          <a:p>
+            <a:pPr algn="l"/>
+            <a:r>
+              <a:rPr sz="1300" b="0">
+                <a:solidFill>
+                  <a:srgbClr val="53616E"/>
+                </a:solidFill>
+                <a:latin typeface="Aptos"/>
+              </a:rPr>
+              <a:t>exactly on unit circle at ±ω₀ → ideal zero response at the hum frequency</a:t>
+            </a:r>
+          </a:p>
+        </p:txBody>
+      </p:sp>
+      <p:sp>
+        <p:nvSpPr>
+          <p:cNvPr id="10" name="Rounded Rectangle 9"/>
+          <p:cNvSpPr/>
+          <p:nvPr/>
+        </p:nvSpPr>
+        <p:spPr>
+          <a:xfrm>
+            <a:off x="4526280" y="2606040"/>
+            <a:ext cx="3154680" cy="1645920"/>
           </a:xfrm>
           <a:prstGeom prst="roundRect">
             <a:avLst/>
@@ -5087,110 +4696,274 @@
       </p:sp>
       <p:sp>
         <p:nvSpPr>
-          <p:cNvPr id="8" name="TextBox 7"/>
-          <p:cNvSpPr txBox="1"/>
-          <p:nvPr/>
-        </p:nvSpPr>
-        <p:spPr>
-          <a:xfrm>
-            <a:off x="7909560" y="1719072"/>
-            <a:ext cx="3108960" cy="3246120"/>
-          </a:xfrm>
-          <a:prstGeom prst="rect">
-            <a:avLst/>
-          </a:prstGeom>
-          <a:noFill/>
-        </p:spPr>
-        <p:txBody>
-          <a:bodyPr wrap="square" lIns="73152" rIns="36576" anchor="t">
-            <a:spAutoFit/>
-          </a:bodyPr>
-          <a:lstStyle/>
-          <a:p>
-            <a:pPr>
-              <a:spcAft>
-                <a:spcPts val="500"/>
-              </a:spcAft>
-              <a:defRPr sz="1500">
-                <a:solidFill>
-                  <a:srgbClr val="17212B"/>
-                </a:solidFill>
-                <a:latin typeface="Aptos"/>
-              </a:defRPr>
-            </a:pPr>
-            <a:r>
-              <a:t>• Same angle ⇒ same resonance center.</a:t>
-            </a:r>
-          </a:p>
-          <a:p>
-            <a:pPr>
-              <a:spcAft>
-                <a:spcPts val="500"/>
-              </a:spcAft>
-              <a:defRPr sz="1500">
-                <a:solidFill>
-                  <a:srgbClr val="17212B"/>
-                </a:solidFill>
-                <a:latin typeface="Aptos"/>
-              </a:defRPr>
-            </a:pPr>
-            <a:r>
-              <a:t>• r closer to 1 ⇒ smaller distance to unit circle.</a:t>
-            </a:r>
-          </a:p>
-          <a:p>
-            <a:pPr>
-              <a:spcAft>
-                <a:spcPts val="500"/>
-              </a:spcAft>
-              <a:defRPr sz="1500">
-                <a:solidFill>
-                  <a:srgbClr val="17212B"/>
-                </a:solidFill>
-                <a:latin typeface="Aptos"/>
-              </a:defRPr>
-            </a:pPr>
-            <a:r>
-              <a:t>• Peak becomes sharper and stronger.</a:t>
-            </a:r>
-          </a:p>
-          <a:p>
-            <a:pPr>
-              <a:spcAft>
-                <a:spcPts val="500"/>
-              </a:spcAft>
-              <a:defRPr sz="1500">
-                <a:solidFill>
-                  <a:srgbClr val="17212B"/>
-                </a:solidFill>
-                <a:latin typeface="Aptos"/>
-              </a:defRPr>
-            </a:pPr>
-            <a:r>
-              <a:t>• Impulse response decays roughly like rⁿ, so ringing lasts longer.</a:t>
-            </a:r>
-          </a:p>
-          <a:p>
-            <a:pPr>
-              <a:spcAft>
-                <a:spcPts val="500"/>
-              </a:spcAft>
-              <a:defRPr sz="1500">
-                <a:solidFill>
-                  <a:srgbClr val="17212B"/>
-                </a:solidFill>
-                <a:latin typeface="Aptos"/>
-              </a:defRPr>
-            </a:pPr>
-            <a:r>
-              <a:t>• r≥1 breaks causal BIBO stability.</a:t>
-            </a:r>
-          </a:p>
-        </p:txBody>
-      </p:sp>
-      <p:sp>
-        <p:nvSpPr>
-          <p:cNvPr id="9" name="TextBox 8"/>
+          <p:cNvPr id="11" name="TextBox 10"/>
+          <p:cNvSpPr txBox="1"/>
+          <p:nvPr/>
+        </p:nvSpPr>
+        <p:spPr>
+          <a:xfrm>
+            <a:off x="4690872" y="2715768"/>
+            <a:ext cx="2825496" cy="320040"/>
+          </a:xfrm>
+          <a:prstGeom prst="rect">
+            <a:avLst/>
+          </a:prstGeom>
+          <a:noFill/>
+        </p:spPr>
+        <p:txBody>
+          <a:bodyPr wrap="square" lIns="45720" rIns="45720" anchor="ctr">
+            <a:spAutoFit/>
+          </a:bodyPr>
+          <a:lstStyle/>
+          <a:p>
+            <a:pPr algn="l"/>
+            <a:r>
+              <a:rPr sz="1500" b="1">
+                <a:solidFill>
+                  <a:srgbClr val="16324F"/>
+                </a:solidFill>
+                <a:latin typeface="Aptos"/>
+              </a:rPr>
+              <a:t>Poles</a:t>
+            </a:r>
+          </a:p>
+        </p:txBody>
+      </p:sp>
+      <p:sp>
+        <p:nvSpPr>
+          <p:cNvPr id="12" name="TextBox 11"/>
+          <p:cNvSpPr txBox="1"/>
+          <p:nvPr/>
+        </p:nvSpPr>
+        <p:spPr>
+          <a:xfrm>
+            <a:off x="4690872" y="3081528"/>
+            <a:ext cx="2825496" cy="1078992"/>
+          </a:xfrm>
+          <a:prstGeom prst="rect">
+            <a:avLst/>
+          </a:prstGeom>
+          <a:noFill/>
+        </p:spPr>
+        <p:txBody>
+          <a:bodyPr wrap="square" lIns="45720" rIns="45720" anchor="t">
+            <a:spAutoFit/>
+          </a:bodyPr>
+          <a:lstStyle/>
+          <a:p>
+            <a:pPr algn="l"/>
+            <a:r>
+              <a:rPr sz="1300" b="0">
+                <a:solidFill>
+                  <a:srgbClr val="53616E"/>
+                </a:solidFill>
+                <a:latin typeface="Aptos"/>
+              </a:rPr>
+              <a:t>same angle but radius r&lt;1 → control notch width / transient response</a:t>
+            </a:r>
+          </a:p>
+        </p:txBody>
+      </p:sp>
+      <p:sp>
+        <p:nvSpPr>
+          <p:cNvPr id="13" name="Rounded Rectangle 12"/>
+          <p:cNvSpPr/>
+          <p:nvPr/>
+        </p:nvSpPr>
+        <p:spPr>
+          <a:xfrm>
+            <a:off x="8138160" y="2606040"/>
+            <a:ext cx="3154680" cy="1645920"/>
+          </a:xfrm>
+          <a:prstGeom prst="roundRect">
+            <a:avLst/>
+          </a:prstGeom>
+          <a:solidFill>
+            <a:srgbClr val="EDF3F7"/>
+          </a:solidFill>
+          <a:ln w="12700">
+            <a:solidFill>
+              <a:srgbClr val="DCE6EC"/>
+            </a:solidFill>
+          </a:ln>
+        </p:spPr>
+        <p:style>
+          <a:lnRef idx="1">
+            <a:schemeClr val="accent1"/>
+          </a:lnRef>
+          <a:fillRef idx="3">
+            <a:schemeClr val="accent1"/>
+          </a:fillRef>
+          <a:effectRef idx="2">
+            <a:schemeClr val="accent1"/>
+          </a:effectRef>
+          <a:fontRef idx="minor">
+            <a:schemeClr val="lt1"/>
+          </a:fontRef>
+        </p:style>
+        <p:txBody>
+          <a:bodyPr rtlCol="0" anchor="ctr"/>
+          <a:lstStyle/>
+          <a:p>
+            <a:pPr algn="ctr"/>
+            <a:endParaRPr/>
+          </a:p>
+        </p:txBody>
+      </p:sp>
+      <p:sp>
+        <p:nvSpPr>
+          <p:cNvPr id="14" name="TextBox 13"/>
+          <p:cNvSpPr txBox="1"/>
+          <p:nvPr/>
+        </p:nvSpPr>
+        <p:spPr>
+          <a:xfrm>
+            <a:off x="8302752" y="2715768"/>
+            <a:ext cx="2825496" cy="320040"/>
+          </a:xfrm>
+          <a:prstGeom prst="rect">
+            <a:avLst/>
+          </a:prstGeom>
+          <a:noFill/>
+        </p:spPr>
+        <p:txBody>
+          <a:bodyPr wrap="square" lIns="45720" rIns="45720" anchor="ctr">
+            <a:spAutoFit/>
+          </a:bodyPr>
+          <a:lstStyle/>
+          <a:p>
+            <a:pPr algn="l"/>
+            <a:r>
+              <a:rPr sz="1500" b="1">
+                <a:solidFill>
+                  <a:srgbClr val="16324F"/>
+                </a:solidFill>
+                <a:latin typeface="Aptos"/>
+              </a:rPr>
+              <a:t>Gain K</a:t>
+            </a:r>
+          </a:p>
+        </p:txBody>
+      </p:sp>
+      <p:sp>
+        <p:nvSpPr>
+          <p:cNvPr id="15" name="TextBox 14"/>
+          <p:cNvSpPr txBox="1"/>
+          <p:nvPr/>
+        </p:nvSpPr>
+        <p:spPr>
+          <a:xfrm>
+            <a:off x="8302752" y="3081528"/>
+            <a:ext cx="2825496" cy="1078992"/>
+          </a:xfrm>
+          <a:prstGeom prst="rect">
+            <a:avLst/>
+          </a:prstGeom>
+          <a:noFill/>
+        </p:spPr>
+        <p:txBody>
+          <a:bodyPr wrap="square" lIns="45720" rIns="45720" anchor="t">
+            <a:spAutoFit/>
+          </a:bodyPr>
+          <a:lstStyle/>
+          <a:p>
+            <a:pPr algn="l"/>
+            <a:r>
+              <a:rPr sz="1300" b="0">
+                <a:solidFill>
+                  <a:srgbClr val="53616E"/>
+                </a:solidFill>
+                <a:latin typeface="Aptos"/>
+              </a:rPr>
+              <a:t>often chosen to make DC or passband gain approximately 1</a:t>
+            </a:r>
+          </a:p>
+        </p:txBody>
+      </p:sp>
+      <p:sp>
+        <p:nvSpPr>
+          <p:cNvPr id="16" name="Rounded Rectangle 15"/>
+          <p:cNvSpPr/>
+          <p:nvPr/>
+        </p:nvSpPr>
+        <p:spPr>
+          <a:xfrm>
+            <a:off x="1005840" y="4800600"/>
+            <a:ext cx="10149840" cy="777240"/>
+          </a:xfrm>
+          <a:prstGeom prst="roundRect">
+            <a:avLst/>
+          </a:prstGeom>
+          <a:solidFill>
+            <a:srgbClr val="FFFFFF"/>
+          </a:solidFill>
+          <a:ln w="12700">
+            <a:solidFill>
+              <a:srgbClr val="DCE6EC"/>
+            </a:solidFill>
+          </a:ln>
+        </p:spPr>
+        <p:style>
+          <a:lnRef idx="1">
+            <a:schemeClr val="accent1"/>
+          </a:lnRef>
+          <a:fillRef idx="3">
+            <a:schemeClr val="accent1"/>
+          </a:fillRef>
+          <a:effectRef idx="2">
+            <a:schemeClr val="accent1"/>
+          </a:effectRef>
+          <a:fontRef idx="minor">
+            <a:schemeClr val="lt1"/>
+          </a:fontRef>
+        </p:style>
+        <p:txBody>
+          <a:bodyPr rtlCol="0" anchor="ctr"/>
+          <a:lstStyle/>
+          <a:p>
+            <a:pPr algn="ctr"/>
+            <a:endParaRPr/>
+          </a:p>
+        </p:txBody>
+      </p:sp>
+      <p:sp>
+        <p:nvSpPr>
+          <p:cNvPr id="17" name="TextBox 16"/>
+          <p:cNvSpPr txBox="1"/>
+          <p:nvPr/>
+        </p:nvSpPr>
+        <p:spPr>
+          <a:xfrm>
+            <a:off x="1234440" y="4937760"/>
+            <a:ext cx="9692640" cy="502920"/>
+          </a:xfrm>
+          <a:prstGeom prst="rect">
+            <a:avLst/>
+          </a:prstGeom>
+          <a:noFill/>
+        </p:spPr>
+        <p:txBody>
+          <a:bodyPr wrap="square" lIns="45720" rIns="45720" anchor="ctr">
+            <a:spAutoFit/>
+          </a:bodyPr>
+          <a:lstStyle/>
+          <a:p>
+            <a:pPr algn="ctr"/>
+            <a:r>
+              <a:rPr sz="1600" b="1">
+                <a:solidFill>
+                  <a:srgbClr val="16324F"/>
+                </a:solidFill>
+                <a:latin typeface="Aptos"/>
+              </a:rPr>
+              <a:t>Audio intuition: zeros do the cancellation; poles nearby keep the rest of the spectrum from being unnecessarily attenuated.</a:t>
+            </a:r>
+          </a:p>
+        </p:txBody>
+      </p:sp>
+      <p:sp>
+        <p:nvSpPr>
+          <p:cNvPr id="18" name="TextBox 17"/>
           <p:cNvSpPr txBox="1"/>
           <p:nvPr/>
         </p:nvSpPr>
@@ -5225,7 +4998,7 @@
       </p:sp>
       <p:sp>
         <p:nvSpPr>
-          <p:cNvPr id="10" name="TextBox 9"/>
+          <p:cNvPr id="19" name="TextBox 18"/>
           <p:cNvSpPr txBox="1"/>
           <p:nvPr/>
         </p:nvSpPr>
@@ -5253,7 +5026,7 @@
                 </a:solidFill>
                 <a:latin typeface="Aptos"/>
               </a:rPr>
-              <a:t>15</a:t>
+              <a:t>14</a:t>
             </a:r>
           </a:p>
         </p:txBody>
@@ -5313,7 +5086,7 @@
                 </a:solidFill>
                 <a:latin typeface="Aptos"/>
               </a:rPr>
-              <a:t>Pole–zero sandbox activity</a:t>
+              <a:t>Pole radius controls resonance and memory</a:t>
             </a:r>
           </a:p>
         </p:txBody>
@@ -5429,601 +5202,45 @@
                 </a:solidFill>
                 <a:latin typeface="Aptos"/>
               </a:rPr>
-              <a:t>Predict first. Move a pole or zero. Then listen / plot.</a:t>
-            </a:r>
-          </a:p>
-        </p:txBody>
-      </p:sp>
-      <p:sp>
-        <p:nvSpPr>
-          <p:cNvPr id="6" name="Rounded Rectangle 5"/>
+              <a:t>Move the pole radially without changing its preferred frequency.</a:t>
+            </a:r>
+          </a:p>
+        </p:txBody>
+      </p:sp>
+      <p:pic>
+        <p:nvPicPr>
+          <p:cNvPr id="6" name="Picture 5" descr="pole_radius.png"/>
+          <p:cNvPicPr>
+            <a:picLocks noChangeAspect="1"/>
+          </p:cNvPicPr>
+          <p:nvPr/>
+        </p:nvPicPr>
+        <p:blipFill>
+          <a:blip r:embed="rId2"/>
+          <a:stretch>
+            <a:fillRect/>
+          </a:stretch>
+        </p:blipFill>
+        <p:spPr>
+          <a:xfrm>
+            <a:off x="777240" y="1280160"/>
+            <a:ext cx="6583680" cy="4297680"/>
+          </a:xfrm>
+          <a:prstGeom prst="rect">
+            <a:avLst/>
+          </a:prstGeom>
+        </p:spPr>
+      </p:pic>
+      <p:sp>
+        <p:nvSpPr>
+          <p:cNvPr id="7" name="Rounded Rectangle 6"/>
           <p:cNvSpPr/>
           <p:nvPr/>
         </p:nvSpPr>
         <p:spPr>
           <a:xfrm>
-            <a:off x="822960" y="1325880"/>
-            <a:ext cx="3337560" cy="1600200"/>
-          </a:xfrm>
-          <a:prstGeom prst="roundRect">
-            <a:avLst/>
-          </a:prstGeom>
-          <a:solidFill>
-            <a:srgbClr val="FFFFFF"/>
-          </a:solidFill>
-          <a:ln w="12700">
-            <a:solidFill>
-              <a:srgbClr val="DCE6EC"/>
-            </a:solidFill>
-          </a:ln>
-        </p:spPr>
-        <p:style>
-          <a:lnRef idx="1">
-            <a:schemeClr val="accent1"/>
-          </a:lnRef>
-          <a:fillRef idx="3">
-            <a:schemeClr val="accent1"/>
-          </a:fillRef>
-          <a:effectRef idx="2">
-            <a:schemeClr val="accent1"/>
-          </a:effectRef>
-          <a:fontRef idx="minor">
-            <a:schemeClr val="lt1"/>
-          </a:fontRef>
-        </p:style>
-        <p:txBody>
-          <a:bodyPr rtlCol="0" anchor="ctr"/>
-          <a:lstStyle/>
-          <a:p>
-            <a:pPr algn="ctr"/>
-            <a:endParaRPr/>
-          </a:p>
-        </p:txBody>
-      </p:sp>
-      <p:sp>
-        <p:nvSpPr>
-          <p:cNvPr id="7" name="TextBox 6"/>
-          <p:cNvSpPr txBox="1"/>
-          <p:nvPr/>
-        </p:nvSpPr>
-        <p:spPr>
-          <a:xfrm>
-            <a:off x="960120" y="1490472"/>
-            <a:ext cx="457200" cy="411480"/>
-          </a:xfrm>
-          <a:prstGeom prst="rect">
-            <a:avLst/>
-          </a:prstGeom>
-          <a:noFill/>
-        </p:spPr>
-        <p:txBody>
-          <a:bodyPr wrap="square" lIns="45720" rIns="45720" anchor="ctr">
-            <a:spAutoFit/>
-          </a:bodyPr>
-          <a:lstStyle/>
-          <a:p>
-            <a:pPr algn="ctr"/>
-            <a:r>
-              <a:rPr sz="1700" b="1">
-                <a:solidFill>
-                  <a:srgbClr val="00A6A6"/>
-                </a:solidFill>
-                <a:latin typeface="Aptos"/>
-              </a:rPr>
-              <a:t>1</a:t>
-            </a:r>
-          </a:p>
-        </p:txBody>
-      </p:sp>
-      <p:sp>
-        <p:nvSpPr>
-          <p:cNvPr id="8" name="TextBox 7"/>
-          <p:cNvSpPr txBox="1"/>
-          <p:nvPr/>
-        </p:nvSpPr>
-        <p:spPr>
-          <a:xfrm>
-            <a:off x="1508760" y="1490472"/>
-            <a:ext cx="2423160" cy="1078992"/>
-          </a:xfrm>
-          <a:prstGeom prst="rect">
-            <a:avLst/>
-          </a:prstGeom>
-          <a:noFill/>
-        </p:spPr>
-        <p:txBody>
-          <a:bodyPr wrap="square" lIns="45720" rIns="45720" anchor="ctr">
-            <a:spAutoFit/>
-          </a:bodyPr>
-          <a:lstStyle/>
-          <a:p>
-            <a:pPr algn="l"/>
-            <a:r>
-              <a:rPr sz="1500" b="1">
-                <a:solidFill>
-                  <a:srgbClr val="17212B"/>
-                </a:solidFill>
-                <a:latin typeface="Aptos"/>
-              </a:rPr>
-              <a:t>Start with no poles/zeros: flat response.</a:t>
-            </a:r>
-          </a:p>
-        </p:txBody>
-      </p:sp>
-      <p:sp>
-        <p:nvSpPr>
-          <p:cNvPr id="9" name="Rounded Rectangle 8"/>
-          <p:cNvSpPr/>
-          <p:nvPr/>
-        </p:nvSpPr>
-        <p:spPr>
-          <a:xfrm>
-            <a:off x="4553712" y="1325880"/>
-            <a:ext cx="3337560" cy="1600200"/>
-          </a:xfrm>
-          <a:prstGeom prst="roundRect">
-            <a:avLst/>
-          </a:prstGeom>
-          <a:solidFill>
-            <a:srgbClr val="E8F7F7"/>
-          </a:solidFill>
-          <a:ln w="12700">
-            <a:solidFill>
-              <a:srgbClr val="00A6A6"/>
-            </a:solidFill>
-          </a:ln>
-        </p:spPr>
-        <p:style>
-          <a:lnRef idx="1">
-            <a:schemeClr val="accent1"/>
-          </a:lnRef>
-          <a:fillRef idx="3">
-            <a:schemeClr val="accent1"/>
-          </a:fillRef>
-          <a:effectRef idx="2">
-            <a:schemeClr val="accent1"/>
-          </a:effectRef>
-          <a:fontRef idx="minor">
-            <a:schemeClr val="lt1"/>
-          </a:fontRef>
-        </p:style>
-        <p:txBody>
-          <a:bodyPr rtlCol="0" anchor="ctr"/>
-          <a:lstStyle/>
-          <a:p>
-            <a:pPr algn="ctr"/>
-            <a:endParaRPr/>
-          </a:p>
-        </p:txBody>
-      </p:sp>
-      <p:sp>
-        <p:nvSpPr>
-          <p:cNvPr id="10" name="TextBox 9"/>
-          <p:cNvSpPr txBox="1"/>
-          <p:nvPr/>
-        </p:nvSpPr>
-        <p:spPr>
-          <a:xfrm>
-            <a:off x="4690872" y="1490472"/>
-            <a:ext cx="457200" cy="411480"/>
-          </a:xfrm>
-          <a:prstGeom prst="rect">
-            <a:avLst/>
-          </a:prstGeom>
-          <a:noFill/>
-        </p:spPr>
-        <p:txBody>
-          <a:bodyPr wrap="square" lIns="45720" rIns="45720" anchor="ctr">
-            <a:spAutoFit/>
-          </a:bodyPr>
-          <a:lstStyle/>
-          <a:p>
-            <a:pPr algn="ctr"/>
-            <a:r>
-              <a:rPr sz="1700" b="1">
-                <a:solidFill>
-                  <a:srgbClr val="00A6A6"/>
-                </a:solidFill>
-                <a:latin typeface="Aptos"/>
-              </a:rPr>
-              <a:t>2</a:t>
-            </a:r>
-          </a:p>
-        </p:txBody>
-      </p:sp>
-      <p:sp>
-        <p:nvSpPr>
-          <p:cNvPr id="11" name="TextBox 10"/>
-          <p:cNvSpPr txBox="1"/>
-          <p:nvPr/>
-        </p:nvSpPr>
-        <p:spPr>
-          <a:xfrm>
-            <a:off x="5239512" y="1490472"/>
-            <a:ext cx="2423160" cy="1078992"/>
-          </a:xfrm>
-          <a:prstGeom prst="rect">
-            <a:avLst/>
-          </a:prstGeom>
-          <a:noFill/>
-        </p:spPr>
-        <p:txBody>
-          <a:bodyPr wrap="square" lIns="45720" rIns="45720" anchor="ctr">
-            <a:spAutoFit/>
-          </a:bodyPr>
-          <a:lstStyle/>
-          <a:p>
-            <a:pPr algn="l"/>
-            <a:r>
-              <a:rPr sz="1500" b="1">
-                <a:solidFill>
-                  <a:srgbClr val="17212B"/>
-                </a:solidFill>
-                <a:latin typeface="Aptos"/>
-              </a:rPr>
-              <a:t>Put a zero on |z|=1 at an angle: predict the notch.</a:t>
-            </a:r>
-          </a:p>
-        </p:txBody>
-      </p:sp>
-      <p:sp>
-        <p:nvSpPr>
-          <p:cNvPr id="12" name="Rounded Rectangle 11"/>
-          <p:cNvSpPr/>
-          <p:nvPr/>
-        </p:nvSpPr>
-        <p:spPr>
-          <a:xfrm>
-            <a:off x="8284464" y="1325880"/>
-            <a:ext cx="3337560" cy="1600200"/>
-          </a:xfrm>
-          <a:prstGeom prst="roundRect">
-            <a:avLst/>
-          </a:prstGeom>
-          <a:solidFill>
-            <a:srgbClr val="FFFFFF"/>
-          </a:solidFill>
-          <a:ln w="12700">
-            <a:solidFill>
-              <a:srgbClr val="DCE6EC"/>
-            </a:solidFill>
-          </a:ln>
-        </p:spPr>
-        <p:style>
-          <a:lnRef idx="1">
-            <a:schemeClr val="accent1"/>
-          </a:lnRef>
-          <a:fillRef idx="3">
-            <a:schemeClr val="accent1"/>
-          </a:fillRef>
-          <a:effectRef idx="2">
-            <a:schemeClr val="accent1"/>
-          </a:effectRef>
-          <a:fontRef idx="minor">
-            <a:schemeClr val="lt1"/>
-          </a:fontRef>
-        </p:style>
-        <p:txBody>
-          <a:bodyPr rtlCol="0" anchor="ctr"/>
-          <a:lstStyle/>
-          <a:p>
-            <a:pPr algn="ctr"/>
-            <a:endParaRPr/>
-          </a:p>
-        </p:txBody>
-      </p:sp>
-      <p:sp>
-        <p:nvSpPr>
-          <p:cNvPr id="13" name="TextBox 12"/>
-          <p:cNvSpPr txBox="1"/>
-          <p:nvPr/>
-        </p:nvSpPr>
-        <p:spPr>
-          <a:xfrm>
-            <a:off x="8421624" y="1490472"/>
-            <a:ext cx="457200" cy="411480"/>
-          </a:xfrm>
-          <a:prstGeom prst="rect">
-            <a:avLst/>
-          </a:prstGeom>
-          <a:noFill/>
-        </p:spPr>
-        <p:txBody>
-          <a:bodyPr wrap="square" lIns="45720" rIns="45720" anchor="ctr">
-            <a:spAutoFit/>
-          </a:bodyPr>
-          <a:lstStyle/>
-          <a:p>
-            <a:pPr algn="ctr"/>
-            <a:r>
-              <a:rPr sz="1700" b="1">
-                <a:solidFill>
-                  <a:srgbClr val="00A6A6"/>
-                </a:solidFill>
-                <a:latin typeface="Aptos"/>
-              </a:rPr>
-              <a:t>3</a:t>
-            </a:r>
-          </a:p>
-        </p:txBody>
-      </p:sp>
-      <p:sp>
-        <p:nvSpPr>
-          <p:cNvPr id="14" name="TextBox 13"/>
-          <p:cNvSpPr txBox="1"/>
-          <p:nvPr/>
-        </p:nvSpPr>
-        <p:spPr>
-          <a:xfrm>
-            <a:off x="8970264" y="1490472"/>
-            <a:ext cx="2423160" cy="1078992"/>
-          </a:xfrm>
-          <a:prstGeom prst="rect">
-            <a:avLst/>
-          </a:prstGeom>
-          <a:noFill/>
-        </p:spPr>
-        <p:txBody>
-          <a:bodyPr wrap="square" lIns="45720" rIns="45720" anchor="ctr">
-            <a:spAutoFit/>
-          </a:bodyPr>
-          <a:lstStyle/>
-          <a:p>
-            <a:pPr algn="l"/>
-            <a:r>
-              <a:rPr sz="1500" b="1">
-                <a:solidFill>
-                  <a:srgbClr val="17212B"/>
-                </a:solidFill>
-                <a:latin typeface="Aptos"/>
-              </a:rPr>
-              <a:t>Move the zero inside the circle: does the notch remain perfect?</a:t>
-            </a:r>
-          </a:p>
-        </p:txBody>
-      </p:sp>
-      <p:sp>
-        <p:nvSpPr>
-          <p:cNvPr id="15" name="Rounded Rectangle 14"/>
-          <p:cNvSpPr/>
-          <p:nvPr/>
-        </p:nvSpPr>
-        <p:spPr>
-          <a:xfrm>
-            <a:off x="822960" y="3291839"/>
-            <a:ext cx="3337560" cy="1600200"/>
-          </a:xfrm>
-          <a:prstGeom prst="roundRect">
-            <a:avLst/>
-          </a:prstGeom>
-          <a:solidFill>
-            <a:srgbClr val="E8F7F7"/>
-          </a:solidFill>
-          <a:ln w="12700">
-            <a:solidFill>
-              <a:srgbClr val="00A6A6"/>
-            </a:solidFill>
-          </a:ln>
-        </p:spPr>
-        <p:style>
-          <a:lnRef idx="1">
-            <a:schemeClr val="accent1"/>
-          </a:lnRef>
-          <a:fillRef idx="3">
-            <a:schemeClr val="accent1"/>
-          </a:fillRef>
-          <a:effectRef idx="2">
-            <a:schemeClr val="accent1"/>
-          </a:effectRef>
-          <a:fontRef idx="minor">
-            <a:schemeClr val="lt1"/>
-          </a:fontRef>
-        </p:style>
-        <p:txBody>
-          <a:bodyPr rtlCol="0" anchor="ctr"/>
-          <a:lstStyle/>
-          <a:p>
-            <a:pPr algn="ctr"/>
-            <a:endParaRPr/>
-          </a:p>
-        </p:txBody>
-      </p:sp>
-      <p:sp>
-        <p:nvSpPr>
-          <p:cNvPr id="16" name="TextBox 15"/>
-          <p:cNvSpPr txBox="1"/>
-          <p:nvPr/>
-        </p:nvSpPr>
-        <p:spPr>
-          <a:xfrm>
-            <a:off x="960120" y="3456432"/>
-            <a:ext cx="457200" cy="411480"/>
-          </a:xfrm>
-          <a:prstGeom prst="rect">
-            <a:avLst/>
-          </a:prstGeom>
-          <a:noFill/>
-        </p:spPr>
-        <p:txBody>
-          <a:bodyPr wrap="square" lIns="45720" rIns="45720" anchor="ctr">
-            <a:spAutoFit/>
-          </a:bodyPr>
-          <a:lstStyle/>
-          <a:p>
-            <a:pPr algn="ctr"/>
-            <a:r>
-              <a:rPr sz="1700" b="1">
-                <a:solidFill>
-                  <a:srgbClr val="00A6A6"/>
-                </a:solidFill>
-                <a:latin typeface="Aptos"/>
-              </a:rPr>
-              <a:t>4</a:t>
-            </a:r>
-          </a:p>
-        </p:txBody>
-      </p:sp>
-      <p:sp>
-        <p:nvSpPr>
-          <p:cNvPr id="17" name="TextBox 16"/>
-          <p:cNvSpPr txBox="1"/>
-          <p:nvPr/>
-        </p:nvSpPr>
-        <p:spPr>
-          <a:xfrm>
-            <a:off x="1508760" y="3456432"/>
-            <a:ext cx="2423160" cy="1078992"/>
-          </a:xfrm>
-          <a:prstGeom prst="rect">
-            <a:avLst/>
-          </a:prstGeom>
-          <a:noFill/>
-        </p:spPr>
-        <p:txBody>
-          <a:bodyPr wrap="square" lIns="45720" rIns="45720" anchor="ctr">
-            <a:spAutoFit/>
-          </a:bodyPr>
-          <a:lstStyle/>
-          <a:p>
-            <a:pPr algn="l"/>
-            <a:r>
-              <a:rPr sz="1500" b="1">
-                <a:solidFill>
-                  <a:srgbClr val="17212B"/>
-                </a:solidFill>
-                <a:latin typeface="Aptos"/>
-              </a:rPr>
-              <a:t>Add a pole at the same angle with r=0.9, then 0.98.</a:t>
-            </a:r>
-          </a:p>
-        </p:txBody>
-      </p:sp>
-      <p:sp>
-        <p:nvSpPr>
-          <p:cNvPr id="18" name="Rounded Rectangle 17"/>
-          <p:cNvSpPr/>
-          <p:nvPr/>
-        </p:nvSpPr>
-        <p:spPr>
-          <a:xfrm>
-            <a:off x="4553712" y="3291839"/>
-            <a:ext cx="3337560" cy="1600200"/>
-          </a:xfrm>
-          <a:prstGeom prst="roundRect">
-            <a:avLst/>
-          </a:prstGeom>
-          <a:solidFill>
-            <a:srgbClr val="FFFFFF"/>
-          </a:solidFill>
-          <a:ln w="12700">
-            <a:solidFill>
-              <a:srgbClr val="DCE6EC"/>
-            </a:solidFill>
-          </a:ln>
-        </p:spPr>
-        <p:style>
-          <a:lnRef idx="1">
-            <a:schemeClr val="accent1"/>
-          </a:lnRef>
-          <a:fillRef idx="3">
-            <a:schemeClr val="accent1"/>
-          </a:fillRef>
-          <a:effectRef idx="2">
-            <a:schemeClr val="accent1"/>
-          </a:effectRef>
-          <a:fontRef idx="minor">
-            <a:schemeClr val="lt1"/>
-          </a:fontRef>
-        </p:style>
-        <p:txBody>
-          <a:bodyPr rtlCol="0" anchor="ctr"/>
-          <a:lstStyle/>
-          <a:p>
-            <a:pPr algn="ctr"/>
-            <a:endParaRPr/>
-          </a:p>
-        </p:txBody>
-      </p:sp>
-      <p:sp>
-        <p:nvSpPr>
-          <p:cNvPr id="19" name="TextBox 18"/>
-          <p:cNvSpPr txBox="1"/>
-          <p:nvPr/>
-        </p:nvSpPr>
-        <p:spPr>
-          <a:xfrm>
-            <a:off x="4690872" y="3456432"/>
-            <a:ext cx="457200" cy="411480"/>
-          </a:xfrm>
-          <a:prstGeom prst="rect">
-            <a:avLst/>
-          </a:prstGeom>
-          <a:noFill/>
-        </p:spPr>
-        <p:txBody>
-          <a:bodyPr wrap="square" lIns="45720" rIns="45720" anchor="ctr">
-            <a:spAutoFit/>
-          </a:bodyPr>
-          <a:lstStyle/>
-          <a:p>
-            <a:pPr algn="ctr"/>
-            <a:r>
-              <a:rPr sz="1700" b="1">
-                <a:solidFill>
-                  <a:srgbClr val="00A6A6"/>
-                </a:solidFill>
-                <a:latin typeface="Aptos"/>
-              </a:rPr>
-              <a:t>5</a:t>
-            </a:r>
-          </a:p>
-        </p:txBody>
-      </p:sp>
-      <p:sp>
-        <p:nvSpPr>
-          <p:cNvPr id="20" name="TextBox 19"/>
-          <p:cNvSpPr txBox="1"/>
-          <p:nvPr/>
-        </p:nvSpPr>
-        <p:spPr>
-          <a:xfrm>
-            <a:off x="5239512" y="3456432"/>
-            <a:ext cx="2423160" cy="1078992"/>
-          </a:xfrm>
-          <a:prstGeom prst="rect">
-            <a:avLst/>
-          </a:prstGeom>
-          <a:noFill/>
-        </p:spPr>
-        <p:txBody>
-          <a:bodyPr wrap="square" lIns="45720" rIns="45720" anchor="ctr">
-            <a:spAutoFit/>
-          </a:bodyPr>
-          <a:lstStyle/>
-          <a:p>
-            <a:pPr algn="l"/>
-            <a:r>
-              <a:rPr sz="1500" b="1">
-                <a:solidFill>
-                  <a:srgbClr val="17212B"/>
-                </a:solidFill>
-                <a:latin typeface="Aptos"/>
-              </a:rPr>
-              <a:t>Listen to the 60-Hz hum example before and after filtering.</a:t>
-            </a:r>
-          </a:p>
-        </p:txBody>
-      </p:sp>
-      <p:sp>
-        <p:nvSpPr>
-          <p:cNvPr id="21" name="Rounded Rectangle 20"/>
-          <p:cNvSpPr/>
-          <p:nvPr/>
-        </p:nvSpPr>
-        <p:spPr>
-          <a:xfrm>
-            <a:off x="4553712" y="5120640"/>
-            <a:ext cx="3108960" cy="658368"/>
+            <a:off x="7635240" y="1371600"/>
+            <a:ext cx="3657600" cy="4069080"/>
           </a:xfrm>
           <a:prstGeom prst="roundRect">
             <a:avLst/>
@@ -6062,42 +5279,110 @@
       </p:sp>
       <p:sp>
         <p:nvSpPr>
-          <p:cNvPr id="22" name="TextBox 21"/>
-          <p:cNvSpPr txBox="1"/>
-          <p:nvPr/>
-        </p:nvSpPr>
-        <p:spPr>
-          <a:xfrm>
-            <a:off x="4663440" y="5239512"/>
-            <a:ext cx="2880360" cy="384048"/>
-          </a:xfrm>
-          <a:prstGeom prst="rect">
-            <a:avLst/>
-          </a:prstGeom>
-          <a:noFill/>
-        </p:spPr>
-        <p:txBody>
-          <a:bodyPr wrap="square" lIns="45720" rIns="45720" anchor="ctr">
-            <a:spAutoFit/>
-          </a:bodyPr>
-          <a:lstStyle/>
-          <a:p>
-            <a:pPr algn="ctr"/>
-            <a:r>
-              <a:rPr sz="1300" b="1">
-                <a:solidFill>
-                  <a:srgbClr val="16324F"/>
-                </a:solidFill>
-                <a:latin typeface="Aptos"/>
-              </a:rPr>
-              <a:t>Notebook: pole_zero_sandbox()</a:t>
-            </a:r>
-          </a:p>
-        </p:txBody>
-      </p:sp>
-      <p:sp>
-        <p:nvSpPr>
-          <p:cNvPr id="23" name="TextBox 22"/>
+          <p:cNvPr id="8" name="TextBox 7"/>
+          <p:cNvSpPr txBox="1"/>
+          <p:nvPr/>
+        </p:nvSpPr>
+        <p:spPr>
+          <a:xfrm>
+            <a:off x="7909560" y="1719072"/>
+            <a:ext cx="3108960" cy="3246120"/>
+          </a:xfrm>
+          <a:prstGeom prst="rect">
+            <a:avLst/>
+          </a:prstGeom>
+          <a:noFill/>
+        </p:spPr>
+        <p:txBody>
+          <a:bodyPr wrap="square" lIns="73152" rIns="36576" anchor="t">
+            <a:spAutoFit/>
+          </a:bodyPr>
+          <a:lstStyle/>
+          <a:p>
+            <a:pPr>
+              <a:spcAft>
+                <a:spcPts val="500"/>
+              </a:spcAft>
+              <a:defRPr sz="1500">
+                <a:solidFill>
+                  <a:srgbClr val="17212B"/>
+                </a:solidFill>
+                <a:latin typeface="Aptos"/>
+              </a:defRPr>
+            </a:pPr>
+            <a:r>
+              <a:t>• Same angle ⇒ same resonance center.</a:t>
+            </a:r>
+          </a:p>
+          <a:p>
+            <a:pPr>
+              <a:spcAft>
+                <a:spcPts val="500"/>
+              </a:spcAft>
+              <a:defRPr sz="1500">
+                <a:solidFill>
+                  <a:srgbClr val="17212B"/>
+                </a:solidFill>
+                <a:latin typeface="Aptos"/>
+              </a:defRPr>
+            </a:pPr>
+            <a:r>
+              <a:t>• r closer to 1 ⇒ smaller distance to unit circle.</a:t>
+            </a:r>
+          </a:p>
+          <a:p>
+            <a:pPr>
+              <a:spcAft>
+                <a:spcPts val="500"/>
+              </a:spcAft>
+              <a:defRPr sz="1500">
+                <a:solidFill>
+                  <a:srgbClr val="17212B"/>
+                </a:solidFill>
+                <a:latin typeface="Aptos"/>
+              </a:defRPr>
+            </a:pPr>
+            <a:r>
+              <a:t>• Peak becomes sharper and stronger.</a:t>
+            </a:r>
+          </a:p>
+          <a:p>
+            <a:pPr>
+              <a:spcAft>
+                <a:spcPts val="500"/>
+              </a:spcAft>
+              <a:defRPr sz="1500">
+                <a:solidFill>
+                  <a:srgbClr val="17212B"/>
+                </a:solidFill>
+                <a:latin typeface="Aptos"/>
+              </a:defRPr>
+            </a:pPr>
+            <a:r>
+              <a:t>• Impulse response decays roughly like rⁿ, so ringing lasts longer.</a:t>
+            </a:r>
+          </a:p>
+          <a:p>
+            <a:pPr>
+              <a:spcAft>
+                <a:spcPts val="500"/>
+              </a:spcAft>
+              <a:defRPr sz="1500">
+                <a:solidFill>
+                  <a:srgbClr val="17212B"/>
+                </a:solidFill>
+                <a:latin typeface="Aptos"/>
+              </a:defRPr>
+            </a:pPr>
+            <a:r>
+              <a:t>• r≥1 breaks causal BIBO stability.</a:t>
+            </a:r>
+          </a:p>
+        </p:txBody>
+      </p:sp>
+      <p:sp>
+        <p:nvSpPr>
+          <p:cNvPr id="9" name="TextBox 8"/>
           <p:cNvSpPr txBox="1"/>
           <p:nvPr/>
         </p:nvSpPr>
@@ -6132,7 +5417,7 @@
       </p:sp>
       <p:sp>
         <p:nvSpPr>
-          <p:cNvPr id="24" name="TextBox 23"/>
+          <p:cNvPr id="10" name="TextBox 9"/>
           <p:cNvSpPr txBox="1"/>
           <p:nvPr/>
         </p:nvSpPr>
@@ -6160,7 +5445,7 @@
                 </a:solidFill>
                 <a:latin typeface="Aptos"/>
               </a:rPr>
-              <a:t>16</a:t>
+              <a:t>15</a:t>
             </a:r>
           </a:p>
         </p:txBody>
@@ -6220,7 +5505,7 @@
                 </a:solidFill>
                 <a:latin typeface="Aptos"/>
               </a:rPr>
-              <a:t>Python demo: poles, zeros, and freqz</a:t>
+              <a:t>Pole–zero sandbox activity</a:t>
             </a:r>
           </a:p>
         </p:txBody>
@@ -6336,7 +5621,7 @@
                 </a:solidFill>
                 <a:latin typeface="Aptos"/>
               </a:rPr>
-              <a:t>Use code as a geometry checker.</a:t>
+              <a:t>Predict first. Move a pole or zero. Then listen / plot.</a:t>
             </a:r>
           </a:p>
         </p:txBody>
@@ -6349,18 +5634,18 @@
         </p:nvSpPr>
         <p:spPr>
           <a:xfrm>
-            <a:off x="731520" y="1234440"/>
-            <a:ext cx="5623560" cy="4480560"/>
+            <a:off x="822960" y="1325880"/>
+            <a:ext cx="3337560" cy="1600200"/>
           </a:xfrm>
           <a:prstGeom prst="roundRect">
             <a:avLst/>
           </a:prstGeom>
           <a:solidFill>
-            <a:srgbClr val="17212B"/>
+            <a:srgbClr val="FFFFFF"/>
           </a:solidFill>
           <a:ln w="12700">
             <a:solidFill>
-              <a:srgbClr val="17212B"/>
+              <a:srgbClr val="DCE6EC"/>
             </a:solidFill>
           </a:ln>
         </p:spPr>
@@ -6395,50 +5680,78 @@
         </p:nvSpPr>
         <p:spPr>
           <a:xfrm>
-            <a:off x="987552" y="1508760"/>
-            <a:ext cx="5120640" cy="3840480"/>
-          </a:xfrm>
-          <a:prstGeom prst="rect">
-            <a:avLst/>
-          </a:prstGeom>
-          <a:noFill/>
-        </p:spPr>
-        <p:txBody>
-          <a:bodyPr wrap="square" lIns="45720" rIns="45720" anchor="t">
+            <a:off x="960120" y="1490472"/>
+            <a:ext cx="457200" cy="411480"/>
+          </a:xfrm>
+          <a:prstGeom prst="rect">
+            <a:avLst/>
+          </a:prstGeom>
+          <a:noFill/>
+        </p:spPr>
+        <p:txBody>
+          <a:bodyPr wrap="square" lIns="45720" rIns="45720" anchor="ctr">
+            <a:spAutoFit/>
+          </a:bodyPr>
+          <a:lstStyle/>
+          <a:p>
+            <a:pPr algn="ctr"/>
+            <a:r>
+              <a:rPr sz="1700" b="1">
+                <a:solidFill>
+                  <a:srgbClr val="00A6A6"/>
+                </a:solidFill>
+                <a:latin typeface="Aptos"/>
+              </a:rPr>
+              <a:t>1</a:t>
+            </a:r>
+          </a:p>
+        </p:txBody>
+      </p:sp>
+      <p:sp>
+        <p:nvSpPr>
+          <p:cNvPr id="8" name="TextBox 7"/>
+          <p:cNvSpPr txBox="1"/>
+          <p:nvPr/>
+        </p:nvSpPr>
+        <p:spPr>
+          <a:xfrm>
+            <a:off x="1508760" y="1490472"/>
+            <a:ext cx="2423160" cy="1078992"/>
+          </a:xfrm>
+          <a:prstGeom prst="rect">
+            <a:avLst/>
+          </a:prstGeom>
+          <a:noFill/>
+        </p:spPr>
+        <p:txBody>
+          <a:bodyPr wrap="square" lIns="45720" rIns="45720" anchor="ctr">
             <a:spAutoFit/>
           </a:bodyPr>
           <a:lstStyle/>
           <a:p>
             <a:pPr algn="l"/>
             <a:r>
-              <a:rPr sz="1400" b="0">
-                <a:solidFill>
-                  <a:srgbClr val="FFFFFF"/>
-                </a:solidFill>
-                <a:latin typeface="Aptos Mono"/>
-              </a:rPr>
-              <a:t>import numpy as np
-from scipy import signal
-zeros = np.exp(1j*np.array([w0, -w0]))
-poles = r * zeros
-b = np.poly(zeros).real
-a = np.poly(poles).real
-w, H = signal.freqz(b, a, fs=fs)
-# plot zeros, poles, |H|</a:t>
-            </a:r>
-          </a:p>
-        </p:txBody>
-      </p:sp>
-      <p:sp>
-        <p:nvSpPr>
-          <p:cNvPr id="8" name="Rounded Rectangle 7"/>
+              <a:rPr sz="1500" b="1">
+                <a:solidFill>
+                  <a:srgbClr val="17212B"/>
+                </a:solidFill>
+                <a:latin typeface="Aptos"/>
+              </a:rPr>
+              <a:t>Start with no poles/zeros: flat response.</a:t>
+            </a:r>
+          </a:p>
+        </p:txBody>
+      </p:sp>
+      <p:sp>
+        <p:nvSpPr>
+          <p:cNvPr id="9" name="Rounded Rectangle 8"/>
           <p:cNvSpPr/>
           <p:nvPr/>
         </p:nvSpPr>
         <p:spPr>
           <a:xfrm>
-            <a:off x="6629400" y="1234440"/>
-            <a:ext cx="4572000" cy="4480560"/>
+            <a:off x="4553712" y="1325880"/>
+            <a:ext cx="3337560" cy="1600200"/>
           </a:xfrm>
           <a:prstGeom prst="roundRect">
             <a:avLst/>
@@ -6477,94 +5790,506 @@
       </p:sp>
       <p:sp>
         <p:nvSpPr>
-          <p:cNvPr id="9" name="TextBox 8"/>
-          <p:cNvSpPr txBox="1"/>
-          <p:nvPr/>
-        </p:nvSpPr>
-        <p:spPr>
-          <a:xfrm>
-            <a:off x="6931152" y="1645920"/>
-            <a:ext cx="3977639" cy="3291840"/>
-          </a:xfrm>
-          <a:prstGeom prst="rect">
-            <a:avLst/>
-          </a:prstGeom>
-          <a:noFill/>
-        </p:spPr>
-        <p:txBody>
-          <a:bodyPr wrap="square" lIns="73152" rIns="36576" anchor="t">
-            <a:spAutoFit/>
-          </a:bodyPr>
-          <a:lstStyle/>
-          <a:p>
-            <a:pPr>
-              <a:spcAft>
-                <a:spcPts val="500"/>
-              </a:spcAft>
-              <a:defRPr sz="1600">
+          <p:cNvPr id="10" name="TextBox 9"/>
+          <p:cNvSpPr txBox="1"/>
+          <p:nvPr/>
+        </p:nvSpPr>
+        <p:spPr>
+          <a:xfrm>
+            <a:off x="4690872" y="1490472"/>
+            <a:ext cx="457200" cy="411480"/>
+          </a:xfrm>
+          <a:prstGeom prst="rect">
+            <a:avLst/>
+          </a:prstGeom>
+          <a:noFill/>
+        </p:spPr>
+        <p:txBody>
+          <a:bodyPr wrap="square" lIns="45720" rIns="45720" anchor="ctr">
+            <a:spAutoFit/>
+          </a:bodyPr>
+          <a:lstStyle/>
+          <a:p>
+            <a:pPr algn="ctr"/>
+            <a:r>
+              <a:rPr sz="1700" b="1">
+                <a:solidFill>
+                  <a:srgbClr val="00A6A6"/>
+                </a:solidFill>
+                <a:latin typeface="Aptos"/>
+              </a:rPr>
+              <a:t>2</a:t>
+            </a:r>
+          </a:p>
+        </p:txBody>
+      </p:sp>
+      <p:sp>
+        <p:nvSpPr>
+          <p:cNvPr id="11" name="TextBox 10"/>
+          <p:cNvSpPr txBox="1"/>
+          <p:nvPr/>
+        </p:nvSpPr>
+        <p:spPr>
+          <a:xfrm>
+            <a:off x="5239512" y="1490472"/>
+            <a:ext cx="2423160" cy="1078992"/>
+          </a:xfrm>
+          <a:prstGeom prst="rect">
+            <a:avLst/>
+          </a:prstGeom>
+          <a:noFill/>
+        </p:spPr>
+        <p:txBody>
+          <a:bodyPr wrap="square" lIns="45720" rIns="45720" anchor="ctr">
+            <a:spAutoFit/>
+          </a:bodyPr>
+          <a:lstStyle/>
+          <a:p>
+            <a:pPr algn="l"/>
+            <a:r>
+              <a:rPr sz="1500" b="1">
                 <a:solidFill>
                   <a:srgbClr val="17212B"/>
                 </a:solidFill>
                 <a:latin typeface="Aptos"/>
-              </a:defRPr>
-            </a:pPr>
-            <a:r>
-              <a:t>• `np.roots` moves coefficients → roots.</a:t>
-            </a:r>
-          </a:p>
-          <a:p>
-            <a:pPr>
-              <a:spcAft>
-                <a:spcPts val="500"/>
-              </a:spcAft>
-              <a:defRPr sz="1600">
+              </a:rPr>
+              <a:t>Put a zero on |z|=1 at an angle: predict the notch.</a:t>
+            </a:r>
+          </a:p>
+        </p:txBody>
+      </p:sp>
+      <p:sp>
+        <p:nvSpPr>
+          <p:cNvPr id="12" name="Rounded Rectangle 11"/>
+          <p:cNvSpPr/>
+          <p:nvPr/>
+        </p:nvSpPr>
+        <p:spPr>
+          <a:xfrm>
+            <a:off x="8284464" y="1325880"/>
+            <a:ext cx="3337560" cy="1600200"/>
+          </a:xfrm>
+          <a:prstGeom prst="roundRect">
+            <a:avLst/>
+          </a:prstGeom>
+          <a:solidFill>
+            <a:srgbClr val="FFFFFF"/>
+          </a:solidFill>
+          <a:ln w="12700">
+            <a:solidFill>
+              <a:srgbClr val="DCE6EC"/>
+            </a:solidFill>
+          </a:ln>
+        </p:spPr>
+        <p:style>
+          <a:lnRef idx="1">
+            <a:schemeClr val="accent1"/>
+          </a:lnRef>
+          <a:fillRef idx="3">
+            <a:schemeClr val="accent1"/>
+          </a:fillRef>
+          <a:effectRef idx="2">
+            <a:schemeClr val="accent1"/>
+          </a:effectRef>
+          <a:fontRef idx="minor">
+            <a:schemeClr val="lt1"/>
+          </a:fontRef>
+        </p:style>
+        <p:txBody>
+          <a:bodyPr rtlCol="0" anchor="ctr"/>
+          <a:lstStyle/>
+          <a:p>
+            <a:pPr algn="ctr"/>
+            <a:endParaRPr/>
+          </a:p>
+        </p:txBody>
+      </p:sp>
+      <p:sp>
+        <p:nvSpPr>
+          <p:cNvPr id="13" name="TextBox 12"/>
+          <p:cNvSpPr txBox="1"/>
+          <p:nvPr/>
+        </p:nvSpPr>
+        <p:spPr>
+          <a:xfrm>
+            <a:off x="8421624" y="1490472"/>
+            <a:ext cx="457200" cy="411480"/>
+          </a:xfrm>
+          <a:prstGeom prst="rect">
+            <a:avLst/>
+          </a:prstGeom>
+          <a:noFill/>
+        </p:spPr>
+        <p:txBody>
+          <a:bodyPr wrap="square" lIns="45720" rIns="45720" anchor="ctr">
+            <a:spAutoFit/>
+          </a:bodyPr>
+          <a:lstStyle/>
+          <a:p>
+            <a:pPr algn="ctr"/>
+            <a:r>
+              <a:rPr sz="1700" b="1">
+                <a:solidFill>
+                  <a:srgbClr val="00A6A6"/>
+                </a:solidFill>
+                <a:latin typeface="Aptos"/>
+              </a:rPr>
+              <a:t>3</a:t>
+            </a:r>
+          </a:p>
+        </p:txBody>
+      </p:sp>
+      <p:sp>
+        <p:nvSpPr>
+          <p:cNvPr id="14" name="TextBox 13"/>
+          <p:cNvSpPr txBox="1"/>
+          <p:nvPr/>
+        </p:nvSpPr>
+        <p:spPr>
+          <a:xfrm>
+            <a:off x="8970264" y="1490472"/>
+            <a:ext cx="2423160" cy="1078992"/>
+          </a:xfrm>
+          <a:prstGeom prst="rect">
+            <a:avLst/>
+          </a:prstGeom>
+          <a:noFill/>
+        </p:spPr>
+        <p:txBody>
+          <a:bodyPr wrap="square" lIns="45720" rIns="45720" anchor="ctr">
+            <a:spAutoFit/>
+          </a:bodyPr>
+          <a:lstStyle/>
+          <a:p>
+            <a:pPr algn="l"/>
+            <a:r>
+              <a:rPr sz="1500" b="1">
                 <a:solidFill>
                   <a:srgbClr val="17212B"/>
                 </a:solidFill>
                 <a:latin typeface="Aptos"/>
-              </a:defRPr>
-            </a:pPr>
-            <a:r>
-              <a:t>• `np.poly` moves roots → coefficients.</a:t>
-            </a:r>
-          </a:p>
-          <a:p>
-            <a:pPr>
-              <a:spcAft>
-                <a:spcPts val="500"/>
-              </a:spcAft>
-              <a:defRPr sz="1600">
+              </a:rPr>
+              <a:t>Move the zero inside the circle: does the notch remain perfect?</a:t>
+            </a:r>
+          </a:p>
+        </p:txBody>
+      </p:sp>
+      <p:sp>
+        <p:nvSpPr>
+          <p:cNvPr id="15" name="Rounded Rectangle 14"/>
+          <p:cNvSpPr/>
+          <p:nvPr/>
+        </p:nvSpPr>
+        <p:spPr>
+          <a:xfrm>
+            <a:off x="822960" y="3291839"/>
+            <a:ext cx="3337560" cy="1600200"/>
+          </a:xfrm>
+          <a:prstGeom prst="roundRect">
+            <a:avLst/>
+          </a:prstGeom>
+          <a:solidFill>
+            <a:srgbClr val="E8F7F7"/>
+          </a:solidFill>
+          <a:ln w="12700">
+            <a:solidFill>
+              <a:srgbClr val="00A6A6"/>
+            </a:solidFill>
+          </a:ln>
+        </p:spPr>
+        <p:style>
+          <a:lnRef idx="1">
+            <a:schemeClr val="accent1"/>
+          </a:lnRef>
+          <a:fillRef idx="3">
+            <a:schemeClr val="accent1"/>
+          </a:fillRef>
+          <a:effectRef idx="2">
+            <a:schemeClr val="accent1"/>
+          </a:effectRef>
+          <a:fontRef idx="minor">
+            <a:schemeClr val="lt1"/>
+          </a:fontRef>
+        </p:style>
+        <p:txBody>
+          <a:bodyPr rtlCol="0" anchor="ctr"/>
+          <a:lstStyle/>
+          <a:p>
+            <a:pPr algn="ctr"/>
+            <a:endParaRPr/>
+          </a:p>
+        </p:txBody>
+      </p:sp>
+      <p:sp>
+        <p:nvSpPr>
+          <p:cNvPr id="16" name="TextBox 15"/>
+          <p:cNvSpPr txBox="1"/>
+          <p:nvPr/>
+        </p:nvSpPr>
+        <p:spPr>
+          <a:xfrm>
+            <a:off x="960120" y="3456432"/>
+            <a:ext cx="457200" cy="411480"/>
+          </a:xfrm>
+          <a:prstGeom prst="rect">
+            <a:avLst/>
+          </a:prstGeom>
+          <a:noFill/>
+        </p:spPr>
+        <p:txBody>
+          <a:bodyPr wrap="square" lIns="45720" rIns="45720" anchor="ctr">
+            <a:spAutoFit/>
+          </a:bodyPr>
+          <a:lstStyle/>
+          <a:p>
+            <a:pPr algn="ctr"/>
+            <a:r>
+              <a:rPr sz="1700" b="1">
+                <a:solidFill>
+                  <a:srgbClr val="00A6A6"/>
+                </a:solidFill>
+                <a:latin typeface="Aptos"/>
+              </a:rPr>
+              <a:t>4</a:t>
+            </a:r>
+          </a:p>
+        </p:txBody>
+      </p:sp>
+      <p:sp>
+        <p:nvSpPr>
+          <p:cNvPr id="17" name="TextBox 16"/>
+          <p:cNvSpPr txBox="1"/>
+          <p:nvPr/>
+        </p:nvSpPr>
+        <p:spPr>
+          <a:xfrm>
+            <a:off x="1508760" y="3456432"/>
+            <a:ext cx="2423160" cy="1078992"/>
+          </a:xfrm>
+          <a:prstGeom prst="rect">
+            <a:avLst/>
+          </a:prstGeom>
+          <a:noFill/>
+        </p:spPr>
+        <p:txBody>
+          <a:bodyPr wrap="square" lIns="45720" rIns="45720" anchor="ctr">
+            <a:spAutoFit/>
+          </a:bodyPr>
+          <a:lstStyle/>
+          <a:p>
+            <a:pPr algn="l"/>
+            <a:r>
+              <a:rPr sz="1500" b="1">
                 <a:solidFill>
                   <a:srgbClr val="17212B"/>
                 </a:solidFill>
                 <a:latin typeface="Aptos"/>
-              </a:defRPr>
-            </a:pPr>
-            <a:r>
-              <a:t>• `signal.freqz` evaluates on the unit circle numerically.</a:t>
-            </a:r>
-          </a:p>
-          <a:p>
-            <a:pPr>
-              <a:spcAft>
-                <a:spcPts val="500"/>
-              </a:spcAft>
-              <a:defRPr sz="1600">
+              </a:rPr>
+              <a:t>Add a pole at the same angle with r=0.9, then 0.98.</a:t>
+            </a:r>
+          </a:p>
+        </p:txBody>
+      </p:sp>
+      <p:sp>
+        <p:nvSpPr>
+          <p:cNvPr id="18" name="Rounded Rectangle 17"/>
+          <p:cNvSpPr/>
+          <p:nvPr/>
+        </p:nvSpPr>
+        <p:spPr>
+          <a:xfrm>
+            <a:off x="4553712" y="3291839"/>
+            <a:ext cx="3337560" cy="1600200"/>
+          </a:xfrm>
+          <a:prstGeom prst="roundRect">
+            <a:avLst/>
+          </a:prstGeom>
+          <a:solidFill>
+            <a:srgbClr val="FFFFFF"/>
+          </a:solidFill>
+          <a:ln w="12700">
+            <a:solidFill>
+              <a:srgbClr val="DCE6EC"/>
+            </a:solidFill>
+          </a:ln>
+        </p:spPr>
+        <p:style>
+          <a:lnRef idx="1">
+            <a:schemeClr val="accent1"/>
+          </a:lnRef>
+          <a:fillRef idx="3">
+            <a:schemeClr val="accent1"/>
+          </a:fillRef>
+          <a:effectRef idx="2">
+            <a:schemeClr val="accent1"/>
+          </a:effectRef>
+          <a:fontRef idx="minor">
+            <a:schemeClr val="lt1"/>
+          </a:fontRef>
+        </p:style>
+        <p:txBody>
+          <a:bodyPr rtlCol="0" anchor="ctr"/>
+          <a:lstStyle/>
+          <a:p>
+            <a:pPr algn="ctr"/>
+            <a:endParaRPr/>
+          </a:p>
+        </p:txBody>
+      </p:sp>
+      <p:sp>
+        <p:nvSpPr>
+          <p:cNvPr id="19" name="TextBox 18"/>
+          <p:cNvSpPr txBox="1"/>
+          <p:nvPr/>
+        </p:nvSpPr>
+        <p:spPr>
+          <a:xfrm>
+            <a:off x="4690872" y="3456432"/>
+            <a:ext cx="457200" cy="411480"/>
+          </a:xfrm>
+          <a:prstGeom prst="rect">
+            <a:avLst/>
+          </a:prstGeom>
+          <a:noFill/>
+        </p:spPr>
+        <p:txBody>
+          <a:bodyPr wrap="square" lIns="45720" rIns="45720" anchor="ctr">
+            <a:spAutoFit/>
+          </a:bodyPr>
+          <a:lstStyle/>
+          <a:p>
+            <a:pPr algn="ctr"/>
+            <a:r>
+              <a:rPr sz="1700" b="1">
+                <a:solidFill>
+                  <a:srgbClr val="00A6A6"/>
+                </a:solidFill>
+                <a:latin typeface="Aptos"/>
+              </a:rPr>
+              <a:t>5</a:t>
+            </a:r>
+          </a:p>
+        </p:txBody>
+      </p:sp>
+      <p:sp>
+        <p:nvSpPr>
+          <p:cNvPr id="20" name="TextBox 19"/>
+          <p:cNvSpPr txBox="1"/>
+          <p:nvPr/>
+        </p:nvSpPr>
+        <p:spPr>
+          <a:xfrm>
+            <a:off x="5239512" y="3456432"/>
+            <a:ext cx="2423160" cy="1078992"/>
+          </a:xfrm>
+          <a:prstGeom prst="rect">
+            <a:avLst/>
+          </a:prstGeom>
+          <a:noFill/>
+        </p:spPr>
+        <p:txBody>
+          <a:bodyPr wrap="square" lIns="45720" rIns="45720" anchor="ctr">
+            <a:spAutoFit/>
+          </a:bodyPr>
+          <a:lstStyle/>
+          <a:p>
+            <a:pPr algn="l"/>
+            <a:r>
+              <a:rPr sz="1500" b="1">
                 <a:solidFill>
                   <a:srgbClr val="17212B"/>
                 </a:solidFill>
                 <a:latin typeface="Aptos"/>
-              </a:defRPr>
-            </a:pPr>
-            <a:r>
-              <a:t>• The pole-zero plot should let you predict the major features before `freqz` confirms them.</a:t>
-            </a:r>
-          </a:p>
-        </p:txBody>
-      </p:sp>
-      <p:sp>
-        <p:nvSpPr>
-          <p:cNvPr id="10" name="TextBox 9"/>
+              </a:rPr>
+              <a:t>Listen to the 60-Hz hum example before and after filtering.</a:t>
+            </a:r>
+          </a:p>
+        </p:txBody>
+      </p:sp>
+      <p:sp>
+        <p:nvSpPr>
+          <p:cNvPr id="21" name="Rounded Rectangle 20"/>
+          <p:cNvSpPr/>
+          <p:nvPr/>
+        </p:nvSpPr>
+        <p:spPr>
+          <a:xfrm>
+            <a:off x="4553712" y="5120640"/>
+            <a:ext cx="3108960" cy="658368"/>
+          </a:xfrm>
+          <a:prstGeom prst="roundRect">
+            <a:avLst/>
+          </a:prstGeom>
+          <a:solidFill>
+            <a:srgbClr val="FFF2E6"/>
+          </a:solidFill>
+          <a:ln w="12700">
+            <a:solidFill>
+              <a:srgbClr val="F28E2B"/>
+            </a:solidFill>
+          </a:ln>
+        </p:spPr>
+        <p:style>
+          <a:lnRef idx="1">
+            <a:schemeClr val="accent1"/>
+          </a:lnRef>
+          <a:fillRef idx="3">
+            <a:schemeClr val="accent1"/>
+          </a:fillRef>
+          <a:effectRef idx="2">
+            <a:schemeClr val="accent1"/>
+          </a:effectRef>
+          <a:fontRef idx="minor">
+            <a:schemeClr val="lt1"/>
+          </a:fontRef>
+        </p:style>
+        <p:txBody>
+          <a:bodyPr rtlCol="0" anchor="ctr"/>
+          <a:lstStyle/>
+          <a:p>
+            <a:pPr algn="ctr"/>
+            <a:endParaRPr/>
+          </a:p>
+        </p:txBody>
+      </p:sp>
+      <p:sp>
+        <p:nvSpPr>
+          <p:cNvPr id="22" name="TextBox 21"/>
+          <p:cNvSpPr txBox="1"/>
+          <p:nvPr/>
+        </p:nvSpPr>
+        <p:spPr>
+          <a:xfrm>
+            <a:off x="4663440" y="5239512"/>
+            <a:ext cx="2880360" cy="384048"/>
+          </a:xfrm>
+          <a:prstGeom prst="rect">
+            <a:avLst/>
+          </a:prstGeom>
+          <a:noFill/>
+        </p:spPr>
+        <p:txBody>
+          <a:bodyPr wrap="square" lIns="45720" rIns="45720" anchor="ctr">
+            <a:spAutoFit/>
+          </a:bodyPr>
+          <a:lstStyle/>
+          <a:p>
+            <a:pPr algn="ctr"/>
+            <a:r>
+              <a:rPr sz="1300" b="1">
+                <a:solidFill>
+                  <a:srgbClr val="16324F"/>
+                </a:solidFill>
+                <a:latin typeface="Aptos"/>
+              </a:rPr>
+              <a:t>Notebook: pole_zero_sandbox()</a:t>
+            </a:r>
+          </a:p>
+        </p:txBody>
+      </p:sp>
+      <p:sp>
+        <p:nvSpPr>
+          <p:cNvPr id="23" name="TextBox 22"/>
           <p:cNvSpPr txBox="1"/>
           <p:nvPr/>
         </p:nvSpPr>
@@ -6599,7 +6324,7 @@
       </p:sp>
       <p:sp>
         <p:nvSpPr>
-          <p:cNvPr id="11" name="TextBox 10"/>
+          <p:cNvPr id="24" name="TextBox 23"/>
           <p:cNvSpPr txBox="1"/>
           <p:nvPr/>
         </p:nvSpPr>
@@ -6627,7 +6352,7 @@
                 </a:solidFill>
                 <a:latin typeface="Aptos"/>
               </a:rPr>
-              <a:t>17</a:t>
+              <a:t>16</a:t>
             </a:r>
           </a:p>
         </p:txBody>
@@ -7095,7 +6820,7 @@
                 </a:solidFill>
                 <a:latin typeface="Aptos"/>
               </a:rPr>
-              <a:t>Audio demo: removing hum without erasing the signal</a:t>
+              <a:t>Python demo: poles, zeros, and freqz</a:t>
             </a:r>
           </a:p>
         </p:txBody>
@@ -7211,7 +6936,7 @@
                 </a:solidFill>
                 <a:latin typeface="Aptos"/>
               </a:rPr>
-              <a:t>The notch should target a narrow frequency, not broadly low-pass the recording.</a:t>
+              <a:t>Use code as a geometry checker.</a:t>
             </a:r>
           </a:p>
         </p:txBody>
@@ -7224,18 +6949,18 @@
         </p:nvSpPr>
         <p:spPr>
           <a:xfrm>
-            <a:off x="914400" y="1508760"/>
-            <a:ext cx="4754880" cy="2057400"/>
+            <a:off x="731520" y="1234440"/>
+            <a:ext cx="5623560" cy="4480560"/>
           </a:xfrm>
           <a:prstGeom prst="roundRect">
             <a:avLst/>
           </a:prstGeom>
           <a:solidFill>
-            <a:srgbClr val="FDEDEC"/>
+            <a:srgbClr val="17212B"/>
           </a:solidFill>
           <a:ln w="12700">
             <a:solidFill>
-              <a:srgbClr val="D84A3A"/>
+              <a:srgbClr val="17212B"/>
             </a:solidFill>
           </a:ln>
         </p:spPr>
@@ -7270,79 +6995,50 @@
         </p:nvSpPr>
         <p:spPr>
           <a:xfrm>
-            <a:off x="1078992" y="1618488"/>
-            <a:ext cx="4425696" cy="320040"/>
-          </a:xfrm>
-          <a:prstGeom prst="rect">
-            <a:avLst/>
-          </a:prstGeom>
-          <a:noFill/>
-        </p:spPr>
-        <p:txBody>
-          <a:bodyPr wrap="square" lIns="45720" rIns="45720" anchor="ctr">
+            <a:off x="987552" y="1508760"/>
+            <a:ext cx="5120640" cy="3840480"/>
+          </a:xfrm>
+          <a:prstGeom prst="rect">
+            <a:avLst/>
+          </a:prstGeom>
+          <a:noFill/>
+        </p:spPr>
+        <p:txBody>
+          <a:bodyPr wrap="square" lIns="45720" rIns="45720" anchor="t">
             <a:spAutoFit/>
           </a:bodyPr>
           <a:lstStyle/>
           <a:p>
             <a:pPr algn="l"/>
             <a:r>
-              <a:rPr sz="1500" b="1">
-                <a:solidFill>
-                  <a:srgbClr val="16324F"/>
-                </a:solidFill>
-                <a:latin typeface="Aptos"/>
-              </a:rPr>
-              <a:t>Before</a:t>
-            </a:r>
-          </a:p>
-        </p:txBody>
-      </p:sp>
-      <p:sp>
-        <p:nvSpPr>
-          <p:cNvPr id="8" name="TextBox 7"/>
-          <p:cNvSpPr txBox="1"/>
-          <p:nvPr/>
-        </p:nvSpPr>
-        <p:spPr>
-          <a:xfrm>
-            <a:off x="1078992" y="1984248"/>
-            <a:ext cx="4425696" cy="1490472"/>
-          </a:xfrm>
-          <a:prstGeom prst="rect">
-            <a:avLst/>
-          </a:prstGeom>
-          <a:noFill/>
-        </p:spPr>
-        <p:txBody>
-          <a:bodyPr wrap="square" lIns="45720" rIns="45720" anchor="t">
-            <a:spAutoFit/>
-          </a:bodyPr>
-          <a:lstStyle/>
-          <a:p>
-            <a:pPr algn="l"/>
-            <a:r>
-              <a:rPr sz="1300" b="0">
-                <a:solidFill>
-                  <a:srgbClr val="53616E"/>
-                </a:solidFill>
-                <a:latin typeface="Aptos"/>
-              </a:rPr>
-              <a:t>Synthetic voice-like harmonics + 60 Hz and 120 Hz hum.
-Listen: 01_voice_with_60Hz_hum.wav</a:t>
-            </a:r>
-          </a:p>
-        </p:txBody>
-      </p:sp>
-      <p:sp>
-        <p:nvSpPr>
-          <p:cNvPr id="9" name="Rounded Rectangle 8"/>
+              <a:rPr sz="1400" b="0">
+                <a:solidFill>
+                  <a:srgbClr val="FFFFFF"/>
+                </a:solidFill>
+                <a:latin typeface="Aptos Mono"/>
+              </a:rPr>
+              <a:t>import numpy as np
+from scipy import signal
+zeros = np.exp(1j*np.array([w0, -w0]))
+poles = r * zeros
+b = np.poly(zeros).real
+a = np.poly(poles).real
+w, H = signal.freqz(b, a, fs=fs)
+# plot zeros, poles, |H|</a:t>
+            </a:r>
+          </a:p>
+        </p:txBody>
+      </p:sp>
+      <p:sp>
+        <p:nvSpPr>
+          <p:cNvPr id="8" name="Rounded Rectangle 7"/>
           <p:cNvSpPr/>
           <p:nvPr/>
         </p:nvSpPr>
         <p:spPr>
           <a:xfrm>
-            <a:off x="6080760" y="1508760"/>
-            <a:ext cx="4754880" cy="2057400"/>
+            <a:off x="6629400" y="1234440"/>
+            <a:ext cx="4572000" cy="4480560"/>
           </a:xfrm>
           <a:prstGeom prst="roundRect">
             <a:avLst/>
@@ -7381,159 +7077,94 @@
       </p:sp>
       <p:sp>
         <p:nvSpPr>
+          <p:cNvPr id="9" name="TextBox 8"/>
+          <p:cNvSpPr txBox="1"/>
+          <p:nvPr/>
+        </p:nvSpPr>
+        <p:spPr>
+          <a:xfrm>
+            <a:off x="6931152" y="1645920"/>
+            <a:ext cx="3977639" cy="3291840"/>
+          </a:xfrm>
+          <a:prstGeom prst="rect">
+            <a:avLst/>
+          </a:prstGeom>
+          <a:noFill/>
+        </p:spPr>
+        <p:txBody>
+          <a:bodyPr wrap="square" lIns="73152" rIns="36576" anchor="t">
+            <a:spAutoFit/>
+          </a:bodyPr>
+          <a:lstStyle/>
+          <a:p>
+            <a:pPr>
+              <a:spcAft>
+                <a:spcPts val="500"/>
+              </a:spcAft>
+              <a:defRPr sz="1600">
+                <a:solidFill>
+                  <a:srgbClr val="17212B"/>
+                </a:solidFill>
+                <a:latin typeface="Aptos"/>
+              </a:defRPr>
+            </a:pPr>
+            <a:r>
+              <a:t>• `np.roots` moves coefficients → roots.</a:t>
+            </a:r>
+          </a:p>
+          <a:p>
+            <a:pPr>
+              <a:spcAft>
+                <a:spcPts val="500"/>
+              </a:spcAft>
+              <a:defRPr sz="1600">
+                <a:solidFill>
+                  <a:srgbClr val="17212B"/>
+                </a:solidFill>
+                <a:latin typeface="Aptos"/>
+              </a:defRPr>
+            </a:pPr>
+            <a:r>
+              <a:t>• `np.poly` moves roots → coefficients.</a:t>
+            </a:r>
+          </a:p>
+          <a:p>
+            <a:pPr>
+              <a:spcAft>
+                <a:spcPts val="500"/>
+              </a:spcAft>
+              <a:defRPr sz="1600">
+                <a:solidFill>
+                  <a:srgbClr val="17212B"/>
+                </a:solidFill>
+                <a:latin typeface="Aptos"/>
+              </a:defRPr>
+            </a:pPr>
+            <a:r>
+              <a:t>• `signal.freqz` evaluates on the unit circle numerically.</a:t>
+            </a:r>
+          </a:p>
+          <a:p>
+            <a:pPr>
+              <a:spcAft>
+                <a:spcPts val="500"/>
+              </a:spcAft>
+              <a:defRPr sz="1600">
+                <a:solidFill>
+                  <a:srgbClr val="17212B"/>
+                </a:solidFill>
+                <a:latin typeface="Aptos"/>
+              </a:defRPr>
+            </a:pPr>
+            <a:r>
+              <a:t>• The pole-zero plot should let you predict the major features before `freqz` confirms them.</a:t>
+            </a:r>
+          </a:p>
+        </p:txBody>
+      </p:sp>
+      <p:sp>
+        <p:nvSpPr>
           <p:cNvPr id="10" name="TextBox 9"/>
-          <p:cNvSpPr txBox="1"/>
-          <p:nvPr/>
-        </p:nvSpPr>
-        <p:spPr>
-          <a:xfrm>
-            <a:off x="6245352" y="1618488"/>
-            <a:ext cx="4425696" cy="320040"/>
-          </a:xfrm>
-          <a:prstGeom prst="rect">
-            <a:avLst/>
-          </a:prstGeom>
-          <a:noFill/>
-        </p:spPr>
-        <p:txBody>
-          <a:bodyPr wrap="square" lIns="45720" rIns="45720" anchor="ctr">
-            <a:spAutoFit/>
-          </a:bodyPr>
-          <a:lstStyle/>
-          <a:p>
-            <a:pPr algn="l"/>
-            <a:r>
-              <a:rPr sz="1500" b="1">
-                <a:solidFill>
-                  <a:srgbClr val="16324F"/>
-                </a:solidFill>
-                <a:latin typeface="Aptos"/>
-              </a:rPr>
-              <a:t>After</a:t>
-            </a:r>
-          </a:p>
-        </p:txBody>
-      </p:sp>
-      <p:sp>
-        <p:nvSpPr>
-          <p:cNvPr id="11" name="TextBox 10"/>
-          <p:cNvSpPr txBox="1"/>
-          <p:nvPr/>
-        </p:nvSpPr>
-        <p:spPr>
-          <a:xfrm>
-            <a:off x="6245352" y="1984248"/>
-            <a:ext cx="4425696" cy="1490472"/>
-          </a:xfrm>
-          <a:prstGeom prst="rect">
-            <a:avLst/>
-          </a:prstGeom>
-          <a:noFill/>
-        </p:spPr>
-        <p:txBody>
-          <a:bodyPr wrap="square" lIns="45720" rIns="45720" anchor="t">
-            <a:spAutoFit/>
-          </a:bodyPr>
-          <a:lstStyle/>
-          <a:p>
-            <a:pPr algn="l"/>
-            <a:r>
-              <a:rPr sz="1300" b="0">
-                <a:solidFill>
-                  <a:srgbClr val="53616E"/>
-                </a:solidFill>
-                <a:latin typeface="Aptos"/>
-              </a:rPr>
-              <a:t>Second-order 60-Hz notch with pole radius r=0.985.
-Listen: 02_voice_after_60Hz_notch.wav</a:t>
-            </a:r>
-          </a:p>
-        </p:txBody>
-      </p:sp>
-      <p:sp>
-        <p:nvSpPr>
-          <p:cNvPr id="12" name="Rounded Rectangle 11"/>
-          <p:cNvSpPr/>
-          <p:nvPr/>
-        </p:nvSpPr>
-        <p:spPr>
-          <a:xfrm>
-            <a:off x="1143000" y="4114800"/>
-            <a:ext cx="9829800" cy="1143000"/>
-          </a:xfrm>
-          <a:prstGeom prst="roundRect">
-            <a:avLst/>
-          </a:prstGeom>
-          <a:solidFill>
-            <a:srgbClr val="EDF3F7"/>
-          </a:solidFill>
-          <a:ln w="12700">
-            <a:solidFill>
-              <a:srgbClr val="DCE6EC"/>
-            </a:solidFill>
-          </a:ln>
-        </p:spPr>
-        <p:style>
-          <a:lnRef idx="1">
-            <a:schemeClr val="accent1"/>
-          </a:lnRef>
-          <a:fillRef idx="3">
-            <a:schemeClr val="accent1"/>
-          </a:fillRef>
-          <a:effectRef idx="2">
-            <a:schemeClr val="accent1"/>
-          </a:effectRef>
-          <a:fontRef idx="minor">
-            <a:schemeClr val="lt1"/>
-          </a:fontRef>
-        </p:style>
-        <p:txBody>
-          <a:bodyPr rtlCol="0" anchor="ctr"/>
-          <a:lstStyle/>
-          <a:p>
-            <a:pPr algn="ctr"/>
-            <a:endParaRPr/>
-          </a:p>
-        </p:txBody>
-      </p:sp>
-      <p:sp>
-        <p:nvSpPr>
-          <p:cNvPr id="13" name="TextBox 12"/>
-          <p:cNvSpPr txBox="1"/>
-          <p:nvPr/>
-        </p:nvSpPr>
-        <p:spPr>
-          <a:xfrm>
-            <a:off x="1417320" y="4279392"/>
-            <a:ext cx="9281160" cy="804672"/>
-          </a:xfrm>
-          <a:prstGeom prst="rect">
-            <a:avLst/>
-          </a:prstGeom>
-          <a:noFill/>
-        </p:spPr>
-        <p:txBody>
-          <a:bodyPr wrap="square" lIns="45720" rIns="45720" anchor="ctr">
-            <a:spAutoFit/>
-          </a:bodyPr>
-          <a:lstStyle/>
-          <a:p>
-            <a:pPr algn="ctr"/>
-            <a:r>
-              <a:rPr sz="1600" b="1">
-                <a:solidFill>
-                  <a:srgbClr val="16324F"/>
-                </a:solidFill>
-                <a:latin typeface="Aptos"/>
-              </a:rPr>
-              <a:t>Good observation: a very narrow notch removes the targeted hum component while leaving nearby useful content mostly intact. A broad low-pass filter would solve the hum problem by throwing away far more information.</a:t>
-            </a:r>
-          </a:p>
-        </p:txBody>
-      </p:sp>
-      <p:sp>
-        <p:nvSpPr>
-          <p:cNvPr id="14" name="TextBox 13"/>
           <p:cNvSpPr txBox="1"/>
           <p:nvPr/>
         </p:nvSpPr>
@@ -7568,7 +7199,7 @@
       </p:sp>
       <p:sp>
         <p:nvSpPr>
-          <p:cNvPr id="15" name="TextBox 14"/>
+          <p:cNvPr id="11" name="TextBox 10"/>
           <p:cNvSpPr txBox="1"/>
           <p:nvPr/>
         </p:nvSpPr>
@@ -7596,7 +7227,7 @@
                 </a:solidFill>
                 <a:latin typeface="Aptos"/>
               </a:rPr>
-              <a:t>18</a:t>
+              <a:t>17</a:t>
             </a:r>
           </a:p>
         </p:txBody>
@@ -7656,7 +7287,7 @@
                 </a:solidFill>
                 <a:latin typeface="Aptos"/>
               </a:rPr>
-              <a:t>ML bridge: filter geometry shapes the features a model sees</a:t>
+              <a:t>Audio demo: removing hum without erasing the signal</a:t>
             </a:r>
           </a:p>
         </p:txBody>
@@ -7737,7 +7368,7 @@
                 </a:solidFill>
                 <a:latin typeface="Aptos"/>
               </a:rPr>
-              <a:t>BRIDGE</a:t>
+              <a:t>60–75 MIN</a:t>
             </a:r>
           </a:p>
         </p:txBody>
@@ -7772,7 +7403,7 @@
                 </a:solidFill>
                 <a:latin typeface="Aptos"/>
               </a:rPr>
-              <a:t>Front-end filtering changes spectra, spectrograms, and therefore learned patterns.</a:t>
+              <a:t>The notch should target a narrow frequency, not broadly low-pass the recording.</a:t>
             </a:r>
           </a:p>
         </p:txBody>
@@ -7785,8 +7416,125 @@
         </p:nvSpPr>
         <p:spPr>
           <a:xfrm>
-            <a:off x="822960" y="1417320"/>
-            <a:ext cx="3246120" cy="1691640"/>
+            <a:off x="914400" y="1508760"/>
+            <a:ext cx="4754880" cy="2057400"/>
+          </a:xfrm>
+          <a:prstGeom prst="roundRect">
+            <a:avLst/>
+          </a:prstGeom>
+          <a:solidFill>
+            <a:srgbClr val="FDEDEC"/>
+          </a:solidFill>
+          <a:ln w="12700">
+            <a:solidFill>
+              <a:srgbClr val="D84A3A"/>
+            </a:solidFill>
+          </a:ln>
+        </p:spPr>
+        <p:style>
+          <a:lnRef idx="1">
+            <a:schemeClr val="accent1"/>
+          </a:lnRef>
+          <a:fillRef idx="3">
+            <a:schemeClr val="accent1"/>
+          </a:fillRef>
+          <a:effectRef idx="2">
+            <a:schemeClr val="accent1"/>
+          </a:effectRef>
+          <a:fontRef idx="minor">
+            <a:schemeClr val="lt1"/>
+          </a:fontRef>
+        </p:style>
+        <p:txBody>
+          <a:bodyPr rtlCol="0" anchor="ctr"/>
+          <a:lstStyle/>
+          <a:p>
+            <a:pPr algn="ctr"/>
+            <a:endParaRPr/>
+          </a:p>
+        </p:txBody>
+      </p:sp>
+      <p:sp>
+        <p:nvSpPr>
+          <p:cNvPr id="7" name="TextBox 6"/>
+          <p:cNvSpPr txBox="1"/>
+          <p:nvPr/>
+        </p:nvSpPr>
+        <p:spPr>
+          <a:xfrm>
+            <a:off x="1078992" y="1618488"/>
+            <a:ext cx="4425696" cy="320040"/>
+          </a:xfrm>
+          <a:prstGeom prst="rect">
+            <a:avLst/>
+          </a:prstGeom>
+          <a:noFill/>
+        </p:spPr>
+        <p:txBody>
+          <a:bodyPr wrap="square" lIns="45720" rIns="45720" anchor="ctr">
+            <a:spAutoFit/>
+          </a:bodyPr>
+          <a:lstStyle/>
+          <a:p>
+            <a:pPr algn="l"/>
+            <a:r>
+              <a:rPr sz="1500" b="1">
+                <a:solidFill>
+                  <a:srgbClr val="16324F"/>
+                </a:solidFill>
+                <a:latin typeface="Aptos"/>
+              </a:rPr>
+              <a:t>Before</a:t>
+            </a:r>
+          </a:p>
+        </p:txBody>
+      </p:sp>
+      <p:sp>
+        <p:nvSpPr>
+          <p:cNvPr id="8" name="TextBox 7"/>
+          <p:cNvSpPr txBox="1"/>
+          <p:nvPr/>
+        </p:nvSpPr>
+        <p:spPr>
+          <a:xfrm>
+            <a:off x="1078992" y="1984248"/>
+            <a:ext cx="4425696" cy="1490472"/>
+          </a:xfrm>
+          <a:prstGeom prst="rect">
+            <a:avLst/>
+          </a:prstGeom>
+          <a:noFill/>
+        </p:spPr>
+        <p:txBody>
+          <a:bodyPr wrap="square" lIns="45720" rIns="45720" anchor="t">
+            <a:spAutoFit/>
+          </a:bodyPr>
+          <a:lstStyle/>
+          <a:p>
+            <a:pPr algn="l"/>
+            <a:r>
+              <a:rPr sz="1300" b="0">
+                <a:solidFill>
+                  <a:srgbClr val="53616E"/>
+                </a:solidFill>
+                <a:latin typeface="Aptos"/>
+              </a:rPr>
+              <a:t>Synthetic voice-like harmonics + 60 Hz and 120 Hz hum.
+Listen: 01_voice_with_60Hz_hum.wav</a:t>
+            </a:r>
+          </a:p>
+        </p:txBody>
+      </p:sp>
+      <p:sp>
+        <p:nvSpPr>
+          <p:cNvPr id="9" name="Rounded Rectangle 8"/>
+          <p:cNvSpPr/>
+          <p:nvPr/>
+        </p:nvSpPr>
+        <p:spPr>
+          <a:xfrm>
+            <a:off x="6080760" y="1508760"/>
+            <a:ext cx="4754880" cy="2057400"/>
           </a:xfrm>
           <a:prstGeom prst="roundRect">
             <a:avLst/>
@@ -7825,14 +7573,14 @@
       </p:sp>
       <p:sp>
         <p:nvSpPr>
-          <p:cNvPr id="7" name="TextBox 6"/>
-          <p:cNvSpPr txBox="1"/>
-          <p:nvPr/>
-        </p:nvSpPr>
-        <p:spPr>
-          <a:xfrm>
-            <a:off x="987552" y="1527048"/>
-            <a:ext cx="2916936" cy="320040"/>
+          <p:cNvPr id="10" name="TextBox 9"/>
+          <p:cNvSpPr txBox="1"/>
+          <p:nvPr/>
+        </p:nvSpPr>
+        <p:spPr>
+          <a:xfrm>
+            <a:off x="6245352" y="1618488"/>
+            <a:ext cx="4425696" cy="320040"/>
           </a:xfrm>
           <a:prstGeom prst="rect">
             <a:avLst/>
@@ -7853,21 +7601,21 @@
                 </a:solidFill>
                 <a:latin typeface="Aptos"/>
               </a:rPr>
-              <a:t>Notch zeros</a:t>
-            </a:r>
-          </a:p>
-        </p:txBody>
-      </p:sp>
-      <p:sp>
-        <p:nvSpPr>
-          <p:cNvPr id="8" name="TextBox 7"/>
-          <p:cNvSpPr txBox="1"/>
-          <p:nvPr/>
-        </p:nvSpPr>
-        <p:spPr>
-          <a:xfrm>
-            <a:off x="987552" y="1892808"/>
-            <a:ext cx="2916936" cy="1124712"/>
+              <a:t>After</a:t>
+            </a:r>
+          </a:p>
+        </p:txBody>
+      </p:sp>
+      <p:sp>
+        <p:nvSpPr>
+          <p:cNvPr id="11" name="TextBox 10"/>
+          <p:cNvSpPr txBox="1"/>
+          <p:nvPr/>
+        </p:nvSpPr>
+        <p:spPr>
+          <a:xfrm>
+            <a:off x="6245352" y="1984248"/>
+            <a:ext cx="4425696" cy="1490472"/>
           </a:xfrm>
           <a:prstGeom prst="rect">
             <a:avLst/>
@@ -7888,123 +7636,8 @@
                 </a:solidFill>
                 <a:latin typeface="Aptos"/>
               </a:rPr>
-              <a:t>Remove a nuisance line such as power hum before spectral feature extraction.</a:t>
-            </a:r>
-          </a:p>
-        </p:txBody>
-      </p:sp>
-      <p:sp>
-        <p:nvSpPr>
-          <p:cNvPr id="9" name="Rounded Rectangle 8"/>
-          <p:cNvSpPr/>
-          <p:nvPr/>
-        </p:nvSpPr>
-        <p:spPr>
-          <a:xfrm>
-            <a:off x="4480560" y="1417320"/>
-            <a:ext cx="3246120" cy="1691640"/>
-          </a:xfrm>
-          <a:prstGeom prst="roundRect">
-            <a:avLst/>
-          </a:prstGeom>
-          <a:solidFill>
-            <a:srgbClr val="FFF2E6"/>
-          </a:solidFill>
-          <a:ln w="12700">
-            <a:solidFill>
-              <a:srgbClr val="F28E2B"/>
-            </a:solidFill>
-          </a:ln>
-        </p:spPr>
-        <p:style>
-          <a:lnRef idx="1">
-            <a:schemeClr val="accent1"/>
-          </a:lnRef>
-          <a:fillRef idx="3">
-            <a:schemeClr val="accent1"/>
-          </a:fillRef>
-          <a:effectRef idx="2">
-            <a:schemeClr val="accent1"/>
-          </a:effectRef>
-          <a:fontRef idx="minor">
-            <a:schemeClr val="lt1"/>
-          </a:fontRef>
-        </p:style>
-        <p:txBody>
-          <a:bodyPr rtlCol="0" anchor="ctr"/>
-          <a:lstStyle/>
-          <a:p>
-            <a:pPr algn="ctr"/>
-            <a:endParaRPr/>
-          </a:p>
-        </p:txBody>
-      </p:sp>
-      <p:sp>
-        <p:nvSpPr>
-          <p:cNvPr id="10" name="TextBox 9"/>
-          <p:cNvSpPr txBox="1"/>
-          <p:nvPr/>
-        </p:nvSpPr>
-        <p:spPr>
-          <a:xfrm>
-            <a:off x="4645152" y="1527048"/>
-            <a:ext cx="2916936" cy="320040"/>
-          </a:xfrm>
-          <a:prstGeom prst="rect">
-            <a:avLst/>
-          </a:prstGeom>
-          <a:noFill/>
-        </p:spPr>
-        <p:txBody>
-          <a:bodyPr wrap="square" lIns="45720" rIns="45720" anchor="ctr">
-            <a:spAutoFit/>
-          </a:bodyPr>
-          <a:lstStyle/>
-          <a:p>
-            <a:pPr algn="l"/>
-            <a:r>
-              <a:rPr sz="1500" b="1">
-                <a:solidFill>
-                  <a:srgbClr val="16324F"/>
-                </a:solidFill>
-                <a:latin typeface="Aptos"/>
-              </a:rPr>
-              <a:t>Resonant poles</a:t>
-            </a:r>
-          </a:p>
-        </p:txBody>
-      </p:sp>
-      <p:sp>
-        <p:nvSpPr>
-          <p:cNvPr id="11" name="TextBox 10"/>
-          <p:cNvSpPr txBox="1"/>
-          <p:nvPr/>
-        </p:nvSpPr>
-        <p:spPr>
-          <a:xfrm>
-            <a:off x="4645152" y="1892808"/>
-            <a:ext cx="2916936" cy="1124712"/>
-          </a:xfrm>
-          <a:prstGeom prst="rect">
-            <a:avLst/>
-          </a:prstGeom>
-          <a:noFill/>
-        </p:spPr>
-        <p:txBody>
-          <a:bodyPr wrap="square" lIns="45720" rIns="45720" anchor="t">
-            <a:spAutoFit/>
-          </a:bodyPr>
-          <a:lstStyle/>
-          <a:p>
-            <a:pPr algn="l"/>
-            <a:r>
-              <a:rPr sz="1300" b="0">
-                <a:solidFill>
-                  <a:srgbClr val="53616E"/>
-                </a:solidFill>
-                <a:latin typeface="Aptos"/>
-              </a:rPr>
-              <a:t>Can emphasize a narrow band—useful or dangerous depending on the task.</a:t>
+              <a:t>Second-order 60-Hz notch with pole radius r=0.985.
+Listen: 02_voice_after_60Hz_notch.wav</a:t>
             </a:r>
           </a:p>
         </p:txBody>
@@ -8017,130 +7650,14 @@
         </p:nvSpPr>
         <p:spPr>
           <a:xfrm>
-            <a:off x="8138160" y="1417320"/>
-            <a:ext cx="3246120" cy="1691640"/>
+            <a:off x="1143000" y="4114800"/>
+            <a:ext cx="9829800" cy="1143000"/>
           </a:xfrm>
           <a:prstGeom prst="roundRect">
             <a:avLst/>
           </a:prstGeom>
           <a:solidFill>
-            <a:srgbClr val="FDEDEC"/>
-          </a:solidFill>
-          <a:ln w="12700">
-            <a:solidFill>
-              <a:srgbClr val="D84A3A"/>
-            </a:solidFill>
-          </a:ln>
-        </p:spPr>
-        <p:style>
-          <a:lnRef idx="1">
-            <a:schemeClr val="accent1"/>
-          </a:lnRef>
-          <a:fillRef idx="3">
-            <a:schemeClr val="accent1"/>
-          </a:fillRef>
-          <a:effectRef idx="2">
-            <a:schemeClr val="accent1"/>
-          </a:effectRef>
-          <a:fontRef idx="minor">
-            <a:schemeClr val="lt1"/>
-          </a:fontRef>
-        </p:style>
-        <p:txBody>
-          <a:bodyPr rtlCol="0" anchor="ctr"/>
-          <a:lstStyle/>
-          <a:p>
-            <a:pPr algn="ctr"/>
-            <a:endParaRPr/>
-          </a:p>
-        </p:txBody>
-      </p:sp>
-      <p:sp>
-        <p:nvSpPr>
-          <p:cNvPr id="13" name="TextBox 12"/>
-          <p:cNvSpPr txBox="1"/>
-          <p:nvPr/>
-        </p:nvSpPr>
-        <p:spPr>
-          <a:xfrm>
-            <a:off x="8302752" y="1527048"/>
-            <a:ext cx="2916936" cy="320040"/>
-          </a:xfrm>
-          <a:prstGeom prst="rect">
-            <a:avLst/>
-          </a:prstGeom>
-          <a:noFill/>
-        </p:spPr>
-        <p:txBody>
-          <a:bodyPr wrap="square" lIns="45720" rIns="45720" anchor="ctr">
-            <a:spAutoFit/>
-          </a:bodyPr>
-          <a:lstStyle/>
-          <a:p>
-            <a:pPr algn="l"/>
-            <a:r>
-              <a:rPr sz="1500" b="1">
-                <a:solidFill>
-                  <a:srgbClr val="16324F"/>
-                </a:solidFill>
-                <a:latin typeface="Aptos"/>
-              </a:rPr>
-              <a:t>Stability</a:t>
-            </a:r>
-          </a:p>
-        </p:txBody>
-      </p:sp>
-      <p:sp>
-        <p:nvSpPr>
-          <p:cNvPr id="14" name="TextBox 13"/>
-          <p:cNvSpPr txBox="1"/>
-          <p:nvPr/>
-        </p:nvSpPr>
-        <p:spPr>
-          <a:xfrm>
-            <a:off x="8302752" y="1892808"/>
-            <a:ext cx="2916936" cy="1124712"/>
-          </a:xfrm>
-          <a:prstGeom prst="rect">
-            <a:avLst/>
-          </a:prstGeom>
-          <a:noFill/>
-        </p:spPr>
-        <p:txBody>
-          <a:bodyPr wrap="square" lIns="45720" rIns="45720" anchor="t">
-            <a:spAutoFit/>
-          </a:bodyPr>
-          <a:lstStyle/>
-          <a:p>
-            <a:pPr algn="l"/>
-            <a:r>
-              <a:rPr sz="1300" b="0">
-                <a:solidFill>
-                  <a:srgbClr val="53616E"/>
-                </a:solidFill>
-                <a:latin typeface="Aptos"/>
-              </a:rPr>
-              <a:t>A numerically exploding front end corrupts every downstream feature and gradient.</a:t>
-            </a:r>
-          </a:p>
-        </p:txBody>
-      </p:sp>
-      <p:sp>
-        <p:nvSpPr>
-          <p:cNvPr id="15" name="Rounded Rectangle 14"/>
-          <p:cNvSpPr/>
-          <p:nvPr/>
-        </p:nvSpPr>
-        <p:spPr>
-          <a:xfrm>
-            <a:off x="1005840" y="3840480"/>
-            <a:ext cx="10149840" cy="1325880"/>
-          </a:xfrm>
-          <a:prstGeom prst="roundRect">
-            <a:avLst/>
-          </a:prstGeom>
-          <a:solidFill>
-            <a:srgbClr val="FFFFFF"/>
+            <a:srgbClr val="EDF3F7"/>
           </a:solidFill>
           <a:ln w="12700">
             <a:solidFill>
@@ -8173,42 +7690,42 @@
       </p:sp>
       <p:sp>
         <p:nvSpPr>
-          <p:cNvPr id="16" name="TextBox 15"/>
-          <p:cNvSpPr txBox="1"/>
-          <p:nvPr/>
-        </p:nvSpPr>
-        <p:spPr>
-          <a:xfrm>
-            <a:off x="1325880" y="4114800"/>
-            <a:ext cx="9509760" cy="731520"/>
-          </a:xfrm>
-          <a:prstGeom prst="rect">
-            <a:avLst/>
-          </a:prstGeom>
-          <a:noFill/>
-        </p:spPr>
-        <p:txBody>
-          <a:bodyPr wrap="square" lIns="45720" rIns="45720" anchor="ctr">
-            <a:spAutoFit/>
-          </a:bodyPr>
-          <a:lstStyle/>
-          <a:p>
-            <a:pPr algn="ctr"/>
-            <a:r>
-              <a:rPr sz="1900" b="1">
+          <p:cNvPr id="13" name="TextBox 12"/>
+          <p:cNvSpPr txBox="1"/>
+          <p:nvPr/>
+        </p:nvSpPr>
+        <p:spPr>
+          <a:xfrm>
+            <a:off x="1417320" y="4279392"/>
+            <a:ext cx="9281160" cy="804672"/>
+          </a:xfrm>
+          <a:prstGeom prst="rect">
+            <a:avLst/>
+          </a:prstGeom>
+          <a:noFill/>
+        </p:spPr>
+        <p:txBody>
+          <a:bodyPr wrap="square" lIns="45720" rIns="45720" anchor="ctr">
+            <a:spAutoFit/>
+          </a:bodyPr>
+          <a:lstStyle/>
+          <a:p>
+            <a:pPr algn="ctr"/>
+            <a:r>
+              <a:rPr sz="1600" b="1">
                 <a:solidFill>
                   <a:srgbClr val="16324F"/>
                 </a:solidFill>
                 <a:latin typeface="Aptos"/>
               </a:rPr>
-              <a:t>Design question for ML: are you removing a known nuisance, imposing a useful inductive bias, or accidentally deleting information that the classifier needs?</a:t>
-            </a:r>
-          </a:p>
-        </p:txBody>
-      </p:sp>
-      <p:sp>
-        <p:nvSpPr>
-          <p:cNvPr id="17" name="TextBox 16"/>
+              <a:t>Good observation: a very narrow notch removes the targeted hum component while leaving nearby useful content mostly intact. A broad low-pass filter would solve the hum problem by throwing away far more information.</a:t>
+            </a:r>
+          </a:p>
+        </p:txBody>
+      </p:sp>
+      <p:sp>
+        <p:nvSpPr>
+          <p:cNvPr id="14" name="TextBox 13"/>
           <p:cNvSpPr txBox="1"/>
           <p:nvPr/>
         </p:nvSpPr>
@@ -8243,7 +7760,7 @@
       </p:sp>
       <p:sp>
         <p:nvSpPr>
-          <p:cNvPr id="18" name="TextBox 17"/>
+          <p:cNvPr id="15" name="TextBox 14"/>
           <p:cNvSpPr txBox="1"/>
           <p:nvPr/>
         </p:nvSpPr>
@@ -8271,7 +7788,7 @@
                 </a:solidFill>
                 <a:latin typeface="Aptos"/>
               </a:rPr>
-              <a:t>19</a:t>
+              <a:t>18</a:t>
             </a:r>
           </a:p>
         </p:txBody>
@@ -8331,7 +7848,7 @@
                 </a:solidFill>
                 <a:latin typeface="Aptos"/>
               </a:rPr>
-              <a:t>Concept check</a:t>
+              <a:t>ML bridge: filter geometry shapes the features a model sees</a:t>
             </a:r>
           </a:p>
         </p:txBody>
@@ -8412,7 +7929,7 @@
                 </a:solidFill>
                 <a:latin typeface="Aptos"/>
               </a:rPr>
-              <a:t>CHECK</a:t>
+              <a:t>BRIDGE</a:t>
             </a:r>
           </a:p>
         </p:txBody>
@@ -8447,56 +7964,369 @@
                 </a:solidFill>
                 <a:latin typeface="Aptos"/>
               </a:rPr>
-              <a:t>Reason geometrically—no full algebra is needed.</a:t>
-            </a:r>
-          </a:p>
-        </p:txBody>
-      </p:sp>
-      <p:sp>
-        <p:nvSpPr>
-          <p:cNvPr id="6" name="TextBox 5"/>
-          <p:cNvSpPr txBox="1"/>
-          <p:nvPr/>
-        </p:nvSpPr>
-        <p:spPr>
-          <a:xfrm>
-            <a:off x="914400" y="1280160"/>
-            <a:ext cx="10241280" cy="731520"/>
-          </a:xfrm>
-          <a:prstGeom prst="rect">
-            <a:avLst/>
-          </a:prstGeom>
-          <a:noFill/>
-        </p:spPr>
-        <p:txBody>
-          <a:bodyPr wrap="square" lIns="45720" rIns="45720" anchor="ctr">
-            <a:spAutoFit/>
-          </a:bodyPr>
-          <a:lstStyle/>
-          <a:p>
-            <a:pPr algn="ctr"/>
-            <a:r>
-              <a:rPr sz="2100" b="1">
+              <a:t>Front-end filtering changes spectra, spectrograms, and therefore learned patterns.</a:t>
+            </a:r>
+          </a:p>
+        </p:txBody>
+      </p:sp>
+      <p:sp>
+        <p:nvSpPr>
+          <p:cNvPr id="6" name="Rounded Rectangle 5"/>
+          <p:cNvSpPr/>
+          <p:nvPr/>
+        </p:nvSpPr>
+        <p:spPr>
+          <a:xfrm>
+            <a:off x="822960" y="1417320"/>
+            <a:ext cx="3246120" cy="1691640"/>
+          </a:xfrm>
+          <a:prstGeom prst="roundRect">
+            <a:avLst/>
+          </a:prstGeom>
+          <a:solidFill>
+            <a:srgbClr val="E8F7F7"/>
+          </a:solidFill>
+          <a:ln w="12700">
+            <a:solidFill>
+              <a:srgbClr val="00A6A6"/>
+            </a:solidFill>
+          </a:ln>
+        </p:spPr>
+        <p:style>
+          <a:lnRef idx="1">
+            <a:schemeClr val="accent1"/>
+          </a:lnRef>
+          <a:fillRef idx="3">
+            <a:schemeClr val="accent1"/>
+          </a:fillRef>
+          <a:effectRef idx="2">
+            <a:schemeClr val="accent1"/>
+          </a:effectRef>
+          <a:fontRef idx="minor">
+            <a:schemeClr val="lt1"/>
+          </a:fontRef>
+        </p:style>
+        <p:txBody>
+          <a:bodyPr rtlCol="0" anchor="ctr"/>
+          <a:lstStyle/>
+          <a:p>
+            <a:pPr algn="ctr"/>
+            <a:endParaRPr/>
+          </a:p>
+        </p:txBody>
+      </p:sp>
+      <p:sp>
+        <p:nvSpPr>
+          <p:cNvPr id="7" name="TextBox 6"/>
+          <p:cNvSpPr txBox="1"/>
+          <p:nvPr/>
+        </p:nvSpPr>
+        <p:spPr>
+          <a:xfrm>
+            <a:off x="987552" y="1527048"/>
+            <a:ext cx="2916936" cy="320040"/>
+          </a:xfrm>
+          <a:prstGeom prst="rect">
+            <a:avLst/>
+          </a:prstGeom>
+          <a:noFill/>
+        </p:spPr>
+        <p:txBody>
+          <a:bodyPr wrap="square" lIns="45720" rIns="45720" anchor="ctr">
+            <a:spAutoFit/>
+          </a:bodyPr>
+          <a:lstStyle/>
+          <a:p>
+            <a:pPr algn="l"/>
+            <a:r>
+              <a:rPr sz="1500" b="1">
                 <a:solidFill>
                   <a:srgbClr val="16324F"/>
                 </a:solidFill>
                 <a:latin typeface="Aptos"/>
               </a:rPr>
-              <a:t>A conjugate pole pair is moved from radius 0.7 to radius 0.97 at the same angle. What changes?</a:t>
-            </a:r>
-          </a:p>
-        </p:txBody>
-      </p:sp>
-      <p:sp>
-        <p:nvSpPr>
-          <p:cNvPr id="7" name="Rounded Rectangle 6"/>
+              <a:t>Notch zeros</a:t>
+            </a:r>
+          </a:p>
+        </p:txBody>
+      </p:sp>
+      <p:sp>
+        <p:nvSpPr>
+          <p:cNvPr id="8" name="TextBox 7"/>
+          <p:cNvSpPr txBox="1"/>
+          <p:nvPr/>
+        </p:nvSpPr>
+        <p:spPr>
+          <a:xfrm>
+            <a:off x="987552" y="1892808"/>
+            <a:ext cx="2916936" cy="1124712"/>
+          </a:xfrm>
+          <a:prstGeom prst="rect">
+            <a:avLst/>
+          </a:prstGeom>
+          <a:noFill/>
+        </p:spPr>
+        <p:txBody>
+          <a:bodyPr wrap="square" lIns="45720" rIns="45720" anchor="t">
+            <a:spAutoFit/>
+          </a:bodyPr>
+          <a:lstStyle/>
+          <a:p>
+            <a:pPr algn="l"/>
+            <a:r>
+              <a:rPr sz="1300" b="0">
+                <a:solidFill>
+                  <a:srgbClr val="53616E"/>
+                </a:solidFill>
+                <a:latin typeface="Aptos"/>
+              </a:rPr>
+              <a:t>Remove a nuisance line such as power hum before spectral feature extraction.</a:t>
+            </a:r>
+          </a:p>
+        </p:txBody>
+      </p:sp>
+      <p:sp>
+        <p:nvSpPr>
+          <p:cNvPr id="9" name="Rounded Rectangle 8"/>
           <p:cNvSpPr/>
           <p:nvPr/>
         </p:nvSpPr>
         <p:spPr>
           <a:xfrm>
-            <a:off x="914400" y="2423160"/>
-            <a:ext cx="4937760" cy="932688"/>
+            <a:off x="4480560" y="1417320"/>
+            <a:ext cx="3246120" cy="1691640"/>
+          </a:xfrm>
+          <a:prstGeom prst="roundRect">
+            <a:avLst/>
+          </a:prstGeom>
+          <a:solidFill>
+            <a:srgbClr val="FFF2E6"/>
+          </a:solidFill>
+          <a:ln w="12700">
+            <a:solidFill>
+              <a:srgbClr val="F28E2B"/>
+            </a:solidFill>
+          </a:ln>
+        </p:spPr>
+        <p:style>
+          <a:lnRef idx="1">
+            <a:schemeClr val="accent1"/>
+          </a:lnRef>
+          <a:fillRef idx="3">
+            <a:schemeClr val="accent1"/>
+          </a:fillRef>
+          <a:effectRef idx="2">
+            <a:schemeClr val="accent1"/>
+          </a:effectRef>
+          <a:fontRef idx="minor">
+            <a:schemeClr val="lt1"/>
+          </a:fontRef>
+        </p:style>
+        <p:txBody>
+          <a:bodyPr rtlCol="0" anchor="ctr"/>
+          <a:lstStyle/>
+          <a:p>
+            <a:pPr algn="ctr"/>
+            <a:endParaRPr/>
+          </a:p>
+        </p:txBody>
+      </p:sp>
+      <p:sp>
+        <p:nvSpPr>
+          <p:cNvPr id="10" name="TextBox 9"/>
+          <p:cNvSpPr txBox="1"/>
+          <p:nvPr/>
+        </p:nvSpPr>
+        <p:spPr>
+          <a:xfrm>
+            <a:off x="4645152" y="1527048"/>
+            <a:ext cx="2916936" cy="320040"/>
+          </a:xfrm>
+          <a:prstGeom prst="rect">
+            <a:avLst/>
+          </a:prstGeom>
+          <a:noFill/>
+        </p:spPr>
+        <p:txBody>
+          <a:bodyPr wrap="square" lIns="45720" rIns="45720" anchor="ctr">
+            <a:spAutoFit/>
+          </a:bodyPr>
+          <a:lstStyle/>
+          <a:p>
+            <a:pPr algn="l"/>
+            <a:r>
+              <a:rPr sz="1500" b="1">
+                <a:solidFill>
+                  <a:srgbClr val="16324F"/>
+                </a:solidFill>
+                <a:latin typeface="Aptos"/>
+              </a:rPr>
+              <a:t>Resonant poles</a:t>
+            </a:r>
+          </a:p>
+        </p:txBody>
+      </p:sp>
+      <p:sp>
+        <p:nvSpPr>
+          <p:cNvPr id="11" name="TextBox 10"/>
+          <p:cNvSpPr txBox="1"/>
+          <p:nvPr/>
+        </p:nvSpPr>
+        <p:spPr>
+          <a:xfrm>
+            <a:off x="4645152" y="1892808"/>
+            <a:ext cx="2916936" cy="1124712"/>
+          </a:xfrm>
+          <a:prstGeom prst="rect">
+            <a:avLst/>
+          </a:prstGeom>
+          <a:noFill/>
+        </p:spPr>
+        <p:txBody>
+          <a:bodyPr wrap="square" lIns="45720" rIns="45720" anchor="t">
+            <a:spAutoFit/>
+          </a:bodyPr>
+          <a:lstStyle/>
+          <a:p>
+            <a:pPr algn="l"/>
+            <a:r>
+              <a:rPr sz="1300" b="0">
+                <a:solidFill>
+                  <a:srgbClr val="53616E"/>
+                </a:solidFill>
+                <a:latin typeface="Aptos"/>
+              </a:rPr>
+              <a:t>Can emphasize a narrow band—useful or dangerous depending on the task.</a:t>
+            </a:r>
+          </a:p>
+        </p:txBody>
+      </p:sp>
+      <p:sp>
+        <p:nvSpPr>
+          <p:cNvPr id="12" name="Rounded Rectangle 11"/>
+          <p:cNvSpPr/>
+          <p:nvPr/>
+        </p:nvSpPr>
+        <p:spPr>
+          <a:xfrm>
+            <a:off x="8138160" y="1417320"/>
+            <a:ext cx="3246120" cy="1691640"/>
+          </a:xfrm>
+          <a:prstGeom prst="roundRect">
+            <a:avLst/>
+          </a:prstGeom>
+          <a:solidFill>
+            <a:srgbClr val="FDEDEC"/>
+          </a:solidFill>
+          <a:ln w="12700">
+            <a:solidFill>
+              <a:srgbClr val="D84A3A"/>
+            </a:solidFill>
+          </a:ln>
+        </p:spPr>
+        <p:style>
+          <a:lnRef idx="1">
+            <a:schemeClr val="accent1"/>
+          </a:lnRef>
+          <a:fillRef idx="3">
+            <a:schemeClr val="accent1"/>
+          </a:fillRef>
+          <a:effectRef idx="2">
+            <a:schemeClr val="accent1"/>
+          </a:effectRef>
+          <a:fontRef idx="minor">
+            <a:schemeClr val="lt1"/>
+          </a:fontRef>
+        </p:style>
+        <p:txBody>
+          <a:bodyPr rtlCol="0" anchor="ctr"/>
+          <a:lstStyle/>
+          <a:p>
+            <a:pPr algn="ctr"/>
+            <a:endParaRPr/>
+          </a:p>
+        </p:txBody>
+      </p:sp>
+      <p:sp>
+        <p:nvSpPr>
+          <p:cNvPr id="13" name="TextBox 12"/>
+          <p:cNvSpPr txBox="1"/>
+          <p:nvPr/>
+        </p:nvSpPr>
+        <p:spPr>
+          <a:xfrm>
+            <a:off x="8302752" y="1527048"/>
+            <a:ext cx="2916936" cy="320040"/>
+          </a:xfrm>
+          <a:prstGeom prst="rect">
+            <a:avLst/>
+          </a:prstGeom>
+          <a:noFill/>
+        </p:spPr>
+        <p:txBody>
+          <a:bodyPr wrap="square" lIns="45720" rIns="45720" anchor="ctr">
+            <a:spAutoFit/>
+          </a:bodyPr>
+          <a:lstStyle/>
+          <a:p>
+            <a:pPr algn="l"/>
+            <a:r>
+              <a:rPr sz="1500" b="1">
+                <a:solidFill>
+                  <a:srgbClr val="16324F"/>
+                </a:solidFill>
+                <a:latin typeface="Aptos"/>
+              </a:rPr>
+              <a:t>Stability</a:t>
+            </a:r>
+          </a:p>
+        </p:txBody>
+      </p:sp>
+      <p:sp>
+        <p:nvSpPr>
+          <p:cNvPr id="14" name="TextBox 13"/>
+          <p:cNvSpPr txBox="1"/>
+          <p:nvPr/>
+        </p:nvSpPr>
+        <p:spPr>
+          <a:xfrm>
+            <a:off x="8302752" y="1892808"/>
+            <a:ext cx="2916936" cy="1124712"/>
+          </a:xfrm>
+          <a:prstGeom prst="rect">
+            <a:avLst/>
+          </a:prstGeom>
+          <a:noFill/>
+        </p:spPr>
+        <p:txBody>
+          <a:bodyPr wrap="square" lIns="45720" rIns="45720" anchor="t">
+            <a:spAutoFit/>
+          </a:bodyPr>
+          <a:lstStyle/>
+          <a:p>
+            <a:pPr algn="l"/>
+            <a:r>
+              <a:rPr sz="1300" b="0">
+                <a:solidFill>
+                  <a:srgbClr val="53616E"/>
+                </a:solidFill>
+                <a:latin typeface="Aptos"/>
+              </a:rPr>
+              <a:t>A numerically exploding front end corrupts every downstream feature and gradient.</a:t>
+            </a:r>
+          </a:p>
+        </p:txBody>
+      </p:sp>
+      <p:sp>
+        <p:nvSpPr>
+          <p:cNvPr id="15" name="Rounded Rectangle 14"/>
+          <p:cNvSpPr/>
+          <p:nvPr/>
+        </p:nvSpPr>
+        <p:spPr>
+          <a:xfrm>
+            <a:off x="1005840" y="3840480"/>
+            <a:ext cx="10149840" cy="1325880"/>
           </a:xfrm>
           <a:prstGeom prst="roundRect">
             <a:avLst/>
@@ -8535,425 +8365,42 @@
       </p:sp>
       <p:sp>
         <p:nvSpPr>
-          <p:cNvPr id="8" name="TextBox 7"/>
-          <p:cNvSpPr txBox="1"/>
-          <p:nvPr/>
-        </p:nvSpPr>
-        <p:spPr>
-          <a:xfrm>
-            <a:off x="1097280" y="2606040"/>
-            <a:ext cx="502920" cy="457200"/>
-          </a:xfrm>
-          <a:prstGeom prst="rect">
-            <a:avLst/>
-          </a:prstGeom>
-          <a:noFill/>
-        </p:spPr>
-        <p:txBody>
-          <a:bodyPr wrap="square" lIns="45720" rIns="45720" anchor="ctr">
-            <a:spAutoFit/>
-          </a:bodyPr>
-          <a:lstStyle/>
-          <a:p>
-            <a:pPr algn="ctr"/>
-            <a:r>
-              <a:rPr sz="1600" b="1">
-                <a:solidFill>
-                  <a:srgbClr val="00A6A6"/>
-                </a:solidFill>
-                <a:latin typeface="Aptos"/>
-              </a:rPr>
-              <a:t>A</a:t>
-            </a:r>
-          </a:p>
-        </p:txBody>
-      </p:sp>
-      <p:sp>
-        <p:nvSpPr>
-          <p:cNvPr id="9" name="TextBox 8"/>
-          <p:cNvSpPr txBox="1"/>
-          <p:nvPr/>
-        </p:nvSpPr>
-        <p:spPr>
-          <a:xfrm>
-            <a:off x="1691640" y="2569464"/>
-            <a:ext cx="3886200" cy="566928"/>
-          </a:xfrm>
-          <a:prstGeom prst="rect">
-            <a:avLst/>
-          </a:prstGeom>
-          <a:noFill/>
-        </p:spPr>
-        <p:txBody>
-          <a:bodyPr wrap="square" lIns="45720" rIns="45720" anchor="ctr">
-            <a:spAutoFit/>
-          </a:bodyPr>
-          <a:lstStyle/>
-          <a:p>
-            <a:pPr algn="l"/>
-            <a:r>
-              <a:rPr sz="1600" b="1">
-                <a:solidFill>
-                  <a:srgbClr val="17212B"/>
-                </a:solidFill>
-                <a:latin typeface="Aptos"/>
-              </a:rPr>
-              <a:t>Resonant frequency moves drastically.</a:t>
-            </a:r>
-          </a:p>
-        </p:txBody>
-      </p:sp>
-      <p:sp>
-        <p:nvSpPr>
-          <p:cNvPr id="10" name="Rounded Rectangle 9"/>
-          <p:cNvSpPr/>
-          <p:nvPr/>
-        </p:nvSpPr>
-        <p:spPr>
-          <a:xfrm>
-            <a:off x="6309360" y="2423160"/>
-            <a:ext cx="4937760" cy="932688"/>
-          </a:xfrm>
-          <a:prstGeom prst="roundRect">
-            <a:avLst/>
-          </a:prstGeom>
-          <a:solidFill>
-            <a:srgbClr val="FFFFFF"/>
-          </a:solidFill>
-          <a:ln w="12700">
-            <a:solidFill>
-              <a:srgbClr val="DCE6EC"/>
-            </a:solidFill>
-          </a:ln>
-        </p:spPr>
-        <p:style>
-          <a:lnRef idx="1">
-            <a:schemeClr val="accent1"/>
-          </a:lnRef>
-          <a:fillRef idx="3">
-            <a:schemeClr val="accent1"/>
-          </a:fillRef>
-          <a:effectRef idx="2">
-            <a:schemeClr val="accent1"/>
-          </a:effectRef>
-          <a:fontRef idx="minor">
-            <a:schemeClr val="lt1"/>
-          </a:fontRef>
-        </p:style>
-        <p:txBody>
-          <a:bodyPr rtlCol="0" anchor="ctr"/>
-          <a:lstStyle/>
-          <a:p>
-            <a:pPr algn="ctr"/>
-            <a:endParaRPr/>
-          </a:p>
-        </p:txBody>
-      </p:sp>
-      <p:sp>
-        <p:nvSpPr>
-          <p:cNvPr id="11" name="TextBox 10"/>
-          <p:cNvSpPr txBox="1"/>
-          <p:nvPr/>
-        </p:nvSpPr>
-        <p:spPr>
-          <a:xfrm>
-            <a:off x="6492240" y="2606040"/>
-            <a:ext cx="502920" cy="457200"/>
-          </a:xfrm>
-          <a:prstGeom prst="rect">
-            <a:avLst/>
-          </a:prstGeom>
-          <a:noFill/>
-        </p:spPr>
-        <p:txBody>
-          <a:bodyPr wrap="square" lIns="45720" rIns="45720" anchor="ctr">
-            <a:spAutoFit/>
-          </a:bodyPr>
-          <a:lstStyle/>
-          <a:p>
-            <a:pPr algn="ctr"/>
-            <a:r>
-              <a:rPr sz="1600" b="1">
-                <a:solidFill>
-                  <a:srgbClr val="00A6A6"/>
-                </a:solidFill>
-                <a:latin typeface="Aptos"/>
-              </a:rPr>
-              <a:t>B</a:t>
-            </a:r>
-          </a:p>
-        </p:txBody>
-      </p:sp>
-      <p:sp>
-        <p:nvSpPr>
-          <p:cNvPr id="12" name="TextBox 11"/>
-          <p:cNvSpPr txBox="1"/>
-          <p:nvPr/>
-        </p:nvSpPr>
-        <p:spPr>
-          <a:xfrm>
-            <a:off x="7086600" y="2569464"/>
-            <a:ext cx="3886200" cy="566928"/>
-          </a:xfrm>
-          <a:prstGeom prst="rect">
-            <a:avLst/>
-          </a:prstGeom>
-          <a:noFill/>
-        </p:spPr>
-        <p:txBody>
-          <a:bodyPr wrap="square" lIns="45720" rIns="45720" anchor="ctr">
-            <a:spAutoFit/>
-          </a:bodyPr>
-          <a:lstStyle/>
-          <a:p>
-            <a:pPr algn="l"/>
-            <a:r>
-              <a:rPr sz="1600" b="1">
-                <a:solidFill>
-                  <a:srgbClr val="17212B"/>
-                </a:solidFill>
-                <a:latin typeface="Aptos"/>
-              </a:rPr>
-              <a:t>Peak becomes sharper; ringing lasts longer.</a:t>
-            </a:r>
-          </a:p>
-        </p:txBody>
-      </p:sp>
-      <p:sp>
-        <p:nvSpPr>
-          <p:cNvPr id="13" name="Rounded Rectangle 12"/>
-          <p:cNvSpPr/>
-          <p:nvPr/>
-        </p:nvSpPr>
-        <p:spPr>
-          <a:xfrm>
-            <a:off x="914400" y="3657600"/>
-            <a:ext cx="4937760" cy="932688"/>
-          </a:xfrm>
-          <a:prstGeom prst="roundRect">
-            <a:avLst/>
-          </a:prstGeom>
-          <a:solidFill>
-            <a:srgbClr val="FFFFFF"/>
-          </a:solidFill>
-          <a:ln w="12700">
-            <a:solidFill>
-              <a:srgbClr val="DCE6EC"/>
-            </a:solidFill>
-          </a:ln>
-        </p:spPr>
-        <p:style>
-          <a:lnRef idx="1">
-            <a:schemeClr val="accent1"/>
-          </a:lnRef>
-          <a:fillRef idx="3">
-            <a:schemeClr val="accent1"/>
-          </a:fillRef>
-          <a:effectRef idx="2">
-            <a:schemeClr val="accent1"/>
-          </a:effectRef>
-          <a:fontRef idx="minor">
-            <a:schemeClr val="lt1"/>
-          </a:fontRef>
-        </p:style>
-        <p:txBody>
-          <a:bodyPr rtlCol="0" anchor="ctr"/>
-          <a:lstStyle/>
-          <a:p>
-            <a:pPr algn="ctr"/>
-            <a:endParaRPr/>
-          </a:p>
-        </p:txBody>
-      </p:sp>
-      <p:sp>
-        <p:nvSpPr>
-          <p:cNvPr id="14" name="TextBox 13"/>
-          <p:cNvSpPr txBox="1"/>
-          <p:nvPr/>
-        </p:nvSpPr>
-        <p:spPr>
-          <a:xfrm>
-            <a:off x="1097280" y="3840480"/>
-            <a:ext cx="502920" cy="457200"/>
-          </a:xfrm>
-          <a:prstGeom prst="rect">
-            <a:avLst/>
-          </a:prstGeom>
-          <a:noFill/>
-        </p:spPr>
-        <p:txBody>
-          <a:bodyPr wrap="square" lIns="45720" rIns="45720" anchor="ctr">
-            <a:spAutoFit/>
-          </a:bodyPr>
-          <a:lstStyle/>
-          <a:p>
-            <a:pPr algn="ctr"/>
-            <a:r>
-              <a:rPr sz="1600" b="1">
-                <a:solidFill>
-                  <a:srgbClr val="00A6A6"/>
-                </a:solidFill>
-                <a:latin typeface="Aptos"/>
-              </a:rPr>
-              <a:t>C</a:t>
-            </a:r>
-          </a:p>
-        </p:txBody>
-      </p:sp>
-      <p:sp>
-        <p:nvSpPr>
-          <p:cNvPr id="15" name="TextBox 14"/>
-          <p:cNvSpPr txBox="1"/>
-          <p:nvPr/>
-        </p:nvSpPr>
-        <p:spPr>
-          <a:xfrm>
-            <a:off x="1691640" y="3803904"/>
-            <a:ext cx="3886200" cy="566928"/>
-          </a:xfrm>
-          <a:prstGeom prst="rect">
-            <a:avLst/>
-          </a:prstGeom>
-          <a:noFill/>
-        </p:spPr>
-        <p:txBody>
-          <a:bodyPr wrap="square" lIns="45720" rIns="45720" anchor="ctr">
-            <a:spAutoFit/>
-          </a:bodyPr>
-          <a:lstStyle/>
-          <a:p>
-            <a:pPr algn="l"/>
-            <a:r>
-              <a:rPr sz="1600" b="1">
-                <a:solidFill>
-                  <a:srgbClr val="17212B"/>
-                </a:solidFill>
-                <a:latin typeface="Aptos"/>
-              </a:rPr>
-              <a:t>A perfect notch appears.</a:t>
-            </a:r>
-          </a:p>
-        </p:txBody>
-      </p:sp>
-      <p:sp>
-        <p:nvSpPr>
-          <p:cNvPr id="16" name="Rounded Rectangle 15"/>
-          <p:cNvSpPr/>
-          <p:nvPr/>
-        </p:nvSpPr>
-        <p:spPr>
-          <a:xfrm>
-            <a:off x="6309360" y="3657600"/>
-            <a:ext cx="4937760" cy="932688"/>
-          </a:xfrm>
-          <a:prstGeom prst="roundRect">
-            <a:avLst/>
-          </a:prstGeom>
-          <a:solidFill>
-            <a:srgbClr val="FFFFFF"/>
-          </a:solidFill>
-          <a:ln w="12700">
-            <a:solidFill>
-              <a:srgbClr val="DCE6EC"/>
-            </a:solidFill>
-          </a:ln>
-        </p:spPr>
-        <p:style>
-          <a:lnRef idx="1">
-            <a:schemeClr val="accent1"/>
-          </a:lnRef>
-          <a:fillRef idx="3">
-            <a:schemeClr val="accent1"/>
-          </a:fillRef>
-          <a:effectRef idx="2">
-            <a:schemeClr val="accent1"/>
-          </a:effectRef>
-          <a:fontRef idx="minor">
-            <a:schemeClr val="lt1"/>
-          </a:fontRef>
-        </p:style>
-        <p:txBody>
-          <a:bodyPr rtlCol="0" anchor="ctr"/>
-          <a:lstStyle/>
-          <a:p>
-            <a:pPr algn="ctr"/>
-            <a:endParaRPr/>
+          <p:cNvPr id="16" name="TextBox 15"/>
+          <p:cNvSpPr txBox="1"/>
+          <p:nvPr/>
+        </p:nvSpPr>
+        <p:spPr>
+          <a:xfrm>
+            <a:off x="1325880" y="4114800"/>
+            <a:ext cx="9509760" cy="731520"/>
+          </a:xfrm>
+          <a:prstGeom prst="rect">
+            <a:avLst/>
+          </a:prstGeom>
+          <a:noFill/>
+        </p:spPr>
+        <p:txBody>
+          <a:bodyPr wrap="square" lIns="45720" rIns="45720" anchor="ctr">
+            <a:spAutoFit/>
+          </a:bodyPr>
+          <a:lstStyle/>
+          <a:p>
+            <a:pPr algn="ctr"/>
+            <a:r>
+              <a:rPr sz="1900" b="1">
+                <a:solidFill>
+                  <a:srgbClr val="16324F"/>
+                </a:solidFill>
+                <a:latin typeface="Aptos"/>
+              </a:rPr>
+              <a:t>Design question for ML: are you removing a known nuisance, imposing a useful inductive bias, or accidentally deleting information that the classifier needs?</a:t>
+            </a:r>
           </a:p>
         </p:txBody>
       </p:sp>
       <p:sp>
         <p:nvSpPr>
           <p:cNvPr id="17" name="TextBox 16"/>
-          <p:cNvSpPr txBox="1"/>
-          <p:nvPr/>
-        </p:nvSpPr>
-        <p:spPr>
-          <a:xfrm>
-            <a:off x="6492240" y="3840480"/>
-            <a:ext cx="502920" cy="457200"/>
-          </a:xfrm>
-          <a:prstGeom prst="rect">
-            <a:avLst/>
-          </a:prstGeom>
-          <a:noFill/>
-        </p:spPr>
-        <p:txBody>
-          <a:bodyPr wrap="square" lIns="45720" rIns="45720" anchor="ctr">
-            <a:spAutoFit/>
-          </a:bodyPr>
-          <a:lstStyle/>
-          <a:p>
-            <a:pPr algn="ctr"/>
-            <a:r>
-              <a:rPr sz="1600" b="1">
-                <a:solidFill>
-                  <a:srgbClr val="00A6A6"/>
-                </a:solidFill>
-                <a:latin typeface="Aptos"/>
-              </a:rPr>
-              <a:t>D</a:t>
-            </a:r>
-          </a:p>
-        </p:txBody>
-      </p:sp>
-      <p:sp>
-        <p:nvSpPr>
-          <p:cNvPr id="18" name="TextBox 17"/>
-          <p:cNvSpPr txBox="1"/>
-          <p:nvPr/>
-        </p:nvSpPr>
-        <p:spPr>
-          <a:xfrm>
-            <a:off x="7086600" y="3803904"/>
-            <a:ext cx="3886200" cy="566928"/>
-          </a:xfrm>
-          <a:prstGeom prst="rect">
-            <a:avLst/>
-          </a:prstGeom>
-          <a:noFill/>
-        </p:spPr>
-        <p:txBody>
-          <a:bodyPr wrap="square" lIns="45720" rIns="45720" anchor="ctr">
-            <a:spAutoFit/>
-          </a:bodyPr>
-          <a:lstStyle/>
-          <a:p>
-            <a:pPr algn="l"/>
-            <a:r>
-              <a:rPr sz="1600" b="1">
-                <a:solidFill>
-                  <a:srgbClr val="17212B"/>
-                </a:solidFill>
-                <a:latin typeface="Aptos"/>
-              </a:rPr>
-              <a:t>The system becomes time varying.</a:t>
-            </a:r>
-          </a:p>
-        </p:txBody>
-      </p:sp>
-      <p:sp>
-        <p:nvSpPr>
-          <p:cNvPr id="21" name="TextBox 20"/>
           <p:cNvSpPr txBox="1"/>
           <p:nvPr/>
         </p:nvSpPr>
@@ -8988,7 +8435,7 @@
       </p:sp>
       <p:sp>
         <p:nvSpPr>
-          <p:cNvPr id="22" name="TextBox 21"/>
+          <p:cNvPr id="18" name="TextBox 17"/>
           <p:cNvSpPr txBox="1"/>
           <p:nvPr/>
         </p:nvSpPr>
@@ -9016,7 +8463,7 @@
                 </a:solidFill>
                 <a:latin typeface="Aptos"/>
               </a:rPr>
-              <a:t>20</a:t>
+              <a:t>19</a:t>
             </a:r>
           </a:p>
         </p:txBody>
@@ -9030,6 +8477,751 @@
 </file>
 
 <file path=ppt/slides/slide23.xml><?xml version="1.0" encoding="utf-8"?>
+<p:sld xmlns:a="http://schemas.openxmlformats.org/drawingml/2006/main" xmlns:r="http://schemas.openxmlformats.org/officeDocument/2006/relationships" xmlns:p="http://schemas.openxmlformats.org/presentationml/2006/main">
+  <p:cSld>
+    <p:spTree>
+      <p:nvGrpSpPr>
+        <p:cNvPr id="1" name=""/>
+        <p:cNvGrpSpPr/>
+        <p:nvPr/>
+      </p:nvGrpSpPr>
+      <p:grpSpPr>
+        <a:xfrm>
+          <a:off x="0" y="0"/>
+          <a:ext cx="0" cy="0"/>
+          <a:chOff x="0" y="0"/>
+          <a:chExt cx="0" cy="0"/>
+        </a:xfrm>
+      </p:grpSpPr>
+      <p:sp>
+        <p:nvSpPr>
+          <p:cNvPr id="2" name="TextBox 1"/>
+          <p:cNvSpPr txBox="1"/>
+          <p:nvPr/>
+        </p:nvSpPr>
+        <p:spPr>
+          <a:xfrm>
+            <a:off x="566928" y="301752"/>
+            <a:ext cx="9692640" cy="438912"/>
+          </a:xfrm>
+          <a:prstGeom prst="rect">
+            <a:avLst/>
+          </a:prstGeom>
+          <a:noFill/>
+        </p:spPr>
+        <p:txBody>
+          <a:bodyPr wrap="square" lIns="45720" rIns="45720" anchor="ctr">
+            <a:spAutoFit/>
+          </a:bodyPr>
+          <a:lstStyle/>
+          <a:p>
+            <a:pPr algn="l"/>
+            <a:r>
+              <a:rPr sz="2400" b="1">
+                <a:solidFill>
+                  <a:srgbClr val="16324F"/>
+                </a:solidFill>
+                <a:latin typeface="Aptos"/>
+              </a:rPr>
+              <a:t>Concept check</a:t>
+            </a:r>
+          </a:p>
+        </p:txBody>
+      </p:sp>
+      <p:sp>
+        <p:nvSpPr>
+          <p:cNvPr id="3" name="Rounded Rectangle 2"/>
+          <p:cNvSpPr/>
+          <p:nvPr/>
+        </p:nvSpPr>
+        <p:spPr>
+          <a:xfrm>
+            <a:off x="10332720" y="283464"/>
+            <a:ext cx="1234440" cy="347472"/>
+          </a:xfrm>
+          <a:prstGeom prst="roundRect">
+            <a:avLst/>
+          </a:prstGeom>
+          <a:solidFill>
+            <a:srgbClr val="E8F7F7"/>
+          </a:solidFill>
+          <a:ln w="12700">
+            <a:solidFill>
+              <a:srgbClr val="00A6A6"/>
+            </a:solidFill>
+          </a:ln>
+        </p:spPr>
+        <p:style>
+          <a:lnRef idx="1">
+            <a:schemeClr val="accent1"/>
+          </a:lnRef>
+          <a:fillRef idx="3">
+            <a:schemeClr val="accent1"/>
+          </a:fillRef>
+          <a:effectRef idx="2">
+            <a:schemeClr val="accent1"/>
+          </a:effectRef>
+          <a:fontRef idx="minor">
+            <a:schemeClr val="lt1"/>
+          </a:fontRef>
+        </p:style>
+        <p:txBody>
+          <a:bodyPr rtlCol="0" anchor="ctr"/>
+          <a:lstStyle/>
+          <a:p>
+            <a:pPr algn="ctr"/>
+            <a:endParaRPr/>
+          </a:p>
+        </p:txBody>
+      </p:sp>
+      <p:sp>
+        <p:nvSpPr>
+          <p:cNvPr id="4" name="TextBox 3"/>
+          <p:cNvSpPr txBox="1"/>
+          <p:nvPr/>
+        </p:nvSpPr>
+        <p:spPr>
+          <a:xfrm>
+            <a:off x="10351008" y="292608"/>
+            <a:ext cx="1197864" cy="310896"/>
+          </a:xfrm>
+          <a:prstGeom prst="rect">
+            <a:avLst/>
+          </a:prstGeom>
+          <a:noFill/>
+        </p:spPr>
+        <p:txBody>
+          <a:bodyPr wrap="square" lIns="45720" rIns="45720" anchor="ctr">
+            <a:spAutoFit/>
+          </a:bodyPr>
+          <a:lstStyle/>
+          <a:p>
+            <a:pPr algn="ctr"/>
+            <a:r>
+              <a:rPr sz="1100" b="1">
+                <a:solidFill>
+                  <a:srgbClr val="16324F"/>
+                </a:solidFill>
+                <a:latin typeface="Aptos"/>
+              </a:rPr>
+              <a:t>CHECK</a:t>
+            </a:r>
+          </a:p>
+        </p:txBody>
+      </p:sp>
+      <p:sp>
+        <p:nvSpPr>
+          <p:cNvPr id="5" name="TextBox 4"/>
+          <p:cNvSpPr txBox="1"/>
+          <p:nvPr/>
+        </p:nvSpPr>
+        <p:spPr>
+          <a:xfrm>
+            <a:off x="594360" y="786384"/>
+            <a:ext cx="10652760" cy="329184"/>
+          </a:xfrm>
+          <a:prstGeom prst="rect">
+            <a:avLst/>
+          </a:prstGeom>
+          <a:noFill/>
+        </p:spPr>
+        <p:txBody>
+          <a:bodyPr wrap="square" lIns="45720" rIns="45720" anchor="ctr">
+            <a:spAutoFit/>
+          </a:bodyPr>
+          <a:lstStyle/>
+          <a:p>
+            <a:pPr algn="l"/>
+            <a:r>
+              <a:rPr sz="1200" b="0">
+                <a:solidFill>
+                  <a:srgbClr val="53616E"/>
+                </a:solidFill>
+                <a:latin typeface="Aptos"/>
+              </a:rPr>
+              <a:t>Reason geometrically—no full algebra is needed.</a:t>
+            </a:r>
+          </a:p>
+        </p:txBody>
+      </p:sp>
+      <p:sp>
+        <p:nvSpPr>
+          <p:cNvPr id="6" name="TextBox 5"/>
+          <p:cNvSpPr txBox="1"/>
+          <p:nvPr/>
+        </p:nvSpPr>
+        <p:spPr>
+          <a:xfrm>
+            <a:off x="914400" y="1280160"/>
+            <a:ext cx="10241280" cy="731520"/>
+          </a:xfrm>
+          <a:prstGeom prst="rect">
+            <a:avLst/>
+          </a:prstGeom>
+          <a:noFill/>
+        </p:spPr>
+        <p:txBody>
+          <a:bodyPr wrap="square" lIns="45720" rIns="45720" anchor="ctr">
+            <a:spAutoFit/>
+          </a:bodyPr>
+          <a:lstStyle/>
+          <a:p>
+            <a:pPr algn="ctr"/>
+            <a:r>
+              <a:rPr sz="2100" b="1">
+                <a:solidFill>
+                  <a:srgbClr val="16324F"/>
+                </a:solidFill>
+                <a:latin typeface="Aptos"/>
+              </a:rPr>
+              <a:t>A conjugate pole pair is moved from radius 0.7 to radius 0.97 at the same angle. What changes?</a:t>
+            </a:r>
+          </a:p>
+        </p:txBody>
+      </p:sp>
+      <p:sp>
+        <p:nvSpPr>
+          <p:cNvPr id="7" name="Rounded Rectangle 6"/>
+          <p:cNvSpPr/>
+          <p:nvPr/>
+        </p:nvSpPr>
+        <p:spPr>
+          <a:xfrm>
+            <a:off x="914400" y="2423160"/>
+            <a:ext cx="4937760" cy="932688"/>
+          </a:xfrm>
+          <a:prstGeom prst="roundRect">
+            <a:avLst/>
+          </a:prstGeom>
+          <a:solidFill>
+            <a:srgbClr val="FFFFFF"/>
+          </a:solidFill>
+          <a:ln w="12700">
+            <a:solidFill>
+              <a:srgbClr val="DCE6EC"/>
+            </a:solidFill>
+          </a:ln>
+        </p:spPr>
+        <p:style>
+          <a:lnRef idx="1">
+            <a:schemeClr val="accent1"/>
+          </a:lnRef>
+          <a:fillRef idx="3">
+            <a:schemeClr val="accent1"/>
+          </a:fillRef>
+          <a:effectRef idx="2">
+            <a:schemeClr val="accent1"/>
+          </a:effectRef>
+          <a:fontRef idx="minor">
+            <a:schemeClr val="lt1"/>
+          </a:fontRef>
+        </p:style>
+        <p:txBody>
+          <a:bodyPr rtlCol="0" anchor="ctr"/>
+          <a:lstStyle/>
+          <a:p>
+            <a:pPr algn="ctr"/>
+            <a:endParaRPr/>
+          </a:p>
+        </p:txBody>
+      </p:sp>
+      <p:sp>
+        <p:nvSpPr>
+          <p:cNvPr id="8" name="TextBox 7"/>
+          <p:cNvSpPr txBox="1"/>
+          <p:nvPr/>
+        </p:nvSpPr>
+        <p:spPr>
+          <a:xfrm>
+            <a:off x="1097280" y="2606040"/>
+            <a:ext cx="502920" cy="457200"/>
+          </a:xfrm>
+          <a:prstGeom prst="rect">
+            <a:avLst/>
+          </a:prstGeom>
+          <a:noFill/>
+        </p:spPr>
+        <p:txBody>
+          <a:bodyPr wrap="square" lIns="45720" rIns="45720" anchor="ctr">
+            <a:spAutoFit/>
+          </a:bodyPr>
+          <a:lstStyle/>
+          <a:p>
+            <a:pPr algn="ctr"/>
+            <a:r>
+              <a:rPr sz="1600" b="1">
+                <a:solidFill>
+                  <a:srgbClr val="00A6A6"/>
+                </a:solidFill>
+                <a:latin typeface="Aptos"/>
+              </a:rPr>
+              <a:t>A</a:t>
+            </a:r>
+          </a:p>
+        </p:txBody>
+      </p:sp>
+      <p:sp>
+        <p:nvSpPr>
+          <p:cNvPr id="9" name="TextBox 8"/>
+          <p:cNvSpPr txBox="1"/>
+          <p:nvPr/>
+        </p:nvSpPr>
+        <p:spPr>
+          <a:xfrm>
+            <a:off x="1691640" y="2569464"/>
+            <a:ext cx="3886200" cy="566928"/>
+          </a:xfrm>
+          <a:prstGeom prst="rect">
+            <a:avLst/>
+          </a:prstGeom>
+          <a:noFill/>
+        </p:spPr>
+        <p:txBody>
+          <a:bodyPr wrap="square" lIns="45720" rIns="45720" anchor="ctr">
+            <a:spAutoFit/>
+          </a:bodyPr>
+          <a:lstStyle/>
+          <a:p>
+            <a:pPr algn="l"/>
+            <a:r>
+              <a:rPr sz="1600" b="1">
+                <a:solidFill>
+                  <a:srgbClr val="17212B"/>
+                </a:solidFill>
+                <a:latin typeface="Aptos"/>
+              </a:rPr>
+              <a:t>Resonant frequency moves drastically.</a:t>
+            </a:r>
+          </a:p>
+        </p:txBody>
+      </p:sp>
+      <p:sp>
+        <p:nvSpPr>
+          <p:cNvPr id="10" name="Rounded Rectangle 9"/>
+          <p:cNvSpPr/>
+          <p:nvPr/>
+        </p:nvSpPr>
+        <p:spPr>
+          <a:xfrm>
+            <a:off x="6309360" y="2423160"/>
+            <a:ext cx="4937760" cy="932688"/>
+          </a:xfrm>
+          <a:prstGeom prst="roundRect">
+            <a:avLst/>
+          </a:prstGeom>
+          <a:solidFill>
+            <a:srgbClr val="FFFFFF"/>
+          </a:solidFill>
+          <a:ln w="12700">
+            <a:solidFill>
+              <a:srgbClr val="DCE6EC"/>
+            </a:solidFill>
+          </a:ln>
+        </p:spPr>
+        <p:style>
+          <a:lnRef idx="1">
+            <a:schemeClr val="accent1"/>
+          </a:lnRef>
+          <a:fillRef idx="3">
+            <a:schemeClr val="accent1"/>
+          </a:fillRef>
+          <a:effectRef idx="2">
+            <a:schemeClr val="accent1"/>
+          </a:effectRef>
+          <a:fontRef idx="minor">
+            <a:schemeClr val="lt1"/>
+          </a:fontRef>
+        </p:style>
+        <p:txBody>
+          <a:bodyPr rtlCol="0" anchor="ctr"/>
+          <a:lstStyle/>
+          <a:p>
+            <a:pPr algn="ctr"/>
+            <a:endParaRPr/>
+          </a:p>
+        </p:txBody>
+      </p:sp>
+      <p:sp>
+        <p:nvSpPr>
+          <p:cNvPr id="11" name="TextBox 10"/>
+          <p:cNvSpPr txBox="1"/>
+          <p:nvPr/>
+        </p:nvSpPr>
+        <p:spPr>
+          <a:xfrm>
+            <a:off x="6492240" y="2606040"/>
+            <a:ext cx="502920" cy="457200"/>
+          </a:xfrm>
+          <a:prstGeom prst="rect">
+            <a:avLst/>
+          </a:prstGeom>
+          <a:noFill/>
+        </p:spPr>
+        <p:txBody>
+          <a:bodyPr wrap="square" lIns="45720" rIns="45720" anchor="ctr">
+            <a:spAutoFit/>
+          </a:bodyPr>
+          <a:lstStyle/>
+          <a:p>
+            <a:pPr algn="ctr"/>
+            <a:r>
+              <a:rPr sz="1600" b="1">
+                <a:solidFill>
+                  <a:srgbClr val="00A6A6"/>
+                </a:solidFill>
+                <a:latin typeface="Aptos"/>
+              </a:rPr>
+              <a:t>B</a:t>
+            </a:r>
+          </a:p>
+        </p:txBody>
+      </p:sp>
+      <p:sp>
+        <p:nvSpPr>
+          <p:cNvPr id="12" name="TextBox 11"/>
+          <p:cNvSpPr txBox="1"/>
+          <p:nvPr/>
+        </p:nvSpPr>
+        <p:spPr>
+          <a:xfrm>
+            <a:off x="7086600" y="2569464"/>
+            <a:ext cx="3886200" cy="566928"/>
+          </a:xfrm>
+          <a:prstGeom prst="rect">
+            <a:avLst/>
+          </a:prstGeom>
+          <a:noFill/>
+        </p:spPr>
+        <p:txBody>
+          <a:bodyPr wrap="square" lIns="45720" rIns="45720" anchor="ctr">
+            <a:spAutoFit/>
+          </a:bodyPr>
+          <a:lstStyle/>
+          <a:p>
+            <a:pPr algn="l"/>
+            <a:r>
+              <a:rPr sz="1600" b="1">
+                <a:solidFill>
+                  <a:srgbClr val="17212B"/>
+                </a:solidFill>
+                <a:latin typeface="Aptos"/>
+              </a:rPr>
+              <a:t>Peak becomes sharper; ringing lasts longer.</a:t>
+            </a:r>
+          </a:p>
+        </p:txBody>
+      </p:sp>
+      <p:sp>
+        <p:nvSpPr>
+          <p:cNvPr id="13" name="Rounded Rectangle 12"/>
+          <p:cNvSpPr/>
+          <p:nvPr/>
+        </p:nvSpPr>
+        <p:spPr>
+          <a:xfrm>
+            <a:off x="914400" y="3657600"/>
+            <a:ext cx="4937760" cy="932688"/>
+          </a:xfrm>
+          <a:prstGeom prst="roundRect">
+            <a:avLst/>
+          </a:prstGeom>
+          <a:solidFill>
+            <a:srgbClr val="FFFFFF"/>
+          </a:solidFill>
+          <a:ln w="12700">
+            <a:solidFill>
+              <a:srgbClr val="DCE6EC"/>
+            </a:solidFill>
+          </a:ln>
+        </p:spPr>
+        <p:style>
+          <a:lnRef idx="1">
+            <a:schemeClr val="accent1"/>
+          </a:lnRef>
+          <a:fillRef idx="3">
+            <a:schemeClr val="accent1"/>
+          </a:fillRef>
+          <a:effectRef idx="2">
+            <a:schemeClr val="accent1"/>
+          </a:effectRef>
+          <a:fontRef idx="minor">
+            <a:schemeClr val="lt1"/>
+          </a:fontRef>
+        </p:style>
+        <p:txBody>
+          <a:bodyPr rtlCol="0" anchor="ctr"/>
+          <a:lstStyle/>
+          <a:p>
+            <a:pPr algn="ctr"/>
+            <a:endParaRPr/>
+          </a:p>
+        </p:txBody>
+      </p:sp>
+      <p:sp>
+        <p:nvSpPr>
+          <p:cNvPr id="14" name="TextBox 13"/>
+          <p:cNvSpPr txBox="1"/>
+          <p:nvPr/>
+        </p:nvSpPr>
+        <p:spPr>
+          <a:xfrm>
+            <a:off x="1097280" y="3840480"/>
+            <a:ext cx="502920" cy="457200"/>
+          </a:xfrm>
+          <a:prstGeom prst="rect">
+            <a:avLst/>
+          </a:prstGeom>
+          <a:noFill/>
+        </p:spPr>
+        <p:txBody>
+          <a:bodyPr wrap="square" lIns="45720" rIns="45720" anchor="ctr">
+            <a:spAutoFit/>
+          </a:bodyPr>
+          <a:lstStyle/>
+          <a:p>
+            <a:pPr algn="ctr"/>
+            <a:r>
+              <a:rPr sz="1600" b="1">
+                <a:solidFill>
+                  <a:srgbClr val="00A6A6"/>
+                </a:solidFill>
+                <a:latin typeface="Aptos"/>
+              </a:rPr>
+              <a:t>C</a:t>
+            </a:r>
+          </a:p>
+        </p:txBody>
+      </p:sp>
+      <p:sp>
+        <p:nvSpPr>
+          <p:cNvPr id="15" name="TextBox 14"/>
+          <p:cNvSpPr txBox="1"/>
+          <p:nvPr/>
+        </p:nvSpPr>
+        <p:spPr>
+          <a:xfrm>
+            <a:off x="1691640" y="3803904"/>
+            <a:ext cx="3886200" cy="566928"/>
+          </a:xfrm>
+          <a:prstGeom prst="rect">
+            <a:avLst/>
+          </a:prstGeom>
+          <a:noFill/>
+        </p:spPr>
+        <p:txBody>
+          <a:bodyPr wrap="square" lIns="45720" rIns="45720" anchor="ctr">
+            <a:spAutoFit/>
+          </a:bodyPr>
+          <a:lstStyle/>
+          <a:p>
+            <a:pPr algn="l"/>
+            <a:r>
+              <a:rPr sz="1600" b="1">
+                <a:solidFill>
+                  <a:srgbClr val="17212B"/>
+                </a:solidFill>
+                <a:latin typeface="Aptos"/>
+              </a:rPr>
+              <a:t>A perfect notch appears.</a:t>
+            </a:r>
+          </a:p>
+        </p:txBody>
+      </p:sp>
+      <p:sp>
+        <p:nvSpPr>
+          <p:cNvPr id="16" name="Rounded Rectangle 15"/>
+          <p:cNvSpPr/>
+          <p:nvPr/>
+        </p:nvSpPr>
+        <p:spPr>
+          <a:xfrm>
+            <a:off x="6309360" y="3657600"/>
+            <a:ext cx="4937760" cy="932688"/>
+          </a:xfrm>
+          <a:prstGeom prst="roundRect">
+            <a:avLst/>
+          </a:prstGeom>
+          <a:solidFill>
+            <a:srgbClr val="FFFFFF"/>
+          </a:solidFill>
+          <a:ln w="12700">
+            <a:solidFill>
+              <a:srgbClr val="DCE6EC"/>
+            </a:solidFill>
+          </a:ln>
+        </p:spPr>
+        <p:style>
+          <a:lnRef idx="1">
+            <a:schemeClr val="accent1"/>
+          </a:lnRef>
+          <a:fillRef idx="3">
+            <a:schemeClr val="accent1"/>
+          </a:fillRef>
+          <a:effectRef idx="2">
+            <a:schemeClr val="accent1"/>
+          </a:effectRef>
+          <a:fontRef idx="minor">
+            <a:schemeClr val="lt1"/>
+          </a:fontRef>
+        </p:style>
+        <p:txBody>
+          <a:bodyPr rtlCol="0" anchor="ctr"/>
+          <a:lstStyle/>
+          <a:p>
+            <a:pPr algn="ctr"/>
+            <a:endParaRPr/>
+          </a:p>
+        </p:txBody>
+      </p:sp>
+      <p:sp>
+        <p:nvSpPr>
+          <p:cNvPr id="17" name="TextBox 16"/>
+          <p:cNvSpPr txBox="1"/>
+          <p:nvPr/>
+        </p:nvSpPr>
+        <p:spPr>
+          <a:xfrm>
+            <a:off x="6492240" y="3840480"/>
+            <a:ext cx="502920" cy="457200"/>
+          </a:xfrm>
+          <a:prstGeom prst="rect">
+            <a:avLst/>
+          </a:prstGeom>
+          <a:noFill/>
+        </p:spPr>
+        <p:txBody>
+          <a:bodyPr wrap="square" lIns="45720" rIns="45720" anchor="ctr">
+            <a:spAutoFit/>
+          </a:bodyPr>
+          <a:lstStyle/>
+          <a:p>
+            <a:pPr algn="ctr"/>
+            <a:r>
+              <a:rPr sz="1600" b="1">
+                <a:solidFill>
+                  <a:srgbClr val="00A6A6"/>
+                </a:solidFill>
+                <a:latin typeface="Aptos"/>
+              </a:rPr>
+              <a:t>D</a:t>
+            </a:r>
+          </a:p>
+        </p:txBody>
+      </p:sp>
+      <p:sp>
+        <p:nvSpPr>
+          <p:cNvPr id="18" name="TextBox 17"/>
+          <p:cNvSpPr txBox="1"/>
+          <p:nvPr/>
+        </p:nvSpPr>
+        <p:spPr>
+          <a:xfrm>
+            <a:off x="7086600" y="3803904"/>
+            <a:ext cx="3886200" cy="566928"/>
+          </a:xfrm>
+          <a:prstGeom prst="rect">
+            <a:avLst/>
+          </a:prstGeom>
+          <a:noFill/>
+        </p:spPr>
+        <p:txBody>
+          <a:bodyPr wrap="square" lIns="45720" rIns="45720" anchor="ctr">
+            <a:spAutoFit/>
+          </a:bodyPr>
+          <a:lstStyle/>
+          <a:p>
+            <a:pPr algn="l"/>
+            <a:r>
+              <a:rPr sz="1600" b="1">
+                <a:solidFill>
+                  <a:srgbClr val="17212B"/>
+                </a:solidFill>
+                <a:latin typeface="Aptos"/>
+              </a:rPr>
+              <a:t>The system becomes time varying.</a:t>
+            </a:r>
+          </a:p>
+        </p:txBody>
+      </p:sp>
+      <p:sp>
+        <p:nvSpPr>
+          <p:cNvPr id="21" name="TextBox 20"/>
+          <p:cNvSpPr txBox="1"/>
+          <p:nvPr/>
+        </p:nvSpPr>
+        <p:spPr>
+          <a:xfrm>
+            <a:off x="566928" y="6473952"/>
+            <a:ext cx="4754880" cy="164592"/>
+          </a:xfrm>
+          <a:prstGeom prst="rect">
+            <a:avLst/>
+          </a:prstGeom>
+          <a:noFill/>
+        </p:spPr>
+        <p:txBody>
+          <a:bodyPr wrap="square" lIns="45720" rIns="45720" anchor="ctr">
+            <a:spAutoFit/>
+          </a:bodyPr>
+          <a:lstStyle/>
+          <a:p>
+            <a:pPr algn="l"/>
+            <a:r>
+              <a:rPr sz="800" b="0">
+                <a:solidFill>
+                  <a:srgbClr val="53616E"/>
+                </a:solidFill>
+                <a:latin typeface="Aptos"/>
+              </a:rPr>
+              <a:t>Week 3 • DSP + ML • Oppenheim &amp; Schafer</a:t>
+            </a:r>
+          </a:p>
+        </p:txBody>
+      </p:sp>
+      <p:sp>
+        <p:nvSpPr>
+          <p:cNvPr id="22" name="TextBox 21"/>
+          <p:cNvSpPr txBox="1"/>
+          <p:nvPr/>
+        </p:nvSpPr>
+        <p:spPr>
+          <a:xfrm>
+            <a:off x="11201400" y="6473952"/>
+            <a:ext cx="320040" cy="164592"/>
+          </a:xfrm>
+          <a:prstGeom prst="rect">
+            <a:avLst/>
+          </a:prstGeom>
+          <a:noFill/>
+        </p:spPr>
+        <p:txBody>
+          <a:bodyPr wrap="square" lIns="45720" rIns="45720" anchor="ctr">
+            <a:spAutoFit/>
+          </a:bodyPr>
+          <a:lstStyle/>
+          <a:p>
+            <a:pPr algn="r"/>
+            <a:r>
+              <a:rPr sz="800" b="0">
+                <a:solidFill>
+                  <a:srgbClr val="53616E"/>
+                </a:solidFill>
+                <a:latin typeface="Aptos"/>
+              </a:rPr>
+              <a:t>20</a:t>
+            </a:r>
+          </a:p>
+        </p:txBody>
+      </p:sp>
+    </p:spTree>
+  </p:cSld>
+  <p:clrMapOvr>
+    <a:masterClrMapping/>
+  </p:clrMapOvr>
+</p:sld>
+</file>
+
+<file path=ppt/slides/slide24.xml><?xml version="1.0" encoding="utf-8"?>
 <p:sld xmlns:a="http://schemas.openxmlformats.org/drawingml/2006/main" xmlns:r="http://schemas.openxmlformats.org/officeDocument/2006/relationships" xmlns:p="http://schemas.openxmlformats.org/presentationml/2006/main">
   <p:cSld>
     <p:spTree>
@@ -9992,7 +10184,7 @@
 </p:sld>
 </file>
 
-<file path=ppt/slides/slide24.xml><?xml version="1.0" encoding="utf-8"?>
+<file path=ppt/slides/slide25.xml><?xml version="1.0" encoding="utf-8"?>
 <p:sld xmlns:a="http://schemas.openxmlformats.org/drawingml/2006/main" xmlns:r="http://schemas.openxmlformats.org/officeDocument/2006/relationships" xmlns:p="http://schemas.openxmlformats.org/presentationml/2006/main">
   <p:cSld>
     <p:spTree>
@@ -10694,8 +10886,8 @@
           </a:p>
         </p:txBody>
       </p:sp>
-      <mc:AlternateContent xmlns:mc="http://schemas.openxmlformats.org/markup-compatibility/2006">
-        <mc:Choice xmlns:a14="http://schemas.microsoft.com/office/drawing/2010/main" Requires="a14">
+      <mc:AlternateContent xmlns:mc="http://schemas.openxmlformats.org/markup-compatibility/2006" xmlns:a14="http://schemas.microsoft.com/office/drawing/2010/main">
+        <mc:Choice Requires="a14">
           <p:sp>
             <p:nvSpPr>
               <p:cNvPr id="20" name="TextBox 19"/>
@@ -10812,7 +11004,7 @@
             </p:txBody>
           </p:sp>
         </mc:Choice>
-        <mc:Fallback>
+        <mc:Fallback xmlns="">
           <p:sp>
             <p:nvSpPr>
               <p:cNvPr id="20" name="TextBox 19"/>
@@ -11161,7 +11353,7 @@
 </p:sld>
 </file>
 
-<file path=ppt/slides/slide25.xml><?xml version="1.0" encoding="utf-8"?>
+<file path=ppt/slides/slide26.xml><?xml version="1.0" encoding="utf-8"?>
 <p:sld xmlns:a="http://schemas.openxmlformats.org/drawingml/2006/main" xmlns:r="http://schemas.openxmlformats.org/officeDocument/2006/relationships" xmlns:p="http://schemas.openxmlformats.org/presentationml/2006/main">
   <p:cSld>
     <p:spTree>
@@ -11977,8 +12169,8 @@
           </a:p>
         </p:txBody>
       </p:sp>
-      <mc:AlternateContent xmlns:mc="http://schemas.openxmlformats.org/markup-compatibility/2006">
-        <mc:Choice xmlns:a14="http://schemas.microsoft.com/office/drawing/2010/main" Requires="a14">
+      <mc:AlternateContent xmlns:mc="http://schemas.openxmlformats.org/markup-compatibility/2006" xmlns:a14="http://schemas.microsoft.com/office/drawing/2010/main">
+        <mc:Choice Requires="a14">
           <p:sp>
             <p:nvSpPr>
               <p:cNvPr id="20" name="TextBox 19">
@@ -12101,7 +12293,7 @@
             </p:txBody>
           </p:sp>
         </mc:Choice>
-        <mc:Fallback>
+        <mc:Fallback xmlns="">
           <p:sp>
             <p:nvSpPr>
               <p:cNvPr id="20" name="TextBox 19">
@@ -12509,565 +12701,6 @@
 </p:sld>
 </file>
 
-<file path=ppt/slides/slide26.xml><?xml version="1.0" encoding="utf-8"?>
-<p:sld xmlns:a="http://schemas.openxmlformats.org/drawingml/2006/main" xmlns:r="http://schemas.openxmlformats.org/officeDocument/2006/relationships" xmlns:p="http://schemas.openxmlformats.org/presentationml/2006/main">
-  <p:cSld>
-    <p:spTree>
-      <p:nvGrpSpPr>
-        <p:cNvPr id="1" name=""/>
-        <p:cNvGrpSpPr/>
-        <p:nvPr/>
-      </p:nvGrpSpPr>
-      <p:grpSpPr>
-        <a:xfrm>
-          <a:off x="0" y="0"/>
-          <a:ext cx="0" cy="0"/>
-          <a:chOff x="0" y="0"/>
-          <a:chExt cx="0" cy="0"/>
-        </a:xfrm>
-      </p:grpSpPr>
-      <p:sp>
-        <p:nvSpPr>
-          <p:cNvPr id="2" name="TextBox 1"/>
-          <p:cNvSpPr txBox="1"/>
-          <p:nvPr/>
-        </p:nvSpPr>
-        <p:spPr>
-          <a:xfrm>
-            <a:off x="566928" y="301752"/>
-            <a:ext cx="9692640" cy="438912"/>
-          </a:xfrm>
-          <a:prstGeom prst="rect">
-            <a:avLst/>
-          </a:prstGeom>
-          <a:noFill/>
-        </p:spPr>
-        <p:txBody>
-          <a:bodyPr wrap="square" lIns="45720" rIns="45720" anchor="ctr">
-            <a:spAutoFit/>
-          </a:bodyPr>
-          <a:lstStyle/>
-          <a:p>
-            <a:pPr algn="l"/>
-            <a:r>
-              <a:rPr sz="2400" b="1">
-                <a:solidFill>
-                  <a:srgbClr val="16324F"/>
-                </a:solidFill>
-                <a:latin typeface="Aptos"/>
-              </a:rPr>
-              <a:t>Weekly quiz</a:t>
-            </a:r>
-          </a:p>
-        </p:txBody>
-      </p:sp>
-      <p:sp>
-        <p:nvSpPr>
-          <p:cNvPr id="3" name="Rounded Rectangle 2"/>
-          <p:cNvSpPr/>
-          <p:nvPr/>
-        </p:nvSpPr>
-        <p:spPr>
-          <a:xfrm>
-            <a:off x="10332720" y="283464"/>
-            <a:ext cx="1234440" cy="347472"/>
-          </a:xfrm>
-          <a:prstGeom prst="roundRect">
-            <a:avLst/>
-          </a:prstGeom>
-          <a:solidFill>
-            <a:srgbClr val="E8F7F7"/>
-          </a:solidFill>
-          <a:ln w="12700">
-            <a:solidFill>
-              <a:srgbClr val="00A6A6"/>
-            </a:solidFill>
-          </a:ln>
-        </p:spPr>
-        <p:style>
-          <a:lnRef idx="1">
-            <a:schemeClr val="accent1"/>
-          </a:lnRef>
-          <a:fillRef idx="3">
-            <a:schemeClr val="accent1"/>
-          </a:fillRef>
-          <a:effectRef idx="2">
-            <a:schemeClr val="accent1"/>
-          </a:effectRef>
-          <a:fontRef idx="minor">
-            <a:schemeClr val="lt1"/>
-          </a:fontRef>
-        </p:style>
-        <p:txBody>
-          <a:bodyPr rtlCol="0" anchor="ctr"/>
-          <a:lstStyle/>
-          <a:p>
-            <a:pPr algn="ctr"/>
-            <a:endParaRPr/>
-          </a:p>
-        </p:txBody>
-      </p:sp>
-      <p:sp>
-        <p:nvSpPr>
-          <p:cNvPr id="4" name="TextBox 3"/>
-          <p:cNvSpPr txBox="1"/>
-          <p:nvPr/>
-        </p:nvSpPr>
-        <p:spPr>
-          <a:xfrm>
-            <a:off x="10351008" y="292608"/>
-            <a:ext cx="1197864" cy="310896"/>
-          </a:xfrm>
-          <a:prstGeom prst="rect">
-            <a:avLst/>
-          </a:prstGeom>
-          <a:noFill/>
-        </p:spPr>
-        <p:txBody>
-          <a:bodyPr wrap="square" lIns="45720" rIns="45720" anchor="ctr">
-            <a:spAutoFit/>
-          </a:bodyPr>
-          <a:lstStyle/>
-          <a:p>
-            <a:pPr algn="ctr"/>
-            <a:r>
-              <a:rPr sz="1100" b="1">
-                <a:solidFill>
-                  <a:srgbClr val="16324F"/>
-                </a:solidFill>
-                <a:latin typeface="Aptos"/>
-              </a:rPr>
-              <a:t>ASSESSMENT</a:t>
-            </a:r>
-          </a:p>
-        </p:txBody>
-      </p:sp>
-      <p:sp>
-        <p:nvSpPr>
-          <p:cNvPr id="5" name="TextBox 4"/>
-          <p:cNvSpPr txBox="1"/>
-          <p:nvPr/>
-        </p:nvSpPr>
-        <p:spPr>
-          <a:xfrm>
-            <a:off x="594360" y="786384"/>
-            <a:ext cx="10652760" cy="329184"/>
-          </a:xfrm>
-          <a:prstGeom prst="rect">
-            <a:avLst/>
-          </a:prstGeom>
-          <a:noFill/>
-        </p:spPr>
-        <p:txBody>
-          <a:bodyPr wrap="square" lIns="45720" rIns="45720" anchor="ctr">
-            <a:spAutoFit/>
-          </a:bodyPr>
-          <a:lstStyle/>
-          <a:p>
-            <a:pPr algn="l"/>
-            <a:r>
-              <a:rPr sz="1200" b="0">
-                <a:solidFill>
-                  <a:srgbClr val="53616E"/>
-                </a:solidFill>
-                <a:latin typeface="Aptos"/>
-              </a:rPr>
-              <a:t>Suggested: 15 minutes at the start of Week 4 or end of Lecture 6.</a:t>
-            </a:r>
-          </a:p>
-        </p:txBody>
-      </p:sp>
-      <p:sp>
-        <p:nvSpPr>
-          <p:cNvPr id="6" name="Rounded Rectangle 5"/>
-          <p:cNvSpPr/>
-          <p:nvPr/>
-        </p:nvSpPr>
-        <p:spPr>
-          <a:xfrm>
-            <a:off x="914400" y="1371600"/>
-            <a:ext cx="4892040" cy="1920240"/>
-          </a:xfrm>
-          <a:prstGeom prst="roundRect">
-            <a:avLst/>
-          </a:prstGeom>
-          <a:solidFill>
-            <a:srgbClr val="EDF3F7"/>
-          </a:solidFill>
-          <a:ln w="12700">
-            <a:solidFill>
-              <a:srgbClr val="DCE6EC"/>
-            </a:solidFill>
-          </a:ln>
-        </p:spPr>
-        <p:style>
-          <a:lnRef idx="1">
-            <a:schemeClr val="accent1"/>
-          </a:lnRef>
-          <a:fillRef idx="3">
-            <a:schemeClr val="accent1"/>
-          </a:fillRef>
-          <a:effectRef idx="2">
-            <a:schemeClr val="accent1"/>
-          </a:effectRef>
-          <a:fontRef idx="minor">
-            <a:schemeClr val="lt1"/>
-          </a:fontRef>
-        </p:style>
-        <p:txBody>
-          <a:bodyPr rtlCol="0" anchor="ctr"/>
-          <a:lstStyle/>
-          <a:p>
-            <a:pPr algn="ctr"/>
-            <a:endParaRPr/>
-          </a:p>
-        </p:txBody>
-      </p:sp>
-      <p:sp>
-        <p:nvSpPr>
-          <p:cNvPr id="7" name="TextBox 6"/>
-          <p:cNvSpPr txBox="1"/>
-          <p:nvPr/>
-        </p:nvSpPr>
-        <p:spPr>
-          <a:xfrm>
-            <a:off x="1078992" y="1481328"/>
-            <a:ext cx="4562855" cy="320040"/>
-          </a:xfrm>
-          <a:prstGeom prst="rect">
-            <a:avLst/>
-          </a:prstGeom>
-          <a:noFill/>
-        </p:spPr>
-        <p:txBody>
-          <a:bodyPr wrap="square" lIns="45720" rIns="45720" anchor="ctr">
-            <a:spAutoFit/>
-          </a:bodyPr>
-          <a:lstStyle/>
-          <a:p>
-            <a:pPr algn="l"/>
-            <a:r>
-              <a:rPr sz="1500" b="1">
-                <a:solidFill>
-                  <a:srgbClr val="16324F"/>
-                </a:solidFill>
-                <a:latin typeface="Aptos"/>
-              </a:rPr>
-              <a:t>Core skills</a:t>
-            </a:r>
-          </a:p>
-        </p:txBody>
-      </p:sp>
-      <p:sp>
-        <p:nvSpPr>
-          <p:cNvPr id="8" name="TextBox 7"/>
-          <p:cNvSpPr txBox="1"/>
-          <p:nvPr/>
-        </p:nvSpPr>
-        <p:spPr>
-          <a:xfrm>
-            <a:off x="1078992" y="1847088"/>
-            <a:ext cx="4562855" cy="1353312"/>
-          </a:xfrm>
-          <a:prstGeom prst="rect">
-            <a:avLst/>
-          </a:prstGeom>
-          <a:noFill/>
-        </p:spPr>
-        <p:txBody>
-          <a:bodyPr wrap="square" lIns="45720" rIns="45720" anchor="t">
-            <a:spAutoFit/>
-          </a:bodyPr>
-          <a:lstStyle/>
-          <a:p>
-            <a:pPr algn="l"/>
-            <a:r>
-              <a:rPr sz="1300" b="0">
-                <a:solidFill>
-                  <a:srgbClr val="53616E"/>
-                </a:solidFill>
-                <a:latin typeface="Aptos"/>
-              </a:rPr>
-              <a:t>z-transform + ROC interpretation; inverse transform by PFE; transfer-function poles/zeros; causality/stability; geometric response.</a:t>
-            </a:r>
-          </a:p>
-        </p:txBody>
-      </p:sp>
-      <p:sp>
-        <p:nvSpPr>
-          <p:cNvPr id="9" name="Rounded Rectangle 8"/>
-          <p:cNvSpPr/>
-          <p:nvPr/>
-        </p:nvSpPr>
-        <p:spPr>
-          <a:xfrm>
-            <a:off x="6172200" y="1371600"/>
-            <a:ext cx="4892040" cy="1920240"/>
-          </a:xfrm>
-          <a:prstGeom prst="roundRect">
-            <a:avLst/>
-          </a:prstGeom>
-          <a:solidFill>
-            <a:srgbClr val="E8F7F7"/>
-          </a:solidFill>
-          <a:ln w="12700">
-            <a:solidFill>
-              <a:srgbClr val="00A6A6"/>
-            </a:solidFill>
-          </a:ln>
-        </p:spPr>
-        <p:style>
-          <a:lnRef idx="1">
-            <a:schemeClr val="accent1"/>
-          </a:lnRef>
-          <a:fillRef idx="3">
-            <a:schemeClr val="accent1"/>
-          </a:fillRef>
-          <a:effectRef idx="2">
-            <a:schemeClr val="accent1"/>
-          </a:effectRef>
-          <a:fontRef idx="minor">
-            <a:schemeClr val="lt1"/>
-          </a:fontRef>
-        </p:style>
-        <p:txBody>
-          <a:bodyPr rtlCol="0" anchor="ctr"/>
-          <a:lstStyle/>
-          <a:p>
-            <a:pPr algn="ctr"/>
-            <a:endParaRPr/>
-          </a:p>
-        </p:txBody>
-      </p:sp>
-      <p:sp>
-        <p:nvSpPr>
-          <p:cNvPr id="10" name="TextBox 9"/>
-          <p:cNvSpPr txBox="1"/>
-          <p:nvPr/>
-        </p:nvSpPr>
-        <p:spPr>
-          <a:xfrm>
-            <a:off x="6336792" y="1481328"/>
-            <a:ext cx="4562855" cy="320040"/>
-          </a:xfrm>
-          <a:prstGeom prst="rect">
-            <a:avLst/>
-          </a:prstGeom>
-          <a:noFill/>
-        </p:spPr>
-        <p:txBody>
-          <a:bodyPr wrap="square" lIns="45720" rIns="45720" anchor="ctr">
-            <a:spAutoFit/>
-          </a:bodyPr>
-          <a:lstStyle/>
-          <a:p>
-            <a:pPr algn="l"/>
-            <a:r>
-              <a:rPr sz="1500" b="1">
-                <a:solidFill>
-                  <a:srgbClr val="16324F"/>
-                </a:solidFill>
-                <a:latin typeface="Aptos"/>
-              </a:rPr>
-              <a:t>One calculation</a:t>
-            </a:r>
-          </a:p>
-        </p:txBody>
-      </p:sp>
-      <p:sp>
-        <p:nvSpPr>
-          <p:cNvPr id="11" name="TextBox 10"/>
-          <p:cNvSpPr txBox="1"/>
-          <p:nvPr/>
-        </p:nvSpPr>
-        <p:spPr>
-          <a:xfrm>
-            <a:off x="6336792" y="1847088"/>
-            <a:ext cx="4562855" cy="1353312"/>
-          </a:xfrm>
-          <a:prstGeom prst="rect">
-            <a:avLst/>
-          </a:prstGeom>
-          <a:noFill/>
-        </p:spPr>
-        <p:txBody>
-          <a:bodyPr wrap="square" lIns="45720" rIns="45720" anchor="t">
-            <a:spAutoFit/>
-          </a:bodyPr>
-          <a:lstStyle/>
-          <a:p>
-            <a:pPr algn="l"/>
-            <a:r>
-              <a:rPr sz="1300" b="0">
-                <a:solidFill>
-                  <a:srgbClr val="53616E"/>
-                </a:solidFill>
-                <a:latin typeface="Aptos"/>
-              </a:rPr>
-              <a:t>Derive H(z) and identify poles for a first- or second-order difference equation.</a:t>
-            </a:r>
-          </a:p>
-        </p:txBody>
-      </p:sp>
-      <p:sp>
-        <p:nvSpPr>
-          <p:cNvPr id="12" name="Rounded Rectangle 11"/>
-          <p:cNvSpPr/>
-          <p:nvPr/>
-        </p:nvSpPr>
-        <p:spPr>
-          <a:xfrm>
-            <a:off x="1143000" y="3977639"/>
-            <a:ext cx="9921240" cy="1005840"/>
-          </a:xfrm>
-          <a:prstGeom prst="roundRect">
-            <a:avLst/>
-          </a:prstGeom>
-          <a:solidFill>
-            <a:srgbClr val="FFFFFF"/>
-          </a:solidFill>
-          <a:ln w="12700">
-            <a:solidFill>
-              <a:srgbClr val="DCE6EC"/>
-            </a:solidFill>
-          </a:ln>
-        </p:spPr>
-        <p:style>
-          <a:lnRef idx="1">
-            <a:schemeClr val="accent1"/>
-          </a:lnRef>
-          <a:fillRef idx="3">
-            <a:schemeClr val="accent1"/>
-          </a:fillRef>
-          <a:effectRef idx="2">
-            <a:schemeClr val="accent1"/>
-          </a:effectRef>
-          <a:fontRef idx="minor">
-            <a:schemeClr val="lt1"/>
-          </a:fontRef>
-        </p:style>
-        <p:txBody>
-          <a:bodyPr rtlCol="0" anchor="ctr"/>
-          <a:lstStyle/>
-          <a:p>
-            <a:pPr algn="ctr"/>
-            <a:endParaRPr/>
-          </a:p>
-        </p:txBody>
-      </p:sp>
-      <p:sp>
-        <p:nvSpPr>
-          <p:cNvPr id="13" name="TextBox 12"/>
-          <p:cNvSpPr txBox="1"/>
-          <p:nvPr/>
-        </p:nvSpPr>
-        <p:spPr>
-          <a:xfrm>
-            <a:off x="1417320" y="4224528"/>
-            <a:ext cx="9372600" cy="502920"/>
-          </a:xfrm>
-          <a:prstGeom prst="rect">
-            <a:avLst/>
-          </a:prstGeom>
-          <a:noFill/>
-        </p:spPr>
-        <p:txBody>
-          <a:bodyPr wrap="square" lIns="45720" rIns="45720" anchor="ctr">
-            <a:spAutoFit/>
-          </a:bodyPr>
-          <a:lstStyle/>
-          <a:p>
-            <a:pPr algn="ctr"/>
-            <a:r>
-              <a:rPr sz="1900" b="1">
-                <a:solidFill>
-                  <a:srgbClr val="16324F"/>
-                </a:solidFill>
-                <a:latin typeface="Aptos"/>
-              </a:rPr>
-              <a:t>Solutions and grading notes are in the accompanying Week 3 homework + quiz handout.</a:t>
-            </a:r>
-          </a:p>
-        </p:txBody>
-      </p:sp>
-      <p:sp>
-        <p:nvSpPr>
-          <p:cNvPr id="14" name="TextBox 13"/>
-          <p:cNvSpPr txBox="1"/>
-          <p:nvPr/>
-        </p:nvSpPr>
-        <p:spPr>
-          <a:xfrm>
-            <a:off x="566928" y="6473952"/>
-            <a:ext cx="4754880" cy="164592"/>
-          </a:xfrm>
-          <a:prstGeom prst="rect">
-            <a:avLst/>
-          </a:prstGeom>
-          <a:noFill/>
-        </p:spPr>
-        <p:txBody>
-          <a:bodyPr wrap="square" lIns="45720" rIns="45720" anchor="ctr">
-            <a:spAutoFit/>
-          </a:bodyPr>
-          <a:lstStyle/>
-          <a:p>
-            <a:pPr algn="l"/>
-            <a:r>
-              <a:rPr sz="800" b="0">
-                <a:solidFill>
-                  <a:srgbClr val="53616E"/>
-                </a:solidFill>
-                <a:latin typeface="Aptos"/>
-              </a:rPr>
-              <a:t>Week 3 • DSP + ML • Oppenheim &amp; Schafer</a:t>
-            </a:r>
-          </a:p>
-        </p:txBody>
-      </p:sp>
-      <p:sp>
-        <p:nvSpPr>
-          <p:cNvPr id="15" name="TextBox 14"/>
-          <p:cNvSpPr txBox="1"/>
-          <p:nvPr/>
-        </p:nvSpPr>
-        <p:spPr>
-          <a:xfrm>
-            <a:off x="11201400" y="6473952"/>
-            <a:ext cx="320040" cy="164592"/>
-          </a:xfrm>
-          <a:prstGeom prst="rect">
-            <a:avLst/>
-          </a:prstGeom>
-          <a:noFill/>
-        </p:spPr>
-        <p:txBody>
-          <a:bodyPr wrap="square" lIns="45720" rIns="45720" anchor="ctr">
-            <a:spAutoFit/>
-          </a:bodyPr>
-          <a:lstStyle/>
-          <a:p>
-            <a:pPr algn="r"/>
-            <a:r>
-              <a:rPr sz="800" b="0">
-                <a:solidFill>
-                  <a:srgbClr val="53616E"/>
-                </a:solidFill>
-                <a:latin typeface="Aptos"/>
-              </a:rPr>
-              <a:t>22</a:t>
-            </a:r>
-          </a:p>
-        </p:txBody>
-      </p:sp>
-    </p:spTree>
-  </p:cSld>
-  <p:clrMapOvr>
-    <a:masterClrMapping/>
-  </p:clrMapOvr>
-</p:sld>
-</file>
-
 <file path=ppt/slides/slide27.xml><?xml version="1.0" encoding="utf-8"?>
 <p:sld xmlns:a="http://schemas.openxmlformats.org/drawingml/2006/main" xmlns:r="http://schemas.openxmlformats.org/officeDocument/2006/relationships" xmlns:p="http://schemas.openxmlformats.org/presentationml/2006/main">
   <p:cSld>
@@ -13115,7 +12748,7 @@
                 </a:solidFill>
                 <a:latin typeface="Aptos"/>
               </a:rPr>
-              <a:t>Board reserve: coefficient ↔ root sanity checks</a:t>
+              <a:t>Weekly quiz</a:t>
             </a:r>
           </a:p>
         </p:txBody>
@@ -13196,7 +12829,7 @@
                 </a:solidFill>
                 <a:latin typeface="Aptos"/>
               </a:rPr>
-              <a:t>RESERVE</a:t>
+              <a:t>ASSESSMENT</a:t>
             </a:r>
           </a:p>
         </p:txBody>
@@ -13231,56 +12864,137 @@
                 </a:solidFill>
                 <a:latin typeface="Aptos"/>
               </a:rPr>
-              <a:t>Useful when students get lost in z⁻¹ polynomial conventions.</a:t>
-            </a:r>
-          </a:p>
-        </p:txBody>
-      </p:sp>
-      <p:sp>
-        <p:nvSpPr>
-          <p:cNvPr id="6" name="TextBox 5"/>
-          <p:cNvSpPr txBox="1"/>
-          <p:nvPr/>
-        </p:nvSpPr>
-        <p:spPr>
-          <a:xfrm>
-            <a:off x="914400" y="1417320"/>
-            <a:ext cx="10241280" cy="594360"/>
-          </a:xfrm>
-          <a:prstGeom prst="rect">
-            <a:avLst/>
-          </a:prstGeom>
-          <a:noFill/>
-        </p:spPr>
-        <p:txBody>
-          <a:bodyPr wrap="square" lIns="45720" rIns="45720" anchor="ctr">
-            <a:spAutoFit/>
-          </a:bodyPr>
-          <a:lstStyle/>
-          <a:p>
-            <a:pPr algn="ctr"/>
-            <a:r>
-              <a:rPr sz="2300" b="1">
+              <a:t>Suggested: 15 minutes at the start of Week 4 or end of Lecture 6.</a:t>
+            </a:r>
+          </a:p>
+        </p:txBody>
+      </p:sp>
+      <p:sp>
+        <p:nvSpPr>
+          <p:cNvPr id="6" name="Rounded Rectangle 5"/>
+          <p:cNvSpPr/>
+          <p:nvPr/>
+        </p:nvSpPr>
+        <p:spPr>
+          <a:xfrm>
+            <a:off x="914400" y="1371600"/>
+            <a:ext cx="4892040" cy="1920240"/>
+          </a:xfrm>
+          <a:prstGeom prst="roundRect">
+            <a:avLst/>
+          </a:prstGeom>
+          <a:solidFill>
+            <a:srgbClr val="EDF3F7"/>
+          </a:solidFill>
+          <a:ln w="12700">
+            <a:solidFill>
+              <a:srgbClr val="DCE6EC"/>
+            </a:solidFill>
+          </a:ln>
+        </p:spPr>
+        <p:style>
+          <a:lnRef idx="1">
+            <a:schemeClr val="accent1"/>
+          </a:lnRef>
+          <a:fillRef idx="3">
+            <a:schemeClr val="accent1"/>
+          </a:fillRef>
+          <a:effectRef idx="2">
+            <a:schemeClr val="accent1"/>
+          </a:effectRef>
+          <a:fontRef idx="minor">
+            <a:schemeClr val="lt1"/>
+          </a:fontRef>
+        </p:style>
+        <p:txBody>
+          <a:bodyPr rtlCol="0" anchor="ctr"/>
+          <a:lstStyle/>
+          <a:p>
+            <a:pPr algn="ctr"/>
+            <a:endParaRPr/>
+          </a:p>
+        </p:txBody>
+      </p:sp>
+      <p:sp>
+        <p:nvSpPr>
+          <p:cNvPr id="7" name="TextBox 6"/>
+          <p:cNvSpPr txBox="1"/>
+          <p:nvPr/>
+        </p:nvSpPr>
+        <p:spPr>
+          <a:xfrm>
+            <a:off x="1078992" y="1481328"/>
+            <a:ext cx="4562855" cy="320040"/>
+          </a:xfrm>
+          <a:prstGeom prst="rect">
+            <a:avLst/>
+          </a:prstGeom>
+          <a:noFill/>
+        </p:spPr>
+        <p:txBody>
+          <a:bodyPr wrap="square" lIns="45720" rIns="45720" anchor="ctr">
+            <a:spAutoFit/>
+          </a:bodyPr>
+          <a:lstStyle/>
+          <a:p>
+            <a:pPr algn="l"/>
+            <a:r>
+              <a:rPr sz="1500" b="1">
                 <a:solidFill>
                   <a:srgbClr val="16324F"/>
                 </a:solidFill>
                 <a:latin typeface="Aptos"/>
               </a:rPr>
-              <a:t>1 − 1.4z⁻¹ + 0.45z⁻² = (1 − 0.5z⁻¹)(1 − 0.9z⁻¹)</a:t>
-            </a:r>
-          </a:p>
-        </p:txBody>
-      </p:sp>
-      <p:sp>
-        <p:nvSpPr>
-          <p:cNvPr id="7" name="Rounded Rectangle 6"/>
+              <a:t>Core skills</a:t>
+            </a:r>
+          </a:p>
+        </p:txBody>
+      </p:sp>
+      <p:sp>
+        <p:nvSpPr>
+          <p:cNvPr id="8" name="TextBox 7"/>
+          <p:cNvSpPr txBox="1"/>
+          <p:nvPr/>
+        </p:nvSpPr>
+        <p:spPr>
+          <a:xfrm>
+            <a:off x="1078992" y="1847088"/>
+            <a:ext cx="4562855" cy="1353312"/>
+          </a:xfrm>
+          <a:prstGeom prst="rect">
+            <a:avLst/>
+          </a:prstGeom>
+          <a:noFill/>
+        </p:spPr>
+        <p:txBody>
+          <a:bodyPr wrap="square" lIns="45720" rIns="45720" anchor="t">
+            <a:spAutoFit/>
+          </a:bodyPr>
+          <a:lstStyle/>
+          <a:p>
+            <a:pPr algn="l"/>
+            <a:r>
+              <a:rPr sz="1300" b="0">
+                <a:solidFill>
+                  <a:srgbClr val="53616E"/>
+                </a:solidFill>
+                <a:latin typeface="Aptos"/>
+              </a:rPr>
+              <a:t>z-transform + ROC interpretation; inverse transform by PFE; transfer-function poles/zeros; causality/stability; geometric response.</a:t>
+            </a:r>
+          </a:p>
+        </p:txBody>
+      </p:sp>
+      <p:sp>
+        <p:nvSpPr>
+          <p:cNvPr id="9" name="Rounded Rectangle 8"/>
           <p:cNvSpPr/>
           <p:nvPr/>
         </p:nvSpPr>
         <p:spPr>
           <a:xfrm>
-            <a:off x="1005840" y="2560320"/>
-            <a:ext cx="2926080" cy="1371600"/>
+            <a:off x="6172200" y="1371600"/>
+            <a:ext cx="4892040" cy="1920240"/>
           </a:xfrm>
           <a:prstGeom prst="roundRect">
             <a:avLst/>
@@ -13319,14 +13033,14 @@
       </p:sp>
       <p:sp>
         <p:nvSpPr>
-          <p:cNvPr id="8" name="TextBox 7"/>
-          <p:cNvSpPr txBox="1"/>
-          <p:nvPr/>
-        </p:nvSpPr>
-        <p:spPr>
-          <a:xfrm>
-            <a:off x="1170432" y="2670048"/>
-            <a:ext cx="2596896" cy="320040"/>
+          <p:cNvPr id="10" name="TextBox 9"/>
+          <p:cNvSpPr txBox="1"/>
+          <p:nvPr/>
+        </p:nvSpPr>
+        <p:spPr>
+          <a:xfrm>
+            <a:off x="6336792" y="1481328"/>
+            <a:ext cx="4562855" cy="320040"/>
           </a:xfrm>
           <a:prstGeom prst="rect">
             <a:avLst/>
@@ -13347,183 +13061,56 @@
                 </a:solidFill>
                 <a:latin typeface="Aptos"/>
               </a:rPr>
-              <a:t>Poles</a:t>
-            </a:r>
-          </a:p>
-        </p:txBody>
-      </p:sp>
-      <p:sp>
-        <p:nvSpPr>
-          <p:cNvPr id="10" name="Rounded Rectangle 9"/>
+              <a:t>One calculation</a:t>
+            </a:r>
+          </a:p>
+        </p:txBody>
+      </p:sp>
+      <p:sp>
+        <p:nvSpPr>
+          <p:cNvPr id="11" name="TextBox 10"/>
+          <p:cNvSpPr txBox="1"/>
+          <p:nvPr/>
+        </p:nvSpPr>
+        <p:spPr>
+          <a:xfrm>
+            <a:off x="6336792" y="1847088"/>
+            <a:ext cx="4562855" cy="1353312"/>
+          </a:xfrm>
+          <a:prstGeom prst="rect">
+            <a:avLst/>
+          </a:prstGeom>
+          <a:noFill/>
+        </p:spPr>
+        <p:txBody>
+          <a:bodyPr wrap="square" lIns="45720" rIns="45720" anchor="t">
+            <a:spAutoFit/>
+          </a:bodyPr>
+          <a:lstStyle/>
+          <a:p>
+            <a:pPr algn="l"/>
+            <a:r>
+              <a:rPr sz="1300" b="0">
+                <a:solidFill>
+                  <a:srgbClr val="53616E"/>
+                </a:solidFill>
+                <a:latin typeface="Aptos"/>
+              </a:rPr>
+              <a:t>Derive H(z) and identify poles for a first- or second-order difference equation.</a:t>
+            </a:r>
+          </a:p>
+        </p:txBody>
+      </p:sp>
+      <p:sp>
+        <p:nvSpPr>
+          <p:cNvPr id="12" name="Rounded Rectangle 11"/>
           <p:cNvSpPr/>
           <p:nvPr/>
         </p:nvSpPr>
         <p:spPr>
           <a:xfrm>
-            <a:off x="4617720" y="2560320"/>
-            <a:ext cx="2926080" cy="1371600"/>
-          </a:xfrm>
-          <a:prstGeom prst="roundRect">
-            <a:avLst/>
-          </a:prstGeom>
-          <a:solidFill>
-            <a:srgbClr val="EDF3F7"/>
-          </a:solidFill>
-          <a:ln w="12700">
-            <a:solidFill>
-              <a:srgbClr val="DCE6EC"/>
-            </a:solidFill>
-          </a:ln>
-        </p:spPr>
-        <p:style>
-          <a:lnRef idx="1">
-            <a:schemeClr val="accent1"/>
-          </a:lnRef>
-          <a:fillRef idx="3">
-            <a:schemeClr val="accent1"/>
-          </a:fillRef>
-          <a:effectRef idx="2">
-            <a:schemeClr val="accent1"/>
-          </a:effectRef>
-          <a:fontRef idx="minor">
-            <a:schemeClr val="lt1"/>
-          </a:fontRef>
-        </p:style>
-        <p:txBody>
-          <a:bodyPr rtlCol="0" anchor="ctr"/>
-          <a:lstStyle/>
-          <a:p>
-            <a:pPr algn="ctr"/>
-            <a:endParaRPr/>
-          </a:p>
-        </p:txBody>
-      </p:sp>
-      <p:sp>
-        <p:nvSpPr>
-          <p:cNvPr id="11" name="TextBox 10"/>
-          <p:cNvSpPr txBox="1"/>
-          <p:nvPr/>
-        </p:nvSpPr>
-        <p:spPr>
-          <a:xfrm>
-            <a:off x="4782312" y="2670048"/>
-            <a:ext cx="2596896" cy="320040"/>
-          </a:xfrm>
-          <a:prstGeom prst="rect">
-            <a:avLst/>
-          </a:prstGeom>
-          <a:noFill/>
-        </p:spPr>
-        <p:txBody>
-          <a:bodyPr wrap="square" lIns="45720" rIns="45720" anchor="ctr">
-            <a:spAutoFit/>
-          </a:bodyPr>
-          <a:lstStyle/>
-          <a:p>
-            <a:pPr algn="l"/>
-            <a:r>
-              <a:rPr sz="1500" b="1">
-                <a:solidFill>
-                  <a:srgbClr val="16324F"/>
-                </a:solidFill>
-                <a:latin typeface="Aptos"/>
-              </a:rPr>
-              <a:t>Causal ROC</a:t>
-            </a:r>
-          </a:p>
-        </p:txBody>
-      </p:sp>
-      <p:sp>
-        <p:nvSpPr>
-          <p:cNvPr id="13" name="Rounded Rectangle 12"/>
-          <p:cNvSpPr/>
-          <p:nvPr/>
-        </p:nvSpPr>
-        <p:spPr>
-          <a:xfrm>
-            <a:off x="8229600" y="2560320"/>
-            <a:ext cx="2926080" cy="1371600"/>
-          </a:xfrm>
-          <a:prstGeom prst="roundRect">
-            <a:avLst/>
-          </a:prstGeom>
-          <a:solidFill>
-            <a:srgbClr val="FFF2E6"/>
-          </a:solidFill>
-          <a:ln w="12700">
-            <a:solidFill>
-              <a:srgbClr val="F28E2B"/>
-            </a:solidFill>
-          </a:ln>
-        </p:spPr>
-        <p:style>
-          <a:lnRef idx="1">
-            <a:schemeClr val="accent1"/>
-          </a:lnRef>
-          <a:fillRef idx="3">
-            <a:schemeClr val="accent1"/>
-          </a:fillRef>
-          <a:effectRef idx="2">
-            <a:schemeClr val="accent1"/>
-          </a:effectRef>
-          <a:fontRef idx="minor">
-            <a:schemeClr val="lt1"/>
-          </a:fontRef>
-        </p:style>
-        <p:txBody>
-          <a:bodyPr rtlCol="0" anchor="ctr"/>
-          <a:lstStyle/>
-          <a:p>
-            <a:pPr algn="ctr"/>
-            <a:endParaRPr/>
-          </a:p>
-        </p:txBody>
-      </p:sp>
-      <p:sp>
-        <p:nvSpPr>
-          <p:cNvPr id="14" name="TextBox 13"/>
-          <p:cNvSpPr txBox="1"/>
-          <p:nvPr/>
-        </p:nvSpPr>
-        <p:spPr>
-          <a:xfrm>
-            <a:off x="8394192" y="2670048"/>
-            <a:ext cx="2596896" cy="320040"/>
-          </a:xfrm>
-          <a:prstGeom prst="rect">
-            <a:avLst/>
-          </a:prstGeom>
-          <a:noFill/>
-        </p:spPr>
-        <p:txBody>
-          <a:bodyPr wrap="square" lIns="45720" rIns="45720" anchor="ctr">
-            <a:spAutoFit/>
-          </a:bodyPr>
-          <a:lstStyle/>
-          <a:p>
-            <a:pPr algn="l"/>
-            <a:r>
-              <a:rPr sz="1500" b="1">
-                <a:solidFill>
-                  <a:srgbClr val="16324F"/>
-                </a:solidFill>
-                <a:latin typeface="Aptos"/>
-              </a:rPr>
-              <a:t>Stable?</a:t>
-            </a:r>
-          </a:p>
-        </p:txBody>
-      </p:sp>
-      <p:sp>
-        <p:nvSpPr>
-          <p:cNvPr id="16" name="Rounded Rectangle 15"/>
-          <p:cNvSpPr/>
-          <p:nvPr/>
-        </p:nvSpPr>
-        <p:spPr>
-          <a:xfrm>
-            <a:off x="1143000" y="4572000"/>
-            <a:ext cx="9875520" cy="822960"/>
+            <a:off x="1143000" y="3977639"/>
+            <a:ext cx="9921240" cy="1005840"/>
           </a:xfrm>
           <a:prstGeom prst="roundRect">
             <a:avLst/>
@@ -13562,42 +13149,42 @@
       </p:sp>
       <p:sp>
         <p:nvSpPr>
-          <p:cNvPr id="17" name="TextBox 16"/>
-          <p:cNvSpPr txBox="1"/>
-          <p:nvPr/>
-        </p:nvSpPr>
-        <p:spPr>
-          <a:xfrm>
-            <a:off x="1371600" y="4754880"/>
-            <a:ext cx="9418320" cy="457200"/>
-          </a:xfrm>
-          <a:prstGeom prst="rect">
-            <a:avLst/>
-          </a:prstGeom>
-          <a:noFill/>
-        </p:spPr>
-        <p:txBody>
-          <a:bodyPr wrap="square" lIns="45720" rIns="45720" anchor="ctr">
-            <a:spAutoFit/>
-          </a:bodyPr>
-          <a:lstStyle/>
-          <a:p>
-            <a:pPr algn="ctr"/>
-            <a:r>
-              <a:rPr sz="1700" b="1">
+          <p:cNvPr id="13" name="TextBox 12"/>
+          <p:cNvSpPr txBox="1"/>
+          <p:nvPr/>
+        </p:nvSpPr>
+        <p:spPr>
+          <a:xfrm>
+            <a:off x="1417320" y="4224528"/>
+            <a:ext cx="9372600" cy="502920"/>
+          </a:xfrm>
+          <a:prstGeom prst="rect">
+            <a:avLst/>
+          </a:prstGeom>
+          <a:noFill/>
+        </p:spPr>
+        <p:txBody>
+          <a:bodyPr wrap="square" lIns="45720" rIns="45720" anchor="ctr">
+            <a:spAutoFit/>
+          </a:bodyPr>
+          <a:lstStyle/>
+          <a:p>
+            <a:pPr algn="ctr"/>
+            <a:r>
+              <a:rPr sz="1900" b="1">
                 <a:solidFill>
                   <a:srgbClr val="16324F"/>
                 </a:solidFill>
                 <a:latin typeface="Aptos"/>
               </a:rPr>
-              <a:t>Fast check: for a causal rational system, if any pole magnitude ≥1, do not call it BIBO stable.</a:t>
-            </a:r>
-          </a:p>
-        </p:txBody>
-      </p:sp>
-      <p:sp>
-        <p:nvSpPr>
-          <p:cNvPr id="18" name="TextBox 17"/>
+              <a:t>Solutions and grading notes are in the accompanying Week 3 homework + quiz handout.</a:t>
+            </a:r>
+          </a:p>
+        </p:txBody>
+      </p:sp>
+      <p:sp>
+        <p:nvSpPr>
+          <p:cNvPr id="14" name="TextBox 13"/>
           <p:cNvSpPr txBox="1"/>
           <p:nvPr/>
         </p:nvSpPr>
@@ -13632,7 +13219,7 @@
       </p:sp>
       <p:sp>
         <p:nvSpPr>
-          <p:cNvPr id="19" name="TextBox 18"/>
+          <p:cNvPr id="15" name="TextBox 14"/>
           <p:cNvSpPr txBox="1"/>
           <p:nvPr/>
         </p:nvSpPr>
@@ -13660,7 +13247,7 @@
                 </a:solidFill>
                 <a:latin typeface="Aptos"/>
               </a:rPr>
-              <a:t>23</a:t>
+              <a:t>22</a:t>
             </a:r>
           </a:p>
         </p:txBody>
@@ -13674,6 +13261,611 @@
 </file>
 
 <file path=ppt/slides/slide28.xml><?xml version="1.0" encoding="utf-8"?>
+<p:sld xmlns:a="http://schemas.openxmlformats.org/drawingml/2006/main" xmlns:r="http://schemas.openxmlformats.org/officeDocument/2006/relationships" xmlns:p="http://schemas.openxmlformats.org/presentationml/2006/main">
+  <p:cSld>
+    <p:spTree>
+      <p:nvGrpSpPr>
+        <p:cNvPr id="1" name=""/>
+        <p:cNvGrpSpPr/>
+        <p:nvPr/>
+      </p:nvGrpSpPr>
+      <p:grpSpPr>
+        <a:xfrm>
+          <a:off x="0" y="0"/>
+          <a:ext cx="0" cy="0"/>
+          <a:chOff x="0" y="0"/>
+          <a:chExt cx="0" cy="0"/>
+        </a:xfrm>
+      </p:grpSpPr>
+      <p:sp>
+        <p:nvSpPr>
+          <p:cNvPr id="2" name="TextBox 1"/>
+          <p:cNvSpPr txBox="1"/>
+          <p:nvPr/>
+        </p:nvSpPr>
+        <p:spPr>
+          <a:xfrm>
+            <a:off x="566928" y="301752"/>
+            <a:ext cx="9692640" cy="438912"/>
+          </a:xfrm>
+          <a:prstGeom prst="rect">
+            <a:avLst/>
+          </a:prstGeom>
+          <a:noFill/>
+        </p:spPr>
+        <p:txBody>
+          <a:bodyPr wrap="square" lIns="45720" rIns="45720" anchor="ctr">
+            <a:spAutoFit/>
+          </a:bodyPr>
+          <a:lstStyle/>
+          <a:p>
+            <a:pPr algn="l"/>
+            <a:r>
+              <a:rPr sz="2400" b="1">
+                <a:solidFill>
+                  <a:srgbClr val="16324F"/>
+                </a:solidFill>
+                <a:latin typeface="Aptos"/>
+              </a:rPr>
+              <a:t>Board reserve: coefficient ↔ root sanity checks</a:t>
+            </a:r>
+          </a:p>
+        </p:txBody>
+      </p:sp>
+      <p:sp>
+        <p:nvSpPr>
+          <p:cNvPr id="3" name="Rounded Rectangle 2"/>
+          <p:cNvSpPr/>
+          <p:nvPr/>
+        </p:nvSpPr>
+        <p:spPr>
+          <a:xfrm>
+            <a:off x="10332720" y="283464"/>
+            <a:ext cx="1234440" cy="347472"/>
+          </a:xfrm>
+          <a:prstGeom prst="roundRect">
+            <a:avLst/>
+          </a:prstGeom>
+          <a:solidFill>
+            <a:srgbClr val="E8F7F7"/>
+          </a:solidFill>
+          <a:ln w="12700">
+            <a:solidFill>
+              <a:srgbClr val="00A6A6"/>
+            </a:solidFill>
+          </a:ln>
+        </p:spPr>
+        <p:style>
+          <a:lnRef idx="1">
+            <a:schemeClr val="accent1"/>
+          </a:lnRef>
+          <a:fillRef idx="3">
+            <a:schemeClr val="accent1"/>
+          </a:fillRef>
+          <a:effectRef idx="2">
+            <a:schemeClr val="accent1"/>
+          </a:effectRef>
+          <a:fontRef idx="minor">
+            <a:schemeClr val="lt1"/>
+          </a:fontRef>
+        </p:style>
+        <p:txBody>
+          <a:bodyPr rtlCol="0" anchor="ctr"/>
+          <a:lstStyle/>
+          <a:p>
+            <a:pPr algn="ctr"/>
+            <a:endParaRPr/>
+          </a:p>
+        </p:txBody>
+      </p:sp>
+      <p:sp>
+        <p:nvSpPr>
+          <p:cNvPr id="4" name="TextBox 3"/>
+          <p:cNvSpPr txBox="1"/>
+          <p:nvPr/>
+        </p:nvSpPr>
+        <p:spPr>
+          <a:xfrm>
+            <a:off x="10351008" y="292608"/>
+            <a:ext cx="1197864" cy="310896"/>
+          </a:xfrm>
+          <a:prstGeom prst="rect">
+            <a:avLst/>
+          </a:prstGeom>
+          <a:noFill/>
+        </p:spPr>
+        <p:txBody>
+          <a:bodyPr wrap="square" lIns="45720" rIns="45720" anchor="ctr">
+            <a:spAutoFit/>
+          </a:bodyPr>
+          <a:lstStyle/>
+          <a:p>
+            <a:pPr algn="ctr"/>
+            <a:r>
+              <a:rPr sz="1100" b="1">
+                <a:solidFill>
+                  <a:srgbClr val="16324F"/>
+                </a:solidFill>
+                <a:latin typeface="Aptos"/>
+              </a:rPr>
+              <a:t>RESERVE</a:t>
+            </a:r>
+          </a:p>
+        </p:txBody>
+      </p:sp>
+      <p:sp>
+        <p:nvSpPr>
+          <p:cNvPr id="5" name="TextBox 4"/>
+          <p:cNvSpPr txBox="1"/>
+          <p:nvPr/>
+        </p:nvSpPr>
+        <p:spPr>
+          <a:xfrm>
+            <a:off x="594360" y="786384"/>
+            <a:ext cx="10652760" cy="329184"/>
+          </a:xfrm>
+          <a:prstGeom prst="rect">
+            <a:avLst/>
+          </a:prstGeom>
+          <a:noFill/>
+        </p:spPr>
+        <p:txBody>
+          <a:bodyPr wrap="square" lIns="45720" rIns="45720" anchor="ctr">
+            <a:spAutoFit/>
+          </a:bodyPr>
+          <a:lstStyle/>
+          <a:p>
+            <a:pPr algn="l"/>
+            <a:r>
+              <a:rPr sz="1200" b="0">
+                <a:solidFill>
+                  <a:srgbClr val="53616E"/>
+                </a:solidFill>
+                <a:latin typeface="Aptos"/>
+              </a:rPr>
+              <a:t>Useful when students get lost in z⁻¹ polynomial conventions.</a:t>
+            </a:r>
+          </a:p>
+        </p:txBody>
+      </p:sp>
+      <p:sp>
+        <p:nvSpPr>
+          <p:cNvPr id="6" name="TextBox 5"/>
+          <p:cNvSpPr txBox="1"/>
+          <p:nvPr/>
+        </p:nvSpPr>
+        <p:spPr>
+          <a:xfrm>
+            <a:off x="914400" y="1417320"/>
+            <a:ext cx="10241280" cy="594360"/>
+          </a:xfrm>
+          <a:prstGeom prst="rect">
+            <a:avLst/>
+          </a:prstGeom>
+          <a:noFill/>
+        </p:spPr>
+        <p:txBody>
+          <a:bodyPr wrap="square" lIns="45720" rIns="45720" anchor="ctr">
+            <a:spAutoFit/>
+          </a:bodyPr>
+          <a:lstStyle/>
+          <a:p>
+            <a:pPr algn="ctr"/>
+            <a:r>
+              <a:rPr sz="2300" b="1">
+                <a:solidFill>
+                  <a:srgbClr val="16324F"/>
+                </a:solidFill>
+                <a:latin typeface="Aptos"/>
+              </a:rPr>
+              <a:t>1 − 1.4z⁻¹ + 0.45z⁻² = (1 − 0.5z⁻¹)(1 − 0.9z⁻¹)</a:t>
+            </a:r>
+          </a:p>
+        </p:txBody>
+      </p:sp>
+      <p:sp>
+        <p:nvSpPr>
+          <p:cNvPr id="7" name="Rounded Rectangle 6"/>
+          <p:cNvSpPr/>
+          <p:nvPr/>
+        </p:nvSpPr>
+        <p:spPr>
+          <a:xfrm>
+            <a:off x="1005840" y="2560320"/>
+            <a:ext cx="2926080" cy="1371600"/>
+          </a:xfrm>
+          <a:prstGeom prst="roundRect">
+            <a:avLst/>
+          </a:prstGeom>
+          <a:solidFill>
+            <a:srgbClr val="E8F7F7"/>
+          </a:solidFill>
+          <a:ln w="12700">
+            <a:solidFill>
+              <a:srgbClr val="00A6A6"/>
+            </a:solidFill>
+          </a:ln>
+        </p:spPr>
+        <p:style>
+          <a:lnRef idx="1">
+            <a:schemeClr val="accent1"/>
+          </a:lnRef>
+          <a:fillRef idx="3">
+            <a:schemeClr val="accent1"/>
+          </a:fillRef>
+          <a:effectRef idx="2">
+            <a:schemeClr val="accent1"/>
+          </a:effectRef>
+          <a:fontRef idx="minor">
+            <a:schemeClr val="lt1"/>
+          </a:fontRef>
+        </p:style>
+        <p:txBody>
+          <a:bodyPr rtlCol="0" anchor="ctr"/>
+          <a:lstStyle/>
+          <a:p>
+            <a:pPr algn="ctr"/>
+            <a:endParaRPr/>
+          </a:p>
+        </p:txBody>
+      </p:sp>
+      <p:sp>
+        <p:nvSpPr>
+          <p:cNvPr id="8" name="TextBox 7"/>
+          <p:cNvSpPr txBox="1"/>
+          <p:nvPr/>
+        </p:nvSpPr>
+        <p:spPr>
+          <a:xfrm>
+            <a:off x="1170432" y="2670048"/>
+            <a:ext cx="2596896" cy="320040"/>
+          </a:xfrm>
+          <a:prstGeom prst="rect">
+            <a:avLst/>
+          </a:prstGeom>
+          <a:noFill/>
+        </p:spPr>
+        <p:txBody>
+          <a:bodyPr wrap="square" lIns="45720" rIns="45720" anchor="ctr">
+            <a:spAutoFit/>
+          </a:bodyPr>
+          <a:lstStyle/>
+          <a:p>
+            <a:pPr algn="l"/>
+            <a:r>
+              <a:rPr sz="1500" b="1">
+                <a:solidFill>
+                  <a:srgbClr val="16324F"/>
+                </a:solidFill>
+                <a:latin typeface="Aptos"/>
+              </a:rPr>
+              <a:t>Poles</a:t>
+            </a:r>
+          </a:p>
+        </p:txBody>
+      </p:sp>
+      <p:sp>
+        <p:nvSpPr>
+          <p:cNvPr id="10" name="Rounded Rectangle 9"/>
+          <p:cNvSpPr/>
+          <p:nvPr/>
+        </p:nvSpPr>
+        <p:spPr>
+          <a:xfrm>
+            <a:off x="4617720" y="2560320"/>
+            <a:ext cx="2926080" cy="1371600"/>
+          </a:xfrm>
+          <a:prstGeom prst="roundRect">
+            <a:avLst/>
+          </a:prstGeom>
+          <a:solidFill>
+            <a:srgbClr val="EDF3F7"/>
+          </a:solidFill>
+          <a:ln w="12700">
+            <a:solidFill>
+              <a:srgbClr val="DCE6EC"/>
+            </a:solidFill>
+          </a:ln>
+        </p:spPr>
+        <p:style>
+          <a:lnRef idx="1">
+            <a:schemeClr val="accent1"/>
+          </a:lnRef>
+          <a:fillRef idx="3">
+            <a:schemeClr val="accent1"/>
+          </a:fillRef>
+          <a:effectRef idx="2">
+            <a:schemeClr val="accent1"/>
+          </a:effectRef>
+          <a:fontRef idx="minor">
+            <a:schemeClr val="lt1"/>
+          </a:fontRef>
+        </p:style>
+        <p:txBody>
+          <a:bodyPr rtlCol="0" anchor="ctr"/>
+          <a:lstStyle/>
+          <a:p>
+            <a:pPr algn="ctr"/>
+            <a:endParaRPr/>
+          </a:p>
+        </p:txBody>
+      </p:sp>
+      <p:sp>
+        <p:nvSpPr>
+          <p:cNvPr id="11" name="TextBox 10"/>
+          <p:cNvSpPr txBox="1"/>
+          <p:nvPr/>
+        </p:nvSpPr>
+        <p:spPr>
+          <a:xfrm>
+            <a:off x="4782312" y="2670048"/>
+            <a:ext cx="2596896" cy="320040"/>
+          </a:xfrm>
+          <a:prstGeom prst="rect">
+            <a:avLst/>
+          </a:prstGeom>
+          <a:noFill/>
+        </p:spPr>
+        <p:txBody>
+          <a:bodyPr wrap="square" lIns="45720" rIns="45720" anchor="ctr">
+            <a:spAutoFit/>
+          </a:bodyPr>
+          <a:lstStyle/>
+          <a:p>
+            <a:pPr algn="l"/>
+            <a:r>
+              <a:rPr sz="1500" b="1">
+                <a:solidFill>
+                  <a:srgbClr val="16324F"/>
+                </a:solidFill>
+                <a:latin typeface="Aptos"/>
+              </a:rPr>
+              <a:t>Causal ROC</a:t>
+            </a:r>
+          </a:p>
+        </p:txBody>
+      </p:sp>
+      <p:sp>
+        <p:nvSpPr>
+          <p:cNvPr id="13" name="Rounded Rectangle 12"/>
+          <p:cNvSpPr/>
+          <p:nvPr/>
+        </p:nvSpPr>
+        <p:spPr>
+          <a:xfrm>
+            <a:off x="8229600" y="2560320"/>
+            <a:ext cx="2926080" cy="1371600"/>
+          </a:xfrm>
+          <a:prstGeom prst="roundRect">
+            <a:avLst/>
+          </a:prstGeom>
+          <a:solidFill>
+            <a:srgbClr val="FFF2E6"/>
+          </a:solidFill>
+          <a:ln w="12700">
+            <a:solidFill>
+              <a:srgbClr val="F28E2B"/>
+            </a:solidFill>
+          </a:ln>
+        </p:spPr>
+        <p:style>
+          <a:lnRef idx="1">
+            <a:schemeClr val="accent1"/>
+          </a:lnRef>
+          <a:fillRef idx="3">
+            <a:schemeClr val="accent1"/>
+          </a:fillRef>
+          <a:effectRef idx="2">
+            <a:schemeClr val="accent1"/>
+          </a:effectRef>
+          <a:fontRef idx="minor">
+            <a:schemeClr val="lt1"/>
+          </a:fontRef>
+        </p:style>
+        <p:txBody>
+          <a:bodyPr rtlCol="0" anchor="ctr"/>
+          <a:lstStyle/>
+          <a:p>
+            <a:pPr algn="ctr"/>
+            <a:endParaRPr/>
+          </a:p>
+        </p:txBody>
+      </p:sp>
+      <p:sp>
+        <p:nvSpPr>
+          <p:cNvPr id="14" name="TextBox 13"/>
+          <p:cNvSpPr txBox="1"/>
+          <p:nvPr/>
+        </p:nvSpPr>
+        <p:spPr>
+          <a:xfrm>
+            <a:off x="8394192" y="2670048"/>
+            <a:ext cx="2596896" cy="320040"/>
+          </a:xfrm>
+          <a:prstGeom prst="rect">
+            <a:avLst/>
+          </a:prstGeom>
+          <a:noFill/>
+        </p:spPr>
+        <p:txBody>
+          <a:bodyPr wrap="square" lIns="45720" rIns="45720" anchor="ctr">
+            <a:spAutoFit/>
+          </a:bodyPr>
+          <a:lstStyle/>
+          <a:p>
+            <a:pPr algn="l"/>
+            <a:r>
+              <a:rPr sz="1500" b="1">
+                <a:solidFill>
+                  <a:srgbClr val="16324F"/>
+                </a:solidFill>
+                <a:latin typeface="Aptos"/>
+              </a:rPr>
+              <a:t>Stable?</a:t>
+            </a:r>
+          </a:p>
+        </p:txBody>
+      </p:sp>
+      <p:sp>
+        <p:nvSpPr>
+          <p:cNvPr id="16" name="Rounded Rectangle 15"/>
+          <p:cNvSpPr/>
+          <p:nvPr/>
+        </p:nvSpPr>
+        <p:spPr>
+          <a:xfrm>
+            <a:off x="1143000" y="4572000"/>
+            <a:ext cx="9875520" cy="822960"/>
+          </a:xfrm>
+          <a:prstGeom prst="roundRect">
+            <a:avLst/>
+          </a:prstGeom>
+          <a:solidFill>
+            <a:srgbClr val="FFFFFF"/>
+          </a:solidFill>
+          <a:ln w="12700">
+            <a:solidFill>
+              <a:srgbClr val="DCE6EC"/>
+            </a:solidFill>
+          </a:ln>
+        </p:spPr>
+        <p:style>
+          <a:lnRef idx="1">
+            <a:schemeClr val="accent1"/>
+          </a:lnRef>
+          <a:fillRef idx="3">
+            <a:schemeClr val="accent1"/>
+          </a:fillRef>
+          <a:effectRef idx="2">
+            <a:schemeClr val="accent1"/>
+          </a:effectRef>
+          <a:fontRef idx="minor">
+            <a:schemeClr val="lt1"/>
+          </a:fontRef>
+        </p:style>
+        <p:txBody>
+          <a:bodyPr rtlCol="0" anchor="ctr"/>
+          <a:lstStyle/>
+          <a:p>
+            <a:pPr algn="ctr"/>
+            <a:endParaRPr/>
+          </a:p>
+        </p:txBody>
+      </p:sp>
+      <p:sp>
+        <p:nvSpPr>
+          <p:cNvPr id="17" name="TextBox 16"/>
+          <p:cNvSpPr txBox="1"/>
+          <p:nvPr/>
+        </p:nvSpPr>
+        <p:spPr>
+          <a:xfrm>
+            <a:off x="1371600" y="4754880"/>
+            <a:ext cx="9418320" cy="457200"/>
+          </a:xfrm>
+          <a:prstGeom prst="rect">
+            <a:avLst/>
+          </a:prstGeom>
+          <a:noFill/>
+        </p:spPr>
+        <p:txBody>
+          <a:bodyPr wrap="square" lIns="45720" rIns="45720" anchor="ctr">
+            <a:spAutoFit/>
+          </a:bodyPr>
+          <a:lstStyle/>
+          <a:p>
+            <a:pPr algn="ctr"/>
+            <a:r>
+              <a:rPr sz="1700" b="1">
+                <a:solidFill>
+                  <a:srgbClr val="16324F"/>
+                </a:solidFill>
+                <a:latin typeface="Aptos"/>
+              </a:rPr>
+              <a:t>Fast check: for a causal rational system, if any pole magnitude ≥1, do not call it BIBO stable.</a:t>
+            </a:r>
+          </a:p>
+        </p:txBody>
+      </p:sp>
+      <p:sp>
+        <p:nvSpPr>
+          <p:cNvPr id="18" name="TextBox 17"/>
+          <p:cNvSpPr txBox="1"/>
+          <p:nvPr/>
+        </p:nvSpPr>
+        <p:spPr>
+          <a:xfrm>
+            <a:off x="566928" y="6473952"/>
+            <a:ext cx="4754880" cy="164592"/>
+          </a:xfrm>
+          <a:prstGeom prst="rect">
+            <a:avLst/>
+          </a:prstGeom>
+          <a:noFill/>
+        </p:spPr>
+        <p:txBody>
+          <a:bodyPr wrap="square" lIns="45720" rIns="45720" anchor="ctr">
+            <a:spAutoFit/>
+          </a:bodyPr>
+          <a:lstStyle/>
+          <a:p>
+            <a:pPr algn="l"/>
+            <a:r>
+              <a:rPr sz="800" b="0">
+                <a:solidFill>
+                  <a:srgbClr val="53616E"/>
+                </a:solidFill>
+                <a:latin typeface="Aptos"/>
+              </a:rPr>
+              <a:t>Week 3 • DSP + ML • Oppenheim &amp; Schafer</a:t>
+            </a:r>
+          </a:p>
+        </p:txBody>
+      </p:sp>
+      <p:sp>
+        <p:nvSpPr>
+          <p:cNvPr id="19" name="TextBox 18"/>
+          <p:cNvSpPr txBox="1"/>
+          <p:nvPr/>
+        </p:nvSpPr>
+        <p:spPr>
+          <a:xfrm>
+            <a:off x="11201400" y="6473952"/>
+            <a:ext cx="320040" cy="164592"/>
+          </a:xfrm>
+          <a:prstGeom prst="rect">
+            <a:avLst/>
+          </a:prstGeom>
+          <a:noFill/>
+        </p:spPr>
+        <p:txBody>
+          <a:bodyPr wrap="square" lIns="45720" rIns="45720" anchor="ctr">
+            <a:spAutoFit/>
+          </a:bodyPr>
+          <a:lstStyle/>
+          <a:p>
+            <a:pPr algn="r"/>
+            <a:r>
+              <a:rPr sz="800" b="0">
+                <a:solidFill>
+                  <a:srgbClr val="53616E"/>
+                </a:solidFill>
+                <a:latin typeface="Aptos"/>
+              </a:rPr>
+              <a:t>23</a:t>
+            </a:r>
+          </a:p>
+        </p:txBody>
+      </p:sp>
+    </p:spTree>
+  </p:cSld>
+  <p:clrMapOvr>
+    <a:masterClrMapping/>
+  </p:clrMapOvr>
+</p:sld>
+</file>
+
+<file path=ppt/slides/slide29.xml><?xml version="1.0" encoding="utf-8"?>
 <p:sld xmlns:a="http://schemas.openxmlformats.org/drawingml/2006/main" xmlns:r="http://schemas.openxmlformats.org/officeDocument/2006/relationships" xmlns:p="http://schemas.openxmlformats.org/presentationml/2006/main">
   <p:cSld>
     <p:spTree>
@@ -15035,7 +15227,7 @@
         </p:blipFill>
         <p:spPr>
           <a:xfrm>
-            <a:off x="1234440" y="1143000"/>
+            <a:off x="2115589" y="1194378"/>
             <a:ext cx="9692640" cy="1535468"/>
           </a:xfrm>
           <a:prstGeom prst="rect">
@@ -16675,8 +16867,8 @@
           </a:p>
         </p:txBody>
       </p:sp>
-      <mc:AlternateContent xmlns:mc="http://schemas.openxmlformats.org/markup-compatibility/2006">
-        <mc:Choice xmlns:a14="http://schemas.microsoft.com/office/drawing/2010/main" Requires="a14">
+      <mc:AlternateContent xmlns:mc="http://schemas.openxmlformats.org/markup-compatibility/2006" xmlns:a14="http://schemas.microsoft.com/office/drawing/2010/main">
+        <mc:Choice Requires="a14">
           <p:sp>
             <p:nvSpPr>
               <p:cNvPr id="9" name="TextBox 8"/>
@@ -16960,7 +17152,7 @@
             </p:txBody>
           </p:sp>
         </mc:Choice>
-        <mc:Fallback>
+        <mc:Fallback xmlns="">
           <p:sp>
             <p:nvSpPr>
               <p:cNvPr id="9" name="TextBox 8"/>
